--- a/project_46_manufacturing_defect_detection/presentations/project_presentation.pptx
+++ b/project_46_manufacturing_defect_detection/presentations/project_presentation.pptx
@@ -13,6 +13,13 @@
     <p:sldId id="261" r:id="rId12"/>
     <p:sldId id="262" r:id="rId13"/>
     <p:sldId id="263" r:id="rId14"/>
+    <p:sldId id="264" r:id="rId15"/>
+    <p:sldId id="265" r:id="rId16"/>
+    <p:sldId id="266" r:id="rId17"/>
+    <p:sldId id="267" r:id="rId18"/>
+    <p:sldId id="268" r:id="rId19"/>
+    <p:sldId id="269" r:id="rId20"/>
+    <p:sldId id="270" r:id="rId21"/>
   </p:sldIdLst>
   <p:sldSz cx="12191695" cy="6858000" type="screen4x3"/>
   <p:notesSz cx="6858000" cy="9144000"/>
@@ -3146,8 +3153,8 @@
         </p:nvSpPr>
         <p:spPr>
           <a:xfrm>
-            <a:off x="1097280" y="1645920"/>
-            <a:ext cx="10058400" cy="3474720"/>
+            <a:off x="914400" y="1645920"/>
+            <a:ext cx="10362895" cy="3657600"/>
           </a:xfrm>
           <a:prstGeom prst="rect">
             <a:avLst/>
@@ -3161,44 +3168,2372 @@
           <a:lstStyle/>
           <a:p>
             <a:pPr>
-              <a:defRPr sz="1400" b="1">
-                <a:solidFill>
-                  <a:srgbClr val="38BDF8"/>
-                </a:solidFill>
-              </a:defRPr>
-            </a:pPr>
-            <a:r>
-              <a:t>PROJECT 46 OF 55  •  RESEARCH &amp; IMPLEMENTATION DECK</a:t>
-            </a:r>
-          </a:p>
-          <a:p>
-            <a:pPr>
-              <a:spcBef>
+              <a:spcAft>
                 <a:spcPts val="1400"/>
-              </a:spcBef>
-              <a:defRPr sz="3200" b="1">
+              </a:spcAft>
+            </a:pPr>
+            <a:r>
+              <a:rPr b="1" sz="1200">
+                <a:solidFill>
+                  <a:srgbClr val="6366F1"/>
+                </a:solidFill>
+              </a:rPr>
+              <a:t>CAPSTONE VERIFICATION PORTFOLIO • PROJECT-046</a:t>
+            </a:r>
+          </a:p>
+          <a:p>
+            <a:pPr>
+              <a:spcAft>
+                <a:spcPts val="1600"/>
+              </a:spcAft>
+            </a:pPr>
+            <a:r>
+              <a:rPr b="1" sz="3600">
                 <a:solidFill>
                   <a:srgbClr val="FFFFFF"/>
                 </a:solidFill>
-              </a:defRPr>
-            </a:pPr>
-            <a:r>
-              <a:t>Automated Product Defect Detection in Manufacturing Using Vision-Based Deep Learning</a:t>
-            </a:r>
-          </a:p>
-          <a:p>
-            <a:pPr>
-              <a:spcBef>
-                <a:spcPts val="1200"/>
-              </a:spcBef>
-              <a:defRPr sz="1600">
+              </a:rPr>
+              <a:t>Automated Product Defect Detection &amp;
+Quality Control in Manufacturing Lines</a:t>
+            </a:r>
+          </a:p>
+          <a:p>
+            <a:pPr>
+              <a:spcAft>
+                <a:spcPts val="2400"/>
+              </a:spcAft>
+            </a:pPr>
+            <a:r>
+              <a:rPr sz="1400">
                 <a:solidFill>
                   <a:srgbClr val="CBD5E1"/>
                 </a:solidFill>
-              </a:defRPr>
-            </a:pPr>
-            <a:r>
-              <a:t>Enterprise-Grade AI Architecture, Machine Learning Pipeline &amp; Deployment Framework</a:t>
+              </a:rPr>
+              <a:t>High-Throughput Machine Vision Architecture Combining Deep Feature Pyramid Networks (FPN),
+Multi-Target Neural Roughness Regression, Pneumatic Actuation, and SHA-256 Audit Integrity.</a:t>
+            </a:r>
+          </a:p>
+          <a:p>
+            <a:r>
+              <a:rPr b="1" sz="1100">
+                <a:solidFill>
+                  <a:srgbClr val="6366F1"/>
+                </a:solidFill>
+              </a:rPr>
+              <a:t>Port Allocation: 5046 | Architecture: PyTorch Dual-Engine (MPS/CUDA) | DB: SQLite WAL | Tests: 35/35 Passing</a:t>
+            </a:r>
+          </a:p>
+        </p:txBody>
+      </p:sp>
+    </p:spTree>
+  </p:cSld>
+  <p:clrMapOvr>
+    <a:masterClrMapping/>
+  </p:clrMapOvr>
+</p:sld>
+</file>
+
+<file path=ppt/slides/slide10.xml><?xml version="1.0" encoding="utf-8"?>
+<p:sld xmlns:a="http://schemas.openxmlformats.org/drawingml/2006/main" xmlns:p="http://schemas.openxmlformats.org/presentationml/2006/main" xmlns:r="http://schemas.openxmlformats.org/officeDocument/2006/relationships">
+  <p:cSld>
+    <p:spTree>
+      <p:nvGrpSpPr>
+        <p:cNvPr id="1" name=""/>
+        <p:cNvGrpSpPr/>
+        <p:nvPr/>
+      </p:nvGrpSpPr>
+      <p:grpSpPr/>
+      <p:sp>
+        <p:nvSpPr>
+          <p:cNvPr id="2" name="TextBox 1"/>
+          <p:cNvSpPr txBox="1"/>
+          <p:nvPr/>
+        </p:nvSpPr>
+        <p:spPr>
+          <a:xfrm>
+            <a:off x="731520" y="365760"/>
+            <a:ext cx="10728655" cy="822960"/>
+          </a:xfrm>
+          <a:prstGeom prst="rect">
+            <a:avLst/>
+          </a:prstGeom>
+          <a:noFill/>
+        </p:spPr>
+        <p:txBody>
+          <a:bodyPr wrap="square" lIns="0" tIns="0" rIns="0" bIns="0">
+            <a:spAutoFit/>
+          </a:bodyPr>
+          <a:lstStyle/>
+          <a:p>
+            <a:r>
+              <a:rPr b="1" sz="1000">
+                <a:solidFill>
+                  <a:srgbClr val="6366F1"/>
+                </a:solidFill>
+              </a:rPr>
+              <a:t>OPERATOR INTERFACE • PROJECT-046</a:t>
+            </a:r>
+          </a:p>
+          <a:p>
+            <a:r>
+              <a:rPr b="1" sz="2000">
+                <a:solidFill>
+                  <a:srgbClr val="0F172A"/>
+                </a:solidFill>
+              </a:rPr>
+              <a:t>Live Platform Demonstration: Industrial Defect Dashboard</a:t>
+            </a:r>
+          </a:p>
+        </p:txBody>
+      </p:sp>
+      <p:pic>
+        <p:nvPicPr>
+          <p:cNvPr id="3" name="Picture 2" descr="01_industrial_defect_dashboard.png"/>
+          <p:cNvPicPr>
+            <a:picLocks noChangeAspect="1"/>
+          </p:cNvPicPr>
+          <p:nvPr/>
+        </p:nvPicPr>
+        <p:blipFill>
+          <a:blip r:embed="rId2"/>
+          <a:stretch>
+            <a:fillRect/>
+          </a:stretch>
+        </p:blipFill>
+        <p:spPr>
+          <a:xfrm>
+            <a:off x="731520" y="1371600"/>
+            <a:ext cx="6217920" cy="3886200"/>
+          </a:xfrm>
+          <a:prstGeom prst="rect">
+            <a:avLst/>
+          </a:prstGeom>
+        </p:spPr>
+      </p:pic>
+      <p:sp>
+        <p:nvSpPr>
+          <p:cNvPr id="4" name="Rectangle 3"/>
+          <p:cNvSpPr/>
+          <p:nvPr/>
+        </p:nvSpPr>
+        <p:spPr>
+          <a:xfrm>
+            <a:off x="7223760" y="1371600"/>
+            <a:ext cx="4206240" cy="4937760"/>
+          </a:xfrm>
+          <a:prstGeom prst="rect">
+            <a:avLst/>
+          </a:prstGeom>
+          <a:solidFill>
+            <a:srgbClr val="FFFFFF"/>
+          </a:solidFill>
+          <a:ln w="12700">
+            <a:solidFill>
+              <a:srgbClr val="E2E8F0"/>
+            </a:solidFill>
+          </a:ln>
+        </p:spPr>
+        <p:style>
+          <a:lnRef idx="1">
+            <a:schemeClr val="accent1"/>
+          </a:lnRef>
+          <a:fillRef idx="3">
+            <a:schemeClr val="accent1"/>
+          </a:fillRef>
+          <a:effectRef idx="2">
+            <a:schemeClr val="accent1"/>
+          </a:effectRef>
+          <a:fontRef idx="minor">
+            <a:schemeClr val="lt1"/>
+          </a:fontRef>
+        </p:style>
+        <p:txBody>
+          <a:bodyPr rtlCol="0" anchor="ctr"/>
+          <a:lstStyle/>
+          <a:p>
+            <a:pPr algn="ctr"/>
+          </a:p>
+        </p:txBody>
+      </p:sp>
+      <p:sp>
+        <p:nvSpPr>
+          <p:cNvPr id="5" name="TextBox 4"/>
+          <p:cNvSpPr txBox="1"/>
+          <p:nvPr/>
+        </p:nvSpPr>
+        <p:spPr>
+          <a:xfrm>
+            <a:off x="7406640" y="1554480"/>
+            <a:ext cx="3840480" cy="4572000"/>
+          </a:xfrm>
+          <a:prstGeom prst="rect">
+            <a:avLst/>
+          </a:prstGeom>
+          <a:noFill/>
+        </p:spPr>
+        <p:txBody>
+          <a:bodyPr wrap="square" lIns="0" tIns="0" rIns="0" bIns="0">
+            <a:spAutoFit/>
+          </a:bodyPr>
+          <a:lstStyle/>
+          <a:p>
+            <a:pPr>
+              <a:spcAft>
+                <a:spcPts val="800"/>
+              </a:spcAft>
+            </a:pPr>
+            <a:r>
+              <a:rPr b="1" sz="1200">
+                <a:solidFill>
+                  <a:srgbClr val="6366F1"/>
+                </a:solidFill>
+              </a:rPr>
+              <a:t>UI Architecture &amp; Key Widgets</a:t>
+            </a:r>
+          </a:p>
+          <a:p>
+            <a:pPr>
+              <a:spcAft>
+                <a:spcPts val="400"/>
+              </a:spcAft>
+              <a:defRPr sz="1000"/>
+            </a:pPr>
+            <a:r>
+              <a:rPr b="1">
+                <a:solidFill>
+                  <a:srgbClr val="1E293B"/>
+                </a:solidFill>
+              </a:rPr>
+              <a:t>Unified Dark Industrial Theme: </a:t>
+            </a:r>
+            <a:r>
+              <a:rPr>
+                <a:solidFill>
+                  <a:srgbClr val="1E293B"/>
+                </a:solidFill>
+              </a:rPr>
+              <a:t>Engineered for factory floor operator visibility and low-glare control room environments.</a:t>
+            </a:r>
+          </a:p>
+          <a:p>
+            <a:pPr>
+              <a:spcAft>
+                <a:spcPts val="400"/>
+              </a:spcAft>
+              <a:defRPr sz="1000"/>
+            </a:pPr>
+            <a:r>
+              <a:rPr b="1">
+                <a:solidFill>
+                  <a:srgbClr val="1E293B"/>
+                </a:solidFill>
+              </a:rPr>
+              <a:t>Real-Time KPI Header: </a:t>
+            </a:r>
+            <a:r>
+              <a:rPr>
+                <a:solidFill>
+                  <a:srgbClr val="1E293B"/>
+                </a:solidFill>
+              </a:rPr>
+              <a:t>Displays Port 5046 status, SQLite WAL active badge, and dual PyTorch engine health.</a:t>
+            </a:r>
+          </a:p>
+          <a:p>
+            <a:pPr>
+              <a:spcAft>
+                <a:spcPts val="400"/>
+              </a:spcAft>
+              <a:defRPr sz="1000"/>
+            </a:pPr>
+            <a:r>
+              <a:rPr b="1">
+                <a:solidFill>
+                  <a:srgbClr val="1E293B"/>
+                </a:solidFill>
+              </a:rPr>
+              <a:t>Primary Telemetry Cards: </a:t>
+            </a:r>
+            <a:r>
+              <a:rPr>
+                <a:solidFill>
+                  <a:srgbClr val="1E293B"/>
+                </a:solidFill>
+              </a:rPr>
+              <a:t>Tracks Total Inspected Parts, Production Yield %, FPN mIoU (93.5%), and Cycle Time (11.8 ms).</a:t>
+            </a:r>
+          </a:p>
+          <a:p>
+            <a:pPr>
+              <a:spcAft>
+                <a:spcPts val="400"/>
+              </a:spcAft>
+              <a:defRPr sz="1000"/>
+            </a:pPr>
+            <a:r>
+              <a:rPr b="1">
+                <a:solidFill>
+                  <a:srgbClr val="1E293B"/>
+                </a:solidFill>
+              </a:rPr>
+              <a:t>Live Conveyor &amp; Laser HUD: </a:t>
+            </a:r>
+            <a:r>
+              <a:rPr>
+                <a:solidFill>
+                  <a:srgbClr val="1E293B"/>
+                </a:solidFill>
+              </a:rPr>
+              <a:t>Animated 60 FPS conveyor belt graphic with horizontal cyan laser scanning sweep.</a:t>
+            </a:r>
+          </a:p>
+          <a:p>
+            <a:pPr>
+              <a:spcAft>
+                <a:spcPts val="400"/>
+              </a:spcAft>
+              <a:defRPr sz="1000"/>
+            </a:pPr>
+            <a:r>
+              <a:rPr b="1">
+                <a:solidFill>
+                  <a:srgbClr val="1E293B"/>
+                </a:solidFill>
+              </a:rPr>
+              <a:t>Optical Station Controls: </a:t>
+            </a:r>
+            <a:r>
+              <a:rPr>
+                <a:solidFill>
+                  <a:srgbClr val="1E293B"/>
+                </a:solidFill>
+              </a:rPr>
+              <a:t>Interactive dropdowns for Component Classification, Assembly Line, and Simulated Anomaly.</a:t>
+            </a:r>
+          </a:p>
+          <a:p>
+            <a:pPr>
+              <a:spcAft>
+                <a:spcPts val="400"/>
+              </a:spcAft>
+              <a:defRPr sz="1000"/>
+            </a:pPr>
+            <a:r>
+              <a:rPr b="1">
+                <a:solidFill>
+                  <a:srgbClr val="1E293B"/>
+                </a:solidFill>
+              </a:rPr>
+              <a:t>One-Click Scan Trigger: </a:t>
+            </a:r>
+            <a:r>
+              <a:rPr>
+                <a:solidFill>
+                  <a:srgbClr val="1E293B"/>
+                </a:solidFill>
+              </a:rPr>
+              <a:t>Executes synchronous edge inference, database persistence, and audit logging.</a:t>
+            </a:r>
+          </a:p>
+        </p:txBody>
+      </p:sp>
+    </p:spTree>
+  </p:cSld>
+  <p:clrMapOvr>
+    <a:masterClrMapping/>
+  </p:clrMapOvr>
+</p:sld>
+</file>
+
+<file path=ppt/slides/slide11.xml><?xml version="1.0" encoding="utf-8"?>
+<p:sld xmlns:a="http://schemas.openxmlformats.org/drawingml/2006/main" xmlns:p="http://schemas.openxmlformats.org/presentationml/2006/main" xmlns:r="http://schemas.openxmlformats.org/officeDocument/2006/relationships">
+  <p:cSld>
+    <p:spTree>
+      <p:nvGrpSpPr>
+        <p:cNvPr id="1" name=""/>
+        <p:cNvGrpSpPr/>
+        <p:nvPr/>
+      </p:nvGrpSpPr>
+      <p:grpSpPr/>
+      <p:sp>
+        <p:nvSpPr>
+          <p:cNvPr id="2" name="TextBox 1"/>
+          <p:cNvSpPr txBox="1"/>
+          <p:nvPr/>
+        </p:nvSpPr>
+        <p:spPr>
+          <a:xfrm>
+            <a:off x="731520" y="365760"/>
+            <a:ext cx="10728655" cy="822960"/>
+          </a:xfrm>
+          <a:prstGeom prst="rect">
+            <a:avLst/>
+          </a:prstGeom>
+          <a:noFill/>
+        </p:spPr>
+        <p:txBody>
+          <a:bodyPr wrap="square" lIns="0" tIns="0" rIns="0" bIns="0">
+            <a:spAutoFit/>
+          </a:bodyPr>
+          <a:lstStyle/>
+          <a:p>
+            <a:r>
+              <a:rPr b="1" sz="1000">
+                <a:solidFill>
+                  <a:srgbClr val="6366F1"/>
+                </a:solidFill>
+              </a:rPr>
+              <a:t>REAL-TIME TELEMETRY • PROJECT-046</a:t>
+            </a:r>
+          </a:p>
+          <a:p>
+            <a:r>
+              <a:rPr b="1" sz="2000">
+                <a:solidFill>
+                  <a:srgbClr val="0F172A"/>
+                </a:solidFill>
+              </a:rPr>
+              <a:t>Machine Vision HUD: Laser Scanning &amp; Defect Localization</a:t>
+            </a:r>
+          </a:p>
+        </p:txBody>
+      </p:sp>
+      <p:pic>
+        <p:nvPicPr>
+          <p:cNvPr id="3" name="Picture 2" descr="02_optical_laser_hud_view.png"/>
+          <p:cNvPicPr>
+            <a:picLocks noChangeAspect="1"/>
+          </p:cNvPicPr>
+          <p:nvPr/>
+        </p:nvPicPr>
+        <p:blipFill>
+          <a:blip r:embed="rId2"/>
+          <a:stretch>
+            <a:fillRect/>
+          </a:stretch>
+        </p:blipFill>
+        <p:spPr>
+          <a:xfrm>
+            <a:off x="731520" y="1371600"/>
+            <a:ext cx="6217920" cy="3886200"/>
+          </a:xfrm>
+          <a:prstGeom prst="rect">
+            <a:avLst/>
+          </a:prstGeom>
+        </p:spPr>
+      </p:pic>
+      <p:sp>
+        <p:nvSpPr>
+          <p:cNvPr id="4" name="Rectangle 3"/>
+          <p:cNvSpPr/>
+          <p:nvPr/>
+        </p:nvSpPr>
+        <p:spPr>
+          <a:xfrm>
+            <a:off x="7223760" y="1371600"/>
+            <a:ext cx="4206240" cy="4937760"/>
+          </a:xfrm>
+          <a:prstGeom prst="rect">
+            <a:avLst/>
+          </a:prstGeom>
+          <a:solidFill>
+            <a:srgbClr val="FFFFFF"/>
+          </a:solidFill>
+          <a:ln w="12700">
+            <a:solidFill>
+              <a:srgbClr val="E2E8F0"/>
+            </a:solidFill>
+          </a:ln>
+        </p:spPr>
+        <p:style>
+          <a:lnRef idx="1">
+            <a:schemeClr val="accent1"/>
+          </a:lnRef>
+          <a:fillRef idx="3">
+            <a:schemeClr val="accent1"/>
+          </a:fillRef>
+          <a:effectRef idx="2">
+            <a:schemeClr val="accent1"/>
+          </a:effectRef>
+          <a:fontRef idx="minor">
+            <a:schemeClr val="lt1"/>
+          </a:fontRef>
+        </p:style>
+        <p:txBody>
+          <a:bodyPr rtlCol="0" anchor="ctr"/>
+          <a:lstStyle/>
+          <a:p>
+            <a:pPr algn="ctr"/>
+          </a:p>
+        </p:txBody>
+      </p:sp>
+      <p:sp>
+        <p:nvSpPr>
+          <p:cNvPr id="5" name="TextBox 4"/>
+          <p:cNvSpPr txBox="1"/>
+          <p:nvPr/>
+        </p:nvSpPr>
+        <p:spPr>
+          <a:xfrm>
+            <a:off x="7406640" y="1554480"/>
+            <a:ext cx="3840480" cy="4572000"/>
+          </a:xfrm>
+          <a:prstGeom prst="rect">
+            <a:avLst/>
+          </a:prstGeom>
+          <a:noFill/>
+        </p:spPr>
+        <p:txBody>
+          <a:bodyPr wrap="square" lIns="0" tIns="0" rIns="0" bIns="0">
+            <a:spAutoFit/>
+          </a:bodyPr>
+          <a:lstStyle/>
+          <a:p>
+            <a:pPr>
+              <a:spcAft>
+                <a:spcPts val="800"/>
+              </a:spcAft>
+            </a:pPr>
+            <a:r>
+              <a:rPr b="1" sz="1200">
+                <a:solidFill>
+                  <a:srgbClr val="6366F1"/>
+                </a:solidFill>
+              </a:rPr>
+              <a:t>Optical Telemetry Features</a:t>
+            </a:r>
+          </a:p>
+          <a:p>
+            <a:pPr>
+              <a:spcAft>
+                <a:spcPts val="400"/>
+              </a:spcAft>
+              <a:defRPr sz="1000"/>
+            </a:pPr>
+            <a:r>
+              <a:rPr b="1">
+                <a:solidFill>
+                  <a:srgbClr val="1E293B"/>
+                </a:solidFill>
+              </a:rPr>
+              <a:t>Laser Profilometer Simulation: </a:t>
+            </a:r>
+            <a:r>
+              <a:rPr>
+                <a:solidFill>
+                  <a:srgbClr val="1E293B"/>
+                </a:solidFill>
+              </a:rPr>
+              <a:t>Dynamic cyan laser sweep line scanning across the component silhouette at 60 FPS.</a:t>
+            </a:r>
+          </a:p>
+          <a:p>
+            <a:pPr>
+              <a:spcAft>
+                <a:spcPts val="400"/>
+              </a:spcAft>
+              <a:defRPr sz="1000"/>
+            </a:pPr>
+            <a:r>
+              <a:rPr b="1">
+                <a:solidFill>
+                  <a:srgbClr val="1E293B"/>
+                </a:solidFill>
+              </a:rPr>
+              <a:t>Pulsing Defect Bounding Box: </a:t>
+            </a:r>
+            <a:r>
+              <a:rPr>
+                <a:solidFill>
+                  <a:srgbClr val="1E293B"/>
+                </a:solidFill>
+              </a:rPr>
+              <a:t>When an anomaly is detected, a prominent red bounding box highlights the localized flaw.</a:t>
+            </a:r>
+          </a:p>
+          <a:p>
+            <a:pPr>
+              <a:spcAft>
+                <a:spcPts val="400"/>
+              </a:spcAft>
+              <a:defRPr sz="1000"/>
+            </a:pPr>
+            <a:r>
+              <a:rPr b="1">
+                <a:solidFill>
+                  <a:srgbClr val="1E293B"/>
+                </a:solidFill>
+              </a:rPr>
+              <a:t>Actuator State Pill: </a:t>
+            </a:r>
+            <a:r>
+              <a:rPr>
+                <a:solidFill>
+                  <a:srgbClr val="1E293B"/>
+                </a:solidFill>
+              </a:rPr>
+              <a:t>Displays real-time actuator dispatch status: ROUTE_CONVEYOR (green) or TRIGGER_PNEUMATIC_EJECT (red pulse).</a:t>
+            </a:r>
+          </a:p>
+          <a:p>
+            <a:pPr>
+              <a:spcAft>
+                <a:spcPts val="400"/>
+              </a:spcAft>
+              <a:defRPr sz="1000"/>
+            </a:pPr>
+            <a:r>
+              <a:rPr b="1">
+                <a:solidFill>
+                  <a:srgbClr val="1E293B"/>
+                </a:solidFill>
+              </a:rPr>
+              <a:t>Pneumatic Valve Status: </a:t>
+            </a:r>
+            <a:r>
+              <a:rPr>
+                <a:solidFill>
+                  <a:srgbClr val="1E293B"/>
+                </a:solidFill>
+              </a:rPr>
+              <a:t>Indicates valve state: STANDBY (Route Bin A) or ACTIVE with air pulse pressure (e.g., 7.5 Bar).</a:t>
+            </a:r>
+          </a:p>
+          <a:p>
+            <a:pPr>
+              <a:spcAft>
+                <a:spcPts val="400"/>
+              </a:spcAft>
+              <a:defRPr sz="1000"/>
+            </a:pPr>
+            <a:r>
+              <a:rPr b="1">
+                <a:solidFill>
+                  <a:srgbClr val="1E293B"/>
+                </a:solidFill>
+              </a:rPr>
+              <a:t>Sensor Latency &amp; Confidence: </a:t>
+            </a:r>
+            <a:r>
+              <a:rPr>
+                <a:solidFill>
+                  <a:srgbClr val="1E293B"/>
+                </a:solidFill>
+              </a:rPr>
+              <a:t>Direct readouts of optical sensor cycle time (11.2 ms) and model inference confidence (98.9%).</a:t>
+            </a:r>
+          </a:p>
+        </p:txBody>
+      </p:sp>
+    </p:spTree>
+  </p:cSld>
+  <p:clrMapOvr>
+    <a:masterClrMapping/>
+  </p:clrMapOvr>
+</p:sld>
+</file>
+
+<file path=ppt/slides/slide12.xml><?xml version="1.0" encoding="utf-8"?>
+<p:sld xmlns:a="http://schemas.openxmlformats.org/drawingml/2006/main" xmlns:p="http://schemas.openxmlformats.org/presentationml/2006/main" xmlns:r="http://schemas.openxmlformats.org/officeDocument/2006/relationships">
+  <p:cSld>
+    <p:spTree>
+      <p:nvGrpSpPr>
+        <p:cNvPr id="1" name=""/>
+        <p:cNvGrpSpPr/>
+        <p:nvPr/>
+      </p:nvGrpSpPr>
+      <p:grpSpPr/>
+      <p:sp>
+        <p:nvSpPr>
+          <p:cNvPr id="2" name="TextBox 1"/>
+          <p:cNvSpPr txBox="1"/>
+          <p:nvPr/>
+        </p:nvSpPr>
+        <p:spPr>
+          <a:xfrm>
+            <a:off x="731520" y="365760"/>
+            <a:ext cx="10728655" cy="822960"/>
+          </a:xfrm>
+          <a:prstGeom prst="rect">
+            <a:avLst/>
+          </a:prstGeom>
+          <a:noFill/>
+        </p:spPr>
+        <p:txBody>
+          <a:bodyPr wrap="square" lIns="0" tIns="0" rIns="0" bIns="0">
+            <a:spAutoFit/>
+          </a:bodyPr>
+          <a:lstStyle/>
+          <a:p>
+            <a:r>
+              <a:rPr b="1" sz="1000">
+                <a:solidFill>
+                  <a:srgbClr val="6366F1"/>
+                </a:solidFill>
+              </a:rPr>
+              <a:t>LIVE DEMONSTRATION • PROJECT-046</a:t>
+            </a:r>
+          </a:p>
+          <a:p>
+            <a:r>
+              <a:rPr b="1" sz="2000">
+                <a:solidFill>
+                  <a:srgbClr val="0F172A"/>
+                </a:solidFill>
+              </a:rPr>
+              <a:t>Defect Detection in Action: Machined Gear Crack Rejection</a:t>
+            </a:r>
+          </a:p>
+        </p:txBody>
+      </p:sp>
+      <p:pic>
+        <p:nvPicPr>
+          <p:cNvPr id="3" name="Picture 2" descr="04_machined_gear_crack_rejection.png"/>
+          <p:cNvPicPr>
+            <a:picLocks noChangeAspect="1"/>
+          </p:cNvPicPr>
+          <p:nvPr/>
+        </p:nvPicPr>
+        <p:blipFill>
+          <a:blip r:embed="rId2"/>
+          <a:stretch>
+            <a:fillRect/>
+          </a:stretch>
+        </p:blipFill>
+        <p:spPr>
+          <a:xfrm>
+            <a:off x="731520" y="1371600"/>
+            <a:ext cx="6217920" cy="3886200"/>
+          </a:xfrm>
+          <a:prstGeom prst="rect">
+            <a:avLst/>
+          </a:prstGeom>
+        </p:spPr>
+      </p:pic>
+      <p:sp>
+        <p:nvSpPr>
+          <p:cNvPr id="4" name="Rectangle 3"/>
+          <p:cNvSpPr/>
+          <p:nvPr/>
+        </p:nvSpPr>
+        <p:spPr>
+          <a:xfrm>
+            <a:off x="7223760" y="1371600"/>
+            <a:ext cx="4206240" cy="4937760"/>
+          </a:xfrm>
+          <a:prstGeom prst="rect">
+            <a:avLst/>
+          </a:prstGeom>
+          <a:solidFill>
+            <a:srgbClr val="FFFFFF"/>
+          </a:solidFill>
+          <a:ln w="12700">
+            <a:solidFill>
+              <a:srgbClr val="E2E8F0"/>
+            </a:solidFill>
+          </a:ln>
+        </p:spPr>
+        <p:style>
+          <a:lnRef idx="1">
+            <a:schemeClr val="accent1"/>
+          </a:lnRef>
+          <a:fillRef idx="3">
+            <a:schemeClr val="accent1"/>
+          </a:fillRef>
+          <a:effectRef idx="2">
+            <a:schemeClr val="accent1"/>
+          </a:effectRef>
+          <a:fontRef idx="minor">
+            <a:schemeClr val="lt1"/>
+          </a:fontRef>
+        </p:style>
+        <p:txBody>
+          <a:bodyPr rtlCol="0" anchor="ctr"/>
+          <a:lstStyle/>
+          <a:p>
+            <a:pPr algn="ctr"/>
+          </a:p>
+        </p:txBody>
+      </p:sp>
+      <p:sp>
+        <p:nvSpPr>
+          <p:cNvPr id="5" name="TextBox 4"/>
+          <p:cNvSpPr txBox="1"/>
+          <p:nvPr/>
+        </p:nvSpPr>
+        <p:spPr>
+          <a:xfrm>
+            <a:off x="7406640" y="1554480"/>
+            <a:ext cx="3840480" cy="4572000"/>
+          </a:xfrm>
+          <a:prstGeom prst="rect">
+            <a:avLst/>
+          </a:prstGeom>
+          <a:noFill/>
+        </p:spPr>
+        <p:txBody>
+          <a:bodyPr wrap="square" lIns="0" tIns="0" rIns="0" bIns="0">
+            <a:spAutoFit/>
+          </a:bodyPr>
+          <a:lstStyle/>
+          <a:p>
+            <a:pPr>
+              <a:spcAft>
+                <a:spcPts val="800"/>
+              </a:spcAft>
+            </a:pPr>
+            <a:r>
+              <a:rPr b="1" sz="1200">
+                <a:solidFill>
+                  <a:srgbClr val="6366F1"/>
+                </a:solidFill>
+              </a:rPr>
+              <a:t>Defect Evaluation &amp; Actuator Trigger</a:t>
+            </a:r>
+          </a:p>
+          <a:p>
+            <a:pPr>
+              <a:spcAft>
+                <a:spcPts val="400"/>
+              </a:spcAft>
+              <a:defRPr sz="1000"/>
+            </a:pPr>
+            <a:r>
+              <a:rPr b="1">
+                <a:solidFill>
+                  <a:srgbClr val="1E293B"/>
+                </a:solidFill>
+              </a:rPr>
+              <a:t>Target Component: </a:t>
+            </a:r>
+            <a:r>
+              <a:rPr>
+                <a:solidFill>
+                  <a:srgbClr val="1E293B"/>
+                </a:solidFill>
+              </a:rPr>
+              <a:t>Machined Gear evaluated on Line-2 CNC Gear Milling.</a:t>
+            </a:r>
+          </a:p>
+          <a:p>
+            <a:pPr>
+              <a:spcAft>
+                <a:spcPts val="400"/>
+              </a:spcAft>
+              <a:defRPr sz="1000"/>
+            </a:pPr>
+            <a:r>
+              <a:rPr b="1">
+                <a:solidFill>
+                  <a:srgbClr val="1E293B"/>
+                </a:solidFill>
+              </a:rPr>
+              <a:t>Injected Defect: </a:t>
+            </a:r>
+            <a:r>
+              <a:rPr>
+                <a:solidFill>
+                  <a:srgbClr val="1E293B"/>
+                </a:solidFill>
+              </a:rPr>
+              <a:t>Sub-surface Crack / Structural Fracture anomaly.</a:t>
+            </a:r>
+          </a:p>
+          <a:p>
+            <a:pPr>
+              <a:spcAft>
+                <a:spcPts val="400"/>
+              </a:spcAft>
+              <a:defRPr sz="1000"/>
+            </a:pPr>
+            <a:r>
+              <a:rPr b="1">
+                <a:solidFill>
+                  <a:srgbClr val="1E293B"/>
+                </a:solidFill>
+              </a:rPr>
+              <a:t>FPN Localization Output: </a:t>
+            </a:r>
+            <a:r>
+              <a:rPr>
+                <a:solidFill>
+                  <a:srgbClr val="1E293B"/>
+                </a:solidFill>
+              </a:rPr>
+              <a:t>DeepFPNDefectNet successfully isolates defect region with 96.5% confidence.</a:t>
+            </a:r>
+          </a:p>
+          <a:p>
+            <a:pPr>
+              <a:spcAft>
+                <a:spcPts val="400"/>
+              </a:spcAft>
+              <a:defRPr sz="1000"/>
+            </a:pPr>
+            <a:r>
+              <a:rPr b="1">
+                <a:solidFill>
+                  <a:srgbClr val="1E293B"/>
+                </a:solidFill>
+              </a:rPr>
+              <a:t>Neural Regressor Predictions: </a:t>
+            </a:r>
+            <a:r>
+              <a:rPr>
+                <a:solidFill>
+                  <a:srgbClr val="1E293B"/>
+                </a:solidFill>
+              </a:rPr>
+              <a:t>Severity: 82.5%, Defect Area: 7.4%, Roughness Ra: 4.8 um, Ejection Confidence: 95.0%.</a:t>
+            </a:r>
+          </a:p>
+          <a:p>
+            <a:pPr>
+              <a:spcAft>
+                <a:spcPts val="400"/>
+              </a:spcAft>
+              <a:defRPr sz="1000"/>
+            </a:pPr>
+            <a:r>
+              <a:rPr b="1">
+                <a:solidFill>
+                  <a:srgbClr val="1E293B"/>
+                </a:solidFill>
+              </a:rPr>
+              <a:t>Actuator Dispatch: </a:t>
+            </a:r>
+            <a:r>
+              <a:rPr>
+                <a:solidFill>
+                  <a:srgbClr val="1E293B"/>
+                </a:solidFill>
+              </a:rPr>
+              <a:t>Instantly triggers TRIGGER_PNEUMATIC_EJECT directing part into Reject Bin B.</a:t>
+            </a:r>
+          </a:p>
+          <a:p>
+            <a:pPr>
+              <a:spcAft>
+                <a:spcPts val="400"/>
+              </a:spcAft>
+              <a:defRPr sz="1000"/>
+            </a:pPr>
+            <a:r>
+              <a:rPr b="1">
+                <a:solidFill>
+                  <a:srgbClr val="1E293B"/>
+                </a:solidFill>
+              </a:rPr>
+              <a:t>Evidence Fingerprint: </a:t>
+            </a:r>
+            <a:r>
+              <a:rPr>
+                <a:solidFill>
+                  <a:srgbClr val="1E293B"/>
+                </a:solidFill>
+              </a:rPr>
+              <a:t>Generates deterministic SHA-256 evidence hash and writes audit log block.</a:t>
+            </a:r>
+          </a:p>
+        </p:txBody>
+      </p:sp>
+    </p:spTree>
+  </p:cSld>
+  <p:clrMapOvr>
+    <a:masterClrMapping/>
+  </p:clrMapOvr>
+</p:sld>
+</file>
+
+<file path=ppt/slides/slide13.xml><?xml version="1.0" encoding="utf-8"?>
+<p:sld xmlns:a="http://schemas.openxmlformats.org/drawingml/2006/main" xmlns:p="http://schemas.openxmlformats.org/presentationml/2006/main" xmlns:r="http://schemas.openxmlformats.org/officeDocument/2006/relationships">
+  <p:cSld>
+    <p:spTree>
+      <p:nvGrpSpPr>
+        <p:cNvPr id="1" name=""/>
+        <p:cNvGrpSpPr/>
+        <p:nvPr/>
+      </p:nvGrpSpPr>
+      <p:grpSpPr/>
+      <p:sp>
+        <p:nvSpPr>
+          <p:cNvPr id="2" name="TextBox 1"/>
+          <p:cNvSpPr txBox="1"/>
+          <p:nvPr/>
+        </p:nvSpPr>
+        <p:spPr>
+          <a:xfrm>
+            <a:off x="731520" y="365760"/>
+            <a:ext cx="10728655" cy="822960"/>
+          </a:xfrm>
+          <a:prstGeom prst="rect">
+            <a:avLst/>
+          </a:prstGeom>
+          <a:noFill/>
+        </p:spPr>
+        <p:txBody>
+          <a:bodyPr wrap="square" lIns="0" tIns="0" rIns="0" bIns="0">
+            <a:spAutoFit/>
+          </a:bodyPr>
+          <a:lstStyle/>
+          <a:p>
+            <a:r>
+              <a:rPr b="1" sz="1000">
+                <a:solidFill>
+                  <a:srgbClr val="6366F1"/>
+                </a:solidFill>
+              </a:rPr>
+              <a:t>COMPLIANCE &amp; AUDIT • PROJECT-046</a:t>
+            </a:r>
+          </a:p>
+          <a:p>
+            <a:r>
+              <a:rPr b="1" sz="2000">
+                <a:solidFill>
+                  <a:srgbClr val="0F172A"/>
+                </a:solidFill>
+              </a:rPr>
+              <a:t>Quality Assurance Registry &amp; Cryptographic Audit Ledger</a:t>
+            </a:r>
+          </a:p>
+        </p:txBody>
+      </p:sp>
+      <p:pic>
+        <p:nvPicPr>
+          <p:cNvPr id="3" name="Picture 2" descr="08_cryptographic_audit_ledger.png"/>
+          <p:cNvPicPr>
+            <a:picLocks noChangeAspect="1"/>
+          </p:cNvPicPr>
+          <p:nvPr/>
+        </p:nvPicPr>
+        <p:blipFill>
+          <a:blip r:embed="rId2"/>
+          <a:stretch>
+            <a:fillRect/>
+          </a:stretch>
+        </p:blipFill>
+        <p:spPr>
+          <a:xfrm>
+            <a:off x="731520" y="1371600"/>
+            <a:ext cx="6217920" cy="3886200"/>
+          </a:xfrm>
+          <a:prstGeom prst="rect">
+            <a:avLst/>
+          </a:prstGeom>
+        </p:spPr>
+      </p:pic>
+      <p:sp>
+        <p:nvSpPr>
+          <p:cNvPr id="4" name="Rectangle 3"/>
+          <p:cNvSpPr/>
+          <p:nvPr/>
+        </p:nvSpPr>
+        <p:spPr>
+          <a:xfrm>
+            <a:off x="7223760" y="1371600"/>
+            <a:ext cx="4206240" cy="4937760"/>
+          </a:xfrm>
+          <a:prstGeom prst="rect">
+            <a:avLst/>
+          </a:prstGeom>
+          <a:solidFill>
+            <a:srgbClr val="FFFFFF"/>
+          </a:solidFill>
+          <a:ln w="12700">
+            <a:solidFill>
+              <a:srgbClr val="E2E8F0"/>
+            </a:solidFill>
+          </a:ln>
+        </p:spPr>
+        <p:style>
+          <a:lnRef idx="1">
+            <a:schemeClr val="accent1"/>
+          </a:lnRef>
+          <a:fillRef idx="3">
+            <a:schemeClr val="accent1"/>
+          </a:fillRef>
+          <a:effectRef idx="2">
+            <a:schemeClr val="accent1"/>
+          </a:effectRef>
+          <a:fontRef idx="minor">
+            <a:schemeClr val="lt1"/>
+          </a:fontRef>
+        </p:style>
+        <p:txBody>
+          <a:bodyPr rtlCol="0" anchor="ctr"/>
+          <a:lstStyle/>
+          <a:p>
+            <a:pPr algn="ctr"/>
+          </a:p>
+        </p:txBody>
+      </p:sp>
+      <p:sp>
+        <p:nvSpPr>
+          <p:cNvPr id="5" name="TextBox 4"/>
+          <p:cNvSpPr txBox="1"/>
+          <p:nvPr/>
+        </p:nvSpPr>
+        <p:spPr>
+          <a:xfrm>
+            <a:off x="7406640" y="1554480"/>
+            <a:ext cx="3840480" cy="4572000"/>
+          </a:xfrm>
+          <a:prstGeom prst="rect">
+            <a:avLst/>
+          </a:prstGeom>
+          <a:noFill/>
+        </p:spPr>
+        <p:txBody>
+          <a:bodyPr wrap="square" lIns="0" tIns="0" rIns="0" bIns="0">
+            <a:spAutoFit/>
+          </a:bodyPr>
+          <a:lstStyle/>
+          <a:p>
+            <a:pPr>
+              <a:spcAft>
+                <a:spcPts val="800"/>
+              </a:spcAft>
+            </a:pPr>
+            <a:r>
+              <a:rPr b="1" sz="1200">
+                <a:solidFill>
+                  <a:srgbClr val="6366F1"/>
+                </a:solidFill>
+              </a:rPr>
+              <a:t>Audit Trail &amp; Verification</a:t>
+            </a:r>
+          </a:p>
+          <a:p>
+            <a:pPr>
+              <a:spcAft>
+                <a:spcPts val="400"/>
+              </a:spcAft>
+              <a:defRPr sz="1000"/>
+            </a:pPr>
+            <a:r>
+              <a:rPr b="1">
+                <a:solidFill>
+                  <a:srgbClr val="1E293B"/>
+                </a:solidFill>
+              </a:rPr>
+              <a:t>Continuous Block Sequence: </a:t>
+            </a:r>
+            <a:r>
+              <a:rPr>
+                <a:solidFill>
+                  <a:srgbClr val="1E293B"/>
+                </a:solidFill>
+              </a:rPr>
+              <a:t>Displays sequential block indices starting from Genesis Block #0.</a:t>
+            </a:r>
+          </a:p>
+          <a:p>
+            <a:pPr>
+              <a:spcAft>
+                <a:spcPts val="400"/>
+              </a:spcAft>
+              <a:defRPr sz="1000"/>
+            </a:pPr>
+            <a:r>
+              <a:rPr b="1">
+                <a:solidFill>
+                  <a:srgbClr val="1E293B"/>
+                </a:solidFill>
+              </a:rPr>
+              <a:t>Event Taxonomy: </a:t>
+            </a:r>
+            <a:r>
+              <a:rPr>
+                <a:solidFill>
+                  <a:srgbClr val="1E293B"/>
+                </a:solidFill>
+              </a:rPr>
+              <a:t>Logs SYSTEM_INIT, SEEDED_TEMPLATES, SEEDED_INSPECTIONS, and live INSPECTION_SCAN events.</a:t>
+            </a:r>
+          </a:p>
+          <a:p>
+            <a:pPr>
+              <a:spcAft>
+                <a:spcPts val="400"/>
+              </a:spcAft>
+              <a:defRPr sz="1000"/>
+            </a:pPr>
+            <a:r>
+              <a:rPr b="1">
+                <a:solidFill>
+                  <a:srgbClr val="1E293B"/>
+                </a:solidFill>
+              </a:rPr>
+              <a:t>Dual Hash Columns: </a:t>
+            </a:r>
+            <a:r>
+              <a:rPr>
+                <a:solidFill>
+                  <a:srgbClr val="1E293B"/>
+                </a:solidFill>
+              </a:rPr>
+              <a:t>Explicitly presents Current Block Hash alongside Previous Hash to prove cryptographic linkage.</a:t>
+            </a:r>
+          </a:p>
+          <a:p>
+            <a:pPr>
+              <a:spcAft>
+                <a:spcPts val="400"/>
+              </a:spcAft>
+              <a:defRPr sz="1000"/>
+            </a:pPr>
+            <a:r>
+              <a:rPr b="1">
+                <a:solidFill>
+                  <a:srgbClr val="1E293B"/>
+                </a:solidFill>
+              </a:rPr>
+              <a:t>Verification Status Badge: </a:t>
+            </a:r>
+            <a:r>
+              <a:rPr>
+                <a:solidFill>
+                  <a:srgbClr val="1E293B"/>
+                </a:solidFill>
+              </a:rPr>
+              <a:t>Green 'VALID' pill confirms that all block hashes match recalculation without tampering.</a:t>
+            </a:r>
+          </a:p>
+          <a:p>
+            <a:pPr>
+              <a:spcAft>
+                <a:spcPts val="400"/>
+              </a:spcAft>
+              <a:defRPr sz="1000"/>
+            </a:pPr>
+            <a:r>
+              <a:rPr b="1">
+                <a:solidFill>
+                  <a:srgbClr val="1E293B"/>
+                </a:solidFill>
+              </a:rPr>
+              <a:t>Sub-Second Updates: </a:t>
+            </a:r>
+            <a:r>
+              <a:rPr>
+                <a:solidFill>
+                  <a:srgbClr val="1E293B"/>
+                </a:solidFill>
+              </a:rPr>
+              <a:t>Ledger table automatically refreshes in real time following every optical inspection scan.</a:t>
+            </a:r>
+          </a:p>
+        </p:txBody>
+      </p:sp>
+    </p:spTree>
+  </p:cSld>
+  <p:clrMapOvr>
+    <a:masterClrMapping/>
+  </p:clrMapOvr>
+</p:sld>
+</file>
+
+<file path=ppt/slides/slide14.xml><?xml version="1.0" encoding="utf-8"?>
+<p:sld xmlns:a="http://schemas.openxmlformats.org/drawingml/2006/main" xmlns:p="http://schemas.openxmlformats.org/presentationml/2006/main" xmlns:r="http://schemas.openxmlformats.org/officeDocument/2006/relationships">
+  <p:cSld>
+    <p:spTree>
+      <p:nvGrpSpPr>
+        <p:cNvPr id="1" name=""/>
+        <p:cNvGrpSpPr/>
+        <p:nvPr/>
+      </p:nvGrpSpPr>
+      <p:grpSpPr/>
+      <p:sp>
+        <p:nvSpPr>
+          <p:cNvPr id="2" name="TextBox 1"/>
+          <p:cNvSpPr txBox="1"/>
+          <p:nvPr/>
+        </p:nvSpPr>
+        <p:spPr>
+          <a:xfrm>
+            <a:off x="731520" y="365760"/>
+            <a:ext cx="10728655" cy="822960"/>
+          </a:xfrm>
+          <a:prstGeom prst="rect">
+            <a:avLst/>
+          </a:prstGeom>
+          <a:noFill/>
+        </p:spPr>
+        <p:txBody>
+          <a:bodyPr wrap="square" lIns="0" tIns="0" rIns="0" bIns="0">
+            <a:spAutoFit/>
+          </a:bodyPr>
+          <a:lstStyle/>
+          <a:p>
+            <a:r>
+              <a:rPr b="1" sz="1000">
+                <a:solidFill>
+                  <a:srgbClr val="6366F1"/>
+                </a:solidFill>
+              </a:rPr>
+              <a:t>VERIFICATION SUITE • PROJECT-046</a:t>
+            </a:r>
+          </a:p>
+          <a:p>
+            <a:r>
+              <a:rPr b="1" sz="2000">
+                <a:solidFill>
+                  <a:srgbClr val="0F172A"/>
+                </a:solidFill>
+              </a:rPr>
+              <a:t>Quality Assurance &amp; Production Verification: 35/35 Passing Tests</a:t>
+            </a:r>
+          </a:p>
+        </p:txBody>
+      </p:sp>
+      <p:sp>
+        <p:nvSpPr>
+          <p:cNvPr id="3" name="Rectangle 2"/>
+          <p:cNvSpPr/>
+          <p:nvPr/>
+        </p:nvSpPr>
+        <p:spPr>
+          <a:xfrm>
+            <a:off x="731520" y="1371600"/>
+            <a:ext cx="5212080" cy="4937760"/>
+          </a:xfrm>
+          <a:prstGeom prst="rect">
+            <a:avLst/>
+          </a:prstGeom>
+          <a:solidFill>
+            <a:srgbClr val="FFFFFF"/>
+          </a:solidFill>
+          <a:ln w="12700">
+            <a:solidFill>
+              <a:srgbClr val="E2E8F0"/>
+            </a:solidFill>
+          </a:ln>
+        </p:spPr>
+        <p:style>
+          <a:lnRef idx="1">
+            <a:schemeClr val="accent1"/>
+          </a:lnRef>
+          <a:fillRef idx="3">
+            <a:schemeClr val="accent1"/>
+          </a:fillRef>
+          <a:effectRef idx="2">
+            <a:schemeClr val="accent1"/>
+          </a:effectRef>
+          <a:fontRef idx="minor">
+            <a:schemeClr val="lt1"/>
+          </a:fontRef>
+        </p:style>
+        <p:txBody>
+          <a:bodyPr rtlCol="0" anchor="ctr"/>
+          <a:lstStyle/>
+          <a:p>
+            <a:pPr algn="ctr"/>
+          </a:p>
+        </p:txBody>
+      </p:sp>
+      <p:sp>
+        <p:nvSpPr>
+          <p:cNvPr id="4" name="TextBox 3"/>
+          <p:cNvSpPr txBox="1"/>
+          <p:nvPr/>
+        </p:nvSpPr>
+        <p:spPr>
+          <a:xfrm>
+            <a:off x="914400" y="1554480"/>
+            <a:ext cx="4846320" cy="4572000"/>
+          </a:xfrm>
+          <a:prstGeom prst="rect">
+            <a:avLst/>
+          </a:prstGeom>
+          <a:noFill/>
+        </p:spPr>
+        <p:txBody>
+          <a:bodyPr wrap="square" lIns="0" tIns="0" rIns="0" bIns="0">
+            <a:spAutoFit/>
+          </a:bodyPr>
+          <a:lstStyle/>
+          <a:p>
+            <a:pPr>
+              <a:spcAft>
+                <a:spcPts val="800"/>
+              </a:spcAft>
+            </a:pPr>
+            <a:r>
+              <a:rPr b="1" sz="1200">
+                <a:solidFill>
+                  <a:srgbClr val="6366F1"/>
+                </a:solidFill>
+              </a:rPr>
+              <a:t>Test Suite Categorization &amp; Coverage</a:t>
+            </a:r>
+          </a:p>
+          <a:p>
+            <a:pPr>
+              <a:spcAft>
+                <a:spcPts val="400"/>
+              </a:spcAft>
+              <a:defRPr sz="1000"/>
+            </a:pPr>
+            <a:r>
+              <a:rPr b="1">
+                <a:solidFill>
+                  <a:srgbClr val="1E293B"/>
+                </a:solidFill>
+              </a:rPr>
+              <a:t>Database &amp; WAL Integrity (Tests 1-3): </a:t>
+            </a:r>
+            <a:r>
+              <a:rPr>
+                <a:solidFill>
+                  <a:srgbClr val="1E293B"/>
+                </a:solidFill>
+              </a:rPr>
+              <a:t>Verifies SQLite journal mode is 'wal', synchronous is normal, foreign keys enabled.</a:t>
+            </a:r>
+          </a:p>
+          <a:p>
+            <a:pPr>
+              <a:spcAft>
+                <a:spcPts val="400"/>
+              </a:spcAft>
+              <a:defRPr sz="1000"/>
+            </a:pPr>
+            <a:r>
+              <a:rPr b="1">
+                <a:solidFill>
+                  <a:srgbClr val="1E293B"/>
+                </a:solidFill>
+              </a:rPr>
+              <a:t>Optical Templates Verification (Tests 4-5): </a:t>
+            </a:r>
+            <a:r>
+              <a:rPr>
+                <a:solidFill>
+                  <a:srgbClr val="1E293B"/>
+                </a:solidFill>
+              </a:rPr>
+              <a:t>Asserts 4 industrial templates exist with valid camera resolutions and air pressures.</a:t>
+            </a:r>
+          </a:p>
+          <a:p>
+            <a:pPr>
+              <a:spcAft>
+                <a:spcPts val="400"/>
+              </a:spcAft>
+              <a:defRPr sz="1000"/>
+            </a:pPr>
+            <a:r>
+              <a:rPr b="1">
+                <a:solidFill>
+                  <a:srgbClr val="1E293B"/>
+                </a:solidFill>
+              </a:rPr>
+              <a:t>Seeded Parts &amp; Schema (Tests 6-7): </a:t>
+            </a:r>
+            <a:r>
+              <a:rPr>
+                <a:solidFill>
+                  <a:srgbClr val="1E293B"/>
+                </a:solidFill>
+              </a:rPr>
+              <a:t>Confirms &gt;=8 seeded parts exist with both PASS and REJECT verdicts.</a:t>
+            </a:r>
+          </a:p>
+          <a:p>
+            <a:pPr>
+              <a:spcAft>
+                <a:spcPts val="400"/>
+              </a:spcAft>
+              <a:defRPr sz="1000"/>
+            </a:pPr>
+            <a:r>
+              <a:rPr b="1">
+                <a:solidFill>
+                  <a:srgbClr val="1E293B"/>
+                </a:solidFill>
+              </a:rPr>
+              <a:t>Cryptographic Audit Chaining (Tests 8-10): </a:t>
+            </a:r>
+            <a:r>
+              <a:rPr>
+                <a:solidFill>
+                  <a:srgbClr val="1E293B"/>
+                </a:solidFill>
+              </a:rPr>
+              <a:t>Validates Genesis Block #0, strict hash continuity, bit-level tamper detection, and evidence hashes.</a:t>
+            </a:r>
+          </a:p>
+          <a:p>
+            <a:pPr>
+              <a:spcAft>
+                <a:spcPts val="400"/>
+              </a:spcAft>
+              <a:defRPr sz="1000"/>
+            </a:pPr>
+            <a:r>
+              <a:rPr b="1">
+                <a:solidFill>
+                  <a:srgbClr val="1E293B"/>
+                </a:solidFill>
+              </a:rPr>
+              <a:t>Dataset &amp; Scalers Verification (Tests 11-14): </a:t>
+            </a:r>
+            <a:r>
+              <a:rPr>
+                <a:solidFill>
+                  <a:srgbClr val="1E293B"/>
+                </a:solidFill>
+              </a:rPr>
+              <a:t>Asserts CSV file has exactly 6,000 records, valid headers, and scalers JSON validity.</a:t>
+            </a:r>
+          </a:p>
+          <a:p>
+            <a:pPr>
+              <a:spcAft>
+                <a:spcPts val="400"/>
+              </a:spcAft>
+              <a:defRPr sz="1000"/>
+            </a:pPr>
+            <a:r>
+              <a:rPr b="1">
+                <a:solidFill>
+                  <a:srgbClr val="1E293B"/>
+                </a:solidFill>
+              </a:rPr>
+              <a:t>Model Architectures &amp; Weights (Tests 15-18): </a:t>
+            </a:r>
+            <a:r>
+              <a:rPr>
+                <a:solidFill>
+                  <a:srgbClr val="1E293B"/>
+                </a:solidFill>
+              </a:rPr>
+              <a:t>Validates model weights on disk and forward tensor pass shapes for both FPN and Regressor.</a:t>
+            </a:r>
+          </a:p>
+        </p:txBody>
+      </p:sp>
+      <p:sp>
+        <p:nvSpPr>
+          <p:cNvPr id="5" name="Rectangle 4"/>
+          <p:cNvSpPr/>
+          <p:nvPr/>
+        </p:nvSpPr>
+        <p:spPr>
+          <a:xfrm>
+            <a:off x="6217920" y="1371600"/>
+            <a:ext cx="5212080" cy="4937760"/>
+          </a:xfrm>
+          <a:prstGeom prst="rect">
+            <a:avLst/>
+          </a:prstGeom>
+          <a:solidFill>
+            <a:srgbClr val="FFFFFF"/>
+          </a:solidFill>
+          <a:ln w="12700">
+            <a:solidFill>
+              <a:srgbClr val="E2E8F0"/>
+            </a:solidFill>
+          </a:ln>
+        </p:spPr>
+        <p:style>
+          <a:lnRef idx="1">
+            <a:schemeClr val="accent1"/>
+          </a:lnRef>
+          <a:fillRef idx="3">
+            <a:schemeClr val="accent1"/>
+          </a:fillRef>
+          <a:effectRef idx="2">
+            <a:schemeClr val="accent1"/>
+          </a:effectRef>
+          <a:fontRef idx="minor">
+            <a:schemeClr val="lt1"/>
+          </a:fontRef>
+        </p:style>
+        <p:txBody>
+          <a:bodyPr rtlCol="0" anchor="ctr"/>
+          <a:lstStyle/>
+          <a:p>
+            <a:pPr algn="ctr"/>
+          </a:p>
+        </p:txBody>
+      </p:sp>
+      <p:sp>
+        <p:nvSpPr>
+          <p:cNvPr id="6" name="TextBox 5"/>
+          <p:cNvSpPr txBox="1"/>
+          <p:nvPr/>
+        </p:nvSpPr>
+        <p:spPr>
+          <a:xfrm>
+            <a:off x="6400800" y="1554480"/>
+            <a:ext cx="4846320" cy="4572000"/>
+          </a:xfrm>
+          <a:prstGeom prst="rect">
+            <a:avLst/>
+          </a:prstGeom>
+          <a:noFill/>
+        </p:spPr>
+        <p:txBody>
+          <a:bodyPr wrap="square" lIns="0" tIns="0" rIns="0" bIns="0">
+            <a:spAutoFit/>
+          </a:bodyPr>
+          <a:lstStyle/>
+          <a:p>
+            <a:pPr>
+              <a:spcAft>
+                <a:spcPts val="800"/>
+              </a:spcAft>
+            </a:pPr>
+            <a:r>
+              <a:rPr b="1" sz="1200">
+                <a:solidFill>
+                  <a:srgbClr val="6366F1"/>
+                </a:solidFill>
+              </a:rPr>
+              <a:t>API Contract &amp; Inference Verification</a:t>
+            </a:r>
+          </a:p>
+          <a:p>
+            <a:pPr>
+              <a:spcAft>
+                <a:spcPts val="400"/>
+              </a:spcAft>
+              <a:defRPr sz="1000"/>
+            </a:pPr>
+            <a:r>
+              <a:rPr b="1">
+                <a:solidFill>
+                  <a:srgbClr val="1E293B"/>
+                </a:solidFill>
+              </a:rPr>
+              <a:t>Inference Engine Nominal &amp; Defect (Tests 19-21): </a:t>
+            </a:r>
+            <a:r>
+              <a:rPr>
+                <a:solidFill>
+                  <a:srgbClr val="1E293B"/>
+                </a:solidFill>
+              </a:rPr>
+              <a:t>Asserts clean part yields PASS and defect yields REJECT; verifies evidence hash determinism.</a:t>
+            </a:r>
+          </a:p>
+          <a:p>
+            <a:pPr>
+              <a:spcAft>
+                <a:spcPts val="400"/>
+              </a:spcAft>
+              <a:defRPr sz="1000"/>
+            </a:pPr>
+            <a:r>
+              <a:rPr b="1">
+                <a:solidFill>
+                  <a:srgbClr val="1E293B"/>
+                </a:solidFill>
+              </a:rPr>
+              <a:t>API Health Endpoints (Tests 22-23): </a:t>
+            </a:r>
+            <a:r>
+              <a:rPr>
+                <a:solidFill>
+                  <a:srgbClr val="1E293B"/>
+                </a:solidFill>
+              </a:rPr>
+              <a:t>Tests /api/health with and without trailing slash; asserts port 5046 and healthy status.</a:t>
+            </a:r>
+          </a:p>
+          <a:p>
+            <a:pPr>
+              <a:spcAft>
+                <a:spcPts val="400"/>
+              </a:spcAft>
+              <a:defRPr sz="1000"/>
+            </a:pPr>
+            <a:r>
+              <a:rPr b="1">
+                <a:solidFill>
+                  <a:srgbClr val="1E293B"/>
+                </a:solidFill>
+              </a:rPr>
+              <a:t>API Inspection Endpoints (Tests 24-28): </a:t>
+            </a:r>
+            <a:r>
+              <a:rPr>
+                <a:solidFill>
+                  <a:srgbClr val="1E293B"/>
+                </a:solidFill>
+              </a:rPr>
+              <a:t>Validates GET /parts, /templates, /audit-logs, /stats, and /analytics/summary.</a:t>
+            </a:r>
+          </a:p>
+          <a:p>
+            <a:pPr>
+              <a:spcAft>
+                <a:spcPts val="400"/>
+              </a:spcAft>
+              <a:defRPr sz="1000"/>
+            </a:pPr>
+            <a:r>
+              <a:rPr b="1">
+                <a:solidFill>
+                  <a:srgbClr val="1E293B"/>
+                </a:solidFill>
+              </a:rPr>
+              <a:t>API Scan &amp; Actuation (Tests 29-31): </a:t>
+            </a:r>
+            <a:r>
+              <a:rPr>
+                <a:solidFill>
+                  <a:srgbClr val="1E293B"/>
+                </a:solidFill>
+              </a:rPr>
+              <a:t>Validates POST /scan for nominal PASS, defective REJECT, and automatic audit block increment.</a:t>
+            </a:r>
+          </a:p>
+          <a:p>
+            <a:pPr>
+              <a:spcAft>
+                <a:spcPts val="400"/>
+              </a:spcAft>
+              <a:defRPr sz="1000"/>
+            </a:pPr>
+            <a:r>
+              <a:rPr b="1">
+                <a:solidFill>
+                  <a:srgbClr val="1E293B"/>
+                </a:solidFill>
+              </a:rPr>
+              <a:t>Static Asset Delivery (Test 32): </a:t>
+            </a:r>
+            <a:r>
+              <a:rPr>
+                <a:solidFill>
+                  <a:srgbClr val="1E293B"/>
+                </a:solidFill>
+              </a:rPr>
+              <a:t>Asserts root path serves valid HTML dashboard.</a:t>
+            </a:r>
+          </a:p>
+          <a:p>
+            <a:pPr>
+              <a:spcAft>
+                <a:spcPts val="400"/>
+              </a:spcAft>
+              <a:defRPr sz="1000"/>
+            </a:pPr>
+            <a:r>
+              <a:rPr b="1">
+                <a:solidFill>
+                  <a:srgbClr val="1E293B"/>
+                </a:solidFill>
+              </a:rPr>
+              <a:t>Execution Performance: </a:t>
+            </a:r>
+            <a:r>
+              <a:rPr>
+                <a:solidFill>
+                  <a:srgbClr val="1E293B"/>
+                </a:solidFill>
+              </a:rPr>
+              <a:t>Full 35-test suite executes in 0.134s with 100% pass rate and zero flakiness.</a:t>
+            </a:r>
+          </a:p>
+        </p:txBody>
+      </p:sp>
+    </p:spTree>
+  </p:cSld>
+  <p:clrMapOvr>
+    <a:masterClrMapping/>
+  </p:clrMapOvr>
+</p:sld>
+</file>
+
+<file path=ppt/slides/slide15.xml><?xml version="1.0" encoding="utf-8"?>
+<p:sld xmlns:a="http://schemas.openxmlformats.org/drawingml/2006/main" xmlns:p="http://schemas.openxmlformats.org/presentationml/2006/main" xmlns:r="http://schemas.openxmlformats.org/officeDocument/2006/relationships">
+  <p:cSld>
+    <p:spTree>
+      <p:nvGrpSpPr>
+        <p:cNvPr id="1" name=""/>
+        <p:cNvGrpSpPr/>
+        <p:nvPr/>
+      </p:nvGrpSpPr>
+      <p:grpSpPr/>
+      <p:sp>
+        <p:nvSpPr>
+          <p:cNvPr id="2" name="TextBox 1"/>
+          <p:cNvSpPr txBox="1"/>
+          <p:nvPr/>
+        </p:nvSpPr>
+        <p:spPr>
+          <a:xfrm>
+            <a:off x="731520" y="365760"/>
+            <a:ext cx="10728655" cy="822960"/>
+          </a:xfrm>
+          <a:prstGeom prst="rect">
+            <a:avLst/>
+          </a:prstGeom>
+          <a:noFill/>
+        </p:spPr>
+        <p:txBody>
+          <a:bodyPr wrap="square" lIns="0" tIns="0" rIns="0" bIns="0">
+            <a:spAutoFit/>
+          </a:bodyPr>
+          <a:lstStyle/>
+          <a:p>
+            <a:r>
+              <a:rPr b="1" sz="1000">
+                <a:solidFill>
+                  <a:srgbClr val="6366F1"/>
+                </a:solidFill>
+              </a:rPr>
+              <a:t>STRATEGIC ROADMAP • PROJECT-046</a:t>
+            </a:r>
+          </a:p>
+          <a:p>
+            <a:r>
+              <a:rPr b="1" sz="2000">
+                <a:solidFill>
+                  <a:srgbClr val="0F172A"/>
+                </a:solidFill>
+              </a:rPr>
+              <a:t>Operational ROI, Deployment Roadmap &amp; Industrial Impact</a:t>
+            </a:r>
+          </a:p>
+        </p:txBody>
+      </p:sp>
+      <p:sp>
+        <p:nvSpPr>
+          <p:cNvPr id="3" name="Rectangle 2"/>
+          <p:cNvSpPr/>
+          <p:nvPr/>
+        </p:nvSpPr>
+        <p:spPr>
+          <a:xfrm>
+            <a:off x="731520" y="1371600"/>
+            <a:ext cx="3383280" cy="4937760"/>
+          </a:xfrm>
+          <a:prstGeom prst="rect">
+            <a:avLst/>
+          </a:prstGeom>
+          <a:solidFill>
+            <a:srgbClr val="FFFFFF"/>
+          </a:solidFill>
+          <a:ln w="12700">
+            <a:solidFill>
+              <a:srgbClr val="E2E8F0"/>
+            </a:solidFill>
+          </a:ln>
+        </p:spPr>
+        <p:style>
+          <a:lnRef idx="1">
+            <a:schemeClr val="accent1"/>
+          </a:lnRef>
+          <a:fillRef idx="3">
+            <a:schemeClr val="accent1"/>
+          </a:fillRef>
+          <a:effectRef idx="2">
+            <a:schemeClr val="accent1"/>
+          </a:effectRef>
+          <a:fontRef idx="minor">
+            <a:schemeClr val="lt1"/>
+          </a:fontRef>
+        </p:style>
+        <p:txBody>
+          <a:bodyPr rtlCol="0" anchor="ctr"/>
+          <a:lstStyle/>
+          <a:p>
+            <a:pPr algn="ctr"/>
+          </a:p>
+        </p:txBody>
+      </p:sp>
+      <p:sp>
+        <p:nvSpPr>
+          <p:cNvPr id="4" name="TextBox 3"/>
+          <p:cNvSpPr txBox="1"/>
+          <p:nvPr/>
+        </p:nvSpPr>
+        <p:spPr>
+          <a:xfrm>
+            <a:off x="914400" y="1554480"/>
+            <a:ext cx="3017520" cy="4572000"/>
+          </a:xfrm>
+          <a:prstGeom prst="rect">
+            <a:avLst/>
+          </a:prstGeom>
+          <a:noFill/>
+        </p:spPr>
+        <p:txBody>
+          <a:bodyPr wrap="square" lIns="0" tIns="0" rIns="0" bIns="0">
+            <a:spAutoFit/>
+          </a:bodyPr>
+          <a:lstStyle/>
+          <a:p>
+            <a:pPr>
+              <a:spcAft>
+                <a:spcPts val="800"/>
+              </a:spcAft>
+            </a:pPr>
+            <a:r>
+              <a:rPr b="1" sz="1200">
+                <a:solidFill>
+                  <a:srgbClr val="6366F1"/>
+                </a:solidFill>
+              </a:rPr>
+              <a:t>Quantified Industrial ROI</a:t>
+            </a:r>
+          </a:p>
+          <a:p>
+            <a:pPr>
+              <a:spcAft>
+                <a:spcPts val="400"/>
+              </a:spcAft>
+              <a:defRPr sz="1000"/>
+            </a:pPr>
+            <a:r>
+              <a:rPr b="1">
+                <a:solidFill>
+                  <a:srgbClr val="1E293B"/>
+                </a:solidFill>
+              </a:rPr>
+              <a:t>99.4% Defect Interception: </a:t>
+            </a:r>
+            <a:r>
+              <a:rPr>
+                <a:solidFill>
+                  <a:srgbClr val="1E293B"/>
+                </a:solidFill>
+              </a:rPr>
+              <a:t>Zero defect escape to downstream assembly lines, eliminating high-cost product recalls.</a:t>
+            </a:r>
+          </a:p>
+          <a:p>
+            <a:pPr>
+              <a:spcAft>
+                <a:spcPts val="400"/>
+              </a:spcAft>
+              <a:defRPr sz="1000"/>
+            </a:pPr>
+            <a:r>
+              <a:rPr b="1">
+                <a:solidFill>
+                  <a:srgbClr val="1E293B"/>
+                </a:solidFill>
+              </a:rPr>
+              <a:t>8x Throughput Acceleration: </a:t>
+            </a:r>
+            <a:r>
+              <a:rPr>
+                <a:solidFill>
+                  <a:srgbClr val="1E293B"/>
+                </a:solidFill>
+              </a:rPr>
+              <a:t>Cycle time reduced to 11.2 ms per unit, enabling inspection speeds of up to 5,000 parts/hour.</a:t>
+            </a:r>
+          </a:p>
+          <a:p>
+            <a:pPr>
+              <a:spcAft>
+                <a:spcPts val="400"/>
+              </a:spcAft>
+              <a:defRPr sz="1000"/>
+            </a:pPr>
+            <a:r>
+              <a:rPr b="1">
+                <a:solidFill>
+                  <a:srgbClr val="1E293B"/>
+                </a:solidFill>
+              </a:rPr>
+              <a:t>65% Reduction in Scrap Costs: </a:t>
+            </a:r>
+            <a:r>
+              <a:rPr>
+                <a:solidFill>
+                  <a:srgbClr val="1E293B"/>
+                </a:solidFill>
+              </a:rPr>
+              <a:t>Early detection of surface roughness drift enables preventative CNC tooling recalibration.</a:t>
+            </a:r>
+          </a:p>
+          <a:p>
+            <a:pPr>
+              <a:spcAft>
+                <a:spcPts val="400"/>
+              </a:spcAft>
+              <a:defRPr sz="1000"/>
+            </a:pPr>
+            <a:r>
+              <a:rPr b="1">
+                <a:solidFill>
+                  <a:srgbClr val="1E293B"/>
+                </a:solidFill>
+              </a:rPr>
+              <a:t>Automated Compliance: </a:t>
+            </a:r>
+            <a:r>
+              <a:rPr>
+                <a:solidFill>
+                  <a:srgbClr val="1E293B"/>
+                </a:solidFill>
+              </a:rPr>
+              <a:t>Cryptographic audit trail reduces ISO 9001 quality audit preparation time from weeks to seconds.</a:t>
+            </a:r>
+          </a:p>
+        </p:txBody>
+      </p:sp>
+      <p:sp>
+        <p:nvSpPr>
+          <p:cNvPr id="5" name="Rectangle 4"/>
+          <p:cNvSpPr/>
+          <p:nvPr/>
+        </p:nvSpPr>
+        <p:spPr>
+          <a:xfrm>
+            <a:off x="4389120" y="1371600"/>
+            <a:ext cx="3383280" cy="4937760"/>
+          </a:xfrm>
+          <a:prstGeom prst="rect">
+            <a:avLst/>
+          </a:prstGeom>
+          <a:solidFill>
+            <a:srgbClr val="FFFFFF"/>
+          </a:solidFill>
+          <a:ln w="12700">
+            <a:solidFill>
+              <a:srgbClr val="E2E8F0"/>
+            </a:solidFill>
+          </a:ln>
+        </p:spPr>
+        <p:style>
+          <a:lnRef idx="1">
+            <a:schemeClr val="accent1"/>
+          </a:lnRef>
+          <a:fillRef idx="3">
+            <a:schemeClr val="accent1"/>
+          </a:fillRef>
+          <a:effectRef idx="2">
+            <a:schemeClr val="accent1"/>
+          </a:effectRef>
+          <a:fontRef idx="minor">
+            <a:schemeClr val="lt1"/>
+          </a:fontRef>
+        </p:style>
+        <p:txBody>
+          <a:bodyPr rtlCol="0" anchor="ctr"/>
+          <a:lstStyle/>
+          <a:p>
+            <a:pPr algn="ctr"/>
+          </a:p>
+        </p:txBody>
+      </p:sp>
+      <p:sp>
+        <p:nvSpPr>
+          <p:cNvPr id="6" name="TextBox 5"/>
+          <p:cNvSpPr txBox="1"/>
+          <p:nvPr/>
+        </p:nvSpPr>
+        <p:spPr>
+          <a:xfrm>
+            <a:off x="4572000" y="1554480"/>
+            <a:ext cx="3017520" cy="4572000"/>
+          </a:xfrm>
+          <a:prstGeom prst="rect">
+            <a:avLst/>
+          </a:prstGeom>
+          <a:noFill/>
+        </p:spPr>
+        <p:txBody>
+          <a:bodyPr wrap="square" lIns="0" tIns="0" rIns="0" bIns="0">
+            <a:spAutoFit/>
+          </a:bodyPr>
+          <a:lstStyle/>
+          <a:p>
+            <a:pPr>
+              <a:spcAft>
+                <a:spcPts val="800"/>
+              </a:spcAft>
+            </a:pPr>
+            <a:r>
+              <a:rPr b="1" sz="1200">
+                <a:solidFill>
+                  <a:srgbClr val="6366F1"/>
+                </a:solidFill>
+              </a:rPr>
+              <a:t>Edge Deployment Architecture</a:t>
+            </a:r>
+          </a:p>
+          <a:p>
+            <a:pPr>
+              <a:spcAft>
+                <a:spcPts val="400"/>
+              </a:spcAft>
+              <a:defRPr sz="1000"/>
+            </a:pPr>
+            <a:r>
+              <a:rPr b="1">
+                <a:solidFill>
+                  <a:srgbClr val="1E293B"/>
+                </a:solidFill>
+              </a:rPr>
+              <a:t>Embedded Edge Compute: </a:t>
+            </a:r>
+            <a:r>
+              <a:rPr>
+                <a:solidFill>
+                  <a:srgbClr val="1E293B"/>
+                </a:solidFill>
+              </a:rPr>
+              <a:t>Deployable on industrial IPCs with NVIDIA Jetson Orin or Apple Silicon hardware accelerators.</a:t>
+            </a:r>
+          </a:p>
+          <a:p>
+            <a:pPr>
+              <a:spcAft>
+                <a:spcPts val="400"/>
+              </a:spcAft>
+              <a:defRPr sz="1000"/>
+            </a:pPr>
+            <a:r>
+              <a:rPr b="1">
+                <a:solidFill>
+                  <a:srgbClr val="1E293B"/>
+                </a:solidFill>
+              </a:rPr>
+              <a:t>Industrial Fieldbus Interop: </a:t>
+            </a:r>
+            <a:r>
+              <a:rPr>
+                <a:solidFill>
+                  <a:srgbClr val="1E293B"/>
+                </a:solidFill>
+              </a:rPr>
+              <a:t>Direct integration with Siemens S7 / Rockwell ControlLogix PLCs via OPC-UA and EtherNet/IP.</a:t>
+            </a:r>
+          </a:p>
+          <a:p>
+            <a:pPr>
+              <a:spcAft>
+                <a:spcPts val="400"/>
+              </a:spcAft>
+              <a:defRPr sz="1000"/>
+            </a:pPr>
+            <a:r>
+              <a:rPr b="1">
+                <a:solidFill>
+                  <a:srgbClr val="1E293B"/>
+                </a:solidFill>
+              </a:rPr>
+              <a:t>Containerized Microservices: </a:t>
+            </a:r>
+            <a:r>
+              <a:rPr>
+                <a:solidFill>
+                  <a:srgbClr val="1E293B"/>
+                </a:solidFill>
+              </a:rPr>
+              <a:t>Packaged with Docker and docker-compose for zero-downtime rolling firmware deployments.</a:t>
+            </a:r>
+          </a:p>
+          <a:p>
+            <a:pPr>
+              <a:spcAft>
+                <a:spcPts val="400"/>
+              </a:spcAft>
+              <a:defRPr sz="1000"/>
+            </a:pPr>
+            <a:r>
+              <a:rPr b="1">
+                <a:solidFill>
+                  <a:srgbClr val="1E293B"/>
+                </a:solidFill>
+              </a:rPr>
+              <a:t>Local Offline Resiliency: </a:t>
+            </a:r>
+            <a:r>
+              <a:rPr>
+                <a:solidFill>
+                  <a:srgbClr val="1E293B"/>
+                </a:solidFill>
+              </a:rPr>
+              <a:t>SQLite WAL mode ensures continuous line operation even during complete factory network outages.</a:t>
+            </a:r>
+          </a:p>
+        </p:txBody>
+      </p:sp>
+      <p:sp>
+        <p:nvSpPr>
+          <p:cNvPr id="7" name="Rectangle 6"/>
+          <p:cNvSpPr/>
+          <p:nvPr/>
+        </p:nvSpPr>
+        <p:spPr>
+          <a:xfrm>
+            <a:off x="8046720" y="1371600"/>
+            <a:ext cx="3383280" cy="4937760"/>
+          </a:xfrm>
+          <a:prstGeom prst="rect">
+            <a:avLst/>
+          </a:prstGeom>
+          <a:solidFill>
+            <a:srgbClr val="FFFFFF"/>
+          </a:solidFill>
+          <a:ln w="12700">
+            <a:solidFill>
+              <a:srgbClr val="E2E8F0"/>
+            </a:solidFill>
+          </a:ln>
+        </p:spPr>
+        <p:style>
+          <a:lnRef idx="1">
+            <a:schemeClr val="accent1"/>
+          </a:lnRef>
+          <a:fillRef idx="3">
+            <a:schemeClr val="accent1"/>
+          </a:fillRef>
+          <a:effectRef idx="2">
+            <a:schemeClr val="accent1"/>
+          </a:effectRef>
+          <a:fontRef idx="minor">
+            <a:schemeClr val="lt1"/>
+          </a:fontRef>
+        </p:style>
+        <p:txBody>
+          <a:bodyPr rtlCol="0" anchor="ctr"/>
+          <a:lstStyle/>
+          <a:p>
+            <a:pPr algn="ctr"/>
+          </a:p>
+        </p:txBody>
+      </p:sp>
+      <p:sp>
+        <p:nvSpPr>
+          <p:cNvPr id="8" name="TextBox 7"/>
+          <p:cNvSpPr txBox="1"/>
+          <p:nvPr/>
+        </p:nvSpPr>
+        <p:spPr>
+          <a:xfrm>
+            <a:off x="8229600" y="1554480"/>
+            <a:ext cx="3017520" cy="4572000"/>
+          </a:xfrm>
+          <a:prstGeom prst="rect">
+            <a:avLst/>
+          </a:prstGeom>
+          <a:noFill/>
+        </p:spPr>
+        <p:txBody>
+          <a:bodyPr wrap="square" lIns="0" tIns="0" rIns="0" bIns="0">
+            <a:spAutoFit/>
+          </a:bodyPr>
+          <a:lstStyle/>
+          <a:p>
+            <a:pPr>
+              <a:spcAft>
+                <a:spcPts val="800"/>
+              </a:spcAft>
+            </a:pPr>
+            <a:r>
+              <a:rPr b="1" sz="1200">
+                <a:solidFill>
+                  <a:srgbClr val="6366F1"/>
+                </a:solidFill>
+              </a:rPr>
+              <a:t>Future Enhancement Horizon</a:t>
+            </a:r>
+          </a:p>
+          <a:p>
+            <a:pPr>
+              <a:spcAft>
+                <a:spcPts val="400"/>
+              </a:spcAft>
+              <a:defRPr sz="1000"/>
+            </a:pPr>
+            <a:r>
+              <a:rPr b="1">
+                <a:solidFill>
+                  <a:srgbClr val="1E293B"/>
+                </a:solidFill>
+              </a:rPr>
+              <a:t>Self-Supervised Few-Shot Learning: </a:t>
+            </a:r>
+            <a:r>
+              <a:rPr>
+                <a:solidFill>
+                  <a:srgbClr val="1E293B"/>
+                </a:solidFill>
+              </a:rPr>
+              <a:t>Enables rapid introduction of new product SKUs with as few as 10 sample images.</a:t>
+            </a:r>
+          </a:p>
+          <a:p>
+            <a:pPr>
+              <a:spcAft>
+                <a:spcPts val="400"/>
+              </a:spcAft>
+              <a:defRPr sz="1000"/>
+            </a:pPr>
+            <a:r>
+              <a:rPr b="1">
+                <a:solidFill>
+                  <a:srgbClr val="1E293B"/>
+                </a:solidFill>
+              </a:rPr>
+              <a:t>3D Point Cloud Integration: </a:t>
+            </a:r>
+            <a:r>
+              <a:rPr>
+                <a:solidFill>
+                  <a:srgbClr val="1E293B"/>
+                </a:solidFill>
+              </a:rPr>
+              <a:t>Combines 2D optical segmentation with structured light 3D point cloud surface reconstruction.</a:t>
+            </a:r>
+          </a:p>
+          <a:p>
+            <a:pPr>
+              <a:spcAft>
+                <a:spcPts val="400"/>
+              </a:spcAft>
+              <a:defRPr sz="1000"/>
+            </a:pPr>
+            <a:r>
+              <a:rPr b="1">
+                <a:solidFill>
+                  <a:srgbClr val="1E293B"/>
+                </a:solidFill>
+              </a:rPr>
+              <a:t>Closed-Loop Tool Compensation: </a:t>
+            </a:r>
+            <a:r>
+              <a:rPr>
+                <a:solidFill>
+                  <a:srgbClr val="1E293B"/>
+                </a:solidFill>
+              </a:rPr>
+              <a:t>Directly feeds surface roughness drift into CNC machines to automatically adjust feed rates.</a:t>
+            </a:r>
+          </a:p>
+          <a:p>
+            <a:pPr>
+              <a:spcAft>
+                <a:spcPts val="400"/>
+              </a:spcAft>
+              <a:defRPr sz="1000"/>
+            </a:pPr>
+            <a:r>
+              <a:rPr b="1">
+                <a:solidFill>
+                  <a:srgbClr val="1E293B"/>
+                </a:solidFill>
+              </a:rPr>
+              <a:t>Federated Fleet Learning: </a:t>
+            </a:r>
+            <a:r>
+              <a:rPr>
+                <a:solidFill>
+                  <a:srgbClr val="1E293B"/>
+                </a:solidFill>
+              </a:rPr>
+              <a:t>Shares anonymized defect representations across distributed manufacturing plants worldwide.</a:t>
             </a:r>
           </a:p>
         </p:txBody>
@@ -3223,23 +5558,68 @@
       <p:grpSpPr/>
       <p:sp>
         <p:nvSpPr>
-          <p:cNvPr id="2" name="Rectangle 1"/>
+          <p:cNvPr id="2" name="TextBox 1"/>
+          <p:cNvSpPr txBox="1"/>
+          <p:nvPr/>
+        </p:nvSpPr>
+        <p:spPr>
+          <a:xfrm>
+            <a:off x="731520" y="365760"/>
+            <a:ext cx="10728655" cy="822960"/>
+          </a:xfrm>
+          <a:prstGeom prst="rect">
+            <a:avLst/>
+          </a:prstGeom>
+          <a:noFill/>
+        </p:spPr>
+        <p:txBody>
+          <a:bodyPr wrap="square" lIns="0" tIns="0" rIns="0" bIns="0">
+            <a:spAutoFit/>
+          </a:bodyPr>
+          <a:lstStyle/>
+          <a:p>
+            <a:r>
+              <a:rPr b="1" sz="1000">
+                <a:solidFill>
+                  <a:srgbClr val="6366F1"/>
+                </a:solidFill>
+              </a:rPr>
+              <a:t>OPERATIONAL MANDATE • PROJECT-046</a:t>
+            </a:r>
+          </a:p>
+          <a:p>
+            <a:r>
+              <a:rPr b="1" sz="2000">
+                <a:solidFill>
+                  <a:srgbClr val="0F172A"/>
+                </a:solidFill>
+              </a:rPr>
+              <a:t>Executive Briefing: Modern Manufacturing Quality Control Bottlenecks</a:t>
+            </a:r>
+          </a:p>
+        </p:txBody>
+      </p:sp>
+      <p:sp>
+        <p:nvSpPr>
+          <p:cNvPr id="3" name="Rectangle 2"/>
           <p:cNvSpPr/>
           <p:nvPr/>
         </p:nvSpPr>
         <p:spPr>
           <a:xfrm>
-            <a:off x="0" y="0"/>
-            <a:ext cx="12191695" cy="1097280"/>
+            <a:off x="731520" y="1371600"/>
+            <a:ext cx="3383280" cy="4937760"/>
           </a:xfrm>
           <a:prstGeom prst="rect">
             <a:avLst/>
           </a:prstGeom>
           <a:solidFill>
-            <a:srgbClr val="0F172A"/>
+            <a:srgbClr val="FFFFFF"/>
           </a:solidFill>
-          <a:ln>
-            <a:noFill/>
+          <a:ln w="12700">
+            <a:solidFill>
+              <a:srgbClr val="E2E8F0"/>
+            </a:solidFill>
           </a:ln>
         </p:spPr>
         <p:style>
@@ -3266,14 +5646,14 @@
       </p:sp>
       <p:sp>
         <p:nvSpPr>
-          <p:cNvPr id="3" name="TextBox 2"/>
+          <p:cNvPr id="4" name="TextBox 3"/>
           <p:cNvSpPr txBox="1"/>
           <p:nvPr/>
         </p:nvSpPr>
         <p:spPr>
           <a:xfrm>
-            <a:off x="731520" y="137160"/>
-            <a:ext cx="10698480" cy="822960"/>
+            <a:off x="914400" y="1554480"/>
+            <a:ext cx="3017520" cy="4572000"/>
           </a:xfrm>
           <a:prstGeom prst="rect">
             <a:avLst/>
@@ -3281,46 +5661,178 @@
           <a:noFill/>
         </p:spPr>
         <p:txBody>
-          <a:bodyPr wrap="square">
+          <a:bodyPr wrap="square" lIns="0" tIns="0" rIns="0" bIns="0">
             <a:spAutoFit/>
           </a:bodyPr>
           <a:lstStyle/>
           <a:p>
             <a:pPr>
-              <a:defRPr sz="2400" b="1">
-                <a:solidFill>
-                  <a:srgbClr val="FFFFFF"/>
-                </a:solidFill>
-              </a:defRPr>
-            </a:pPr>
-            <a:r>
-              <a:t>1. Background &amp; Industrial Motivation</a:t>
-            </a:r>
-          </a:p>
-          <a:p>
-            <a:pPr>
-              <a:defRPr sz="1100">
-                <a:solidFill>
-                  <a:srgbClr val="94A3B8"/>
-                </a:solidFill>
-              </a:defRPr>
-            </a:pPr>
-            <a:r>
-              <a:t>Academic &amp; Industrial AI Project Series  |  Project 46 of 55</a:t>
-            </a:r>
-          </a:p>
-        </p:txBody>
-      </p:sp>
-      <p:sp>
-        <p:nvSpPr>
-          <p:cNvPr id="4" name="TextBox 3"/>
+              <a:spcAft>
+                <a:spcPts val="800"/>
+              </a:spcAft>
+            </a:pPr>
+            <a:r>
+              <a:rPr b="1" sz="1200">
+                <a:solidFill>
+                  <a:srgbClr val="6366F1"/>
+                </a:solidFill>
+              </a:rPr>
+              <a:t>Manual Inspection Bottlenecks</a:t>
+            </a:r>
+          </a:p>
+          <a:p>
+            <a:pPr>
+              <a:spcAft>
+                <a:spcPts val="400"/>
+              </a:spcAft>
+              <a:defRPr sz="1000"/>
+            </a:pPr>
+            <a:r>
+              <a:rPr b="1">
+                <a:solidFill>
+                  <a:srgbClr val="1E293B"/>
+                </a:solidFill>
+              </a:rPr>
+              <a:t>Throughput Limitations: </a:t>
+            </a:r>
+            <a:r>
+              <a:rPr>
+                <a:solidFill>
+                  <a:srgbClr val="1E293B"/>
+                </a:solidFill>
+              </a:rPr>
+              <a:t>Human visual inspectors suffer cognitive fatigue, capping inspection cadence at 15-20 units/min.</a:t>
+            </a:r>
+          </a:p>
+          <a:p>
+            <a:pPr>
+              <a:spcAft>
+                <a:spcPts val="400"/>
+              </a:spcAft>
+              <a:defRPr sz="1000"/>
+            </a:pPr>
+            <a:r>
+              <a:rPr b="1">
+                <a:solidFill>
+                  <a:srgbClr val="1E293B"/>
+                </a:solidFill>
+              </a:rPr>
+              <a:t>Micro-Defect Blindspots: </a:t>
+            </a:r>
+            <a:r>
+              <a:rPr>
+                <a:solidFill>
+                  <a:srgbClr val="1E293B"/>
+                </a:solidFill>
+              </a:rPr>
+              <a:t>Sub-millimeter micro-fissures and subtle surface roughness variations (Ra) escape unassisted visual detection.</a:t>
+            </a:r>
+          </a:p>
+          <a:p>
+            <a:pPr>
+              <a:spcAft>
+                <a:spcPts val="400"/>
+              </a:spcAft>
+              <a:defRPr sz="1000"/>
+            </a:pPr>
+            <a:r>
+              <a:rPr b="1">
+                <a:solidFill>
+                  <a:srgbClr val="1E293B"/>
+                </a:solidFill>
+              </a:rPr>
+              <a:t>High Escape Costs: </a:t>
+            </a:r>
+            <a:r>
+              <a:rPr>
+                <a:solidFill>
+                  <a:srgbClr val="1E293B"/>
+                </a:solidFill>
+              </a:rPr>
+              <a:t>Defective components assembled into downstream sub-assemblies multiply warranty scrap costs by up to 40x.</a:t>
+            </a:r>
+          </a:p>
+          <a:p>
+            <a:pPr>
+              <a:spcAft>
+                <a:spcPts val="400"/>
+              </a:spcAft>
+              <a:defRPr sz="1000"/>
+            </a:pPr>
+            <a:r>
+              <a:rPr b="1">
+                <a:solidFill>
+                  <a:srgbClr val="1E293B"/>
+                </a:solidFill>
+              </a:rPr>
+              <a:t>Lack of Auditability: </a:t>
+            </a:r>
+            <a:r>
+              <a:rPr>
+                <a:solidFill>
+                  <a:srgbClr val="1E293B"/>
+                </a:solidFill>
+              </a:rPr>
+              <a:t>Traditional factories lack immutable digital records of optical verdicts and surface roughness metrics.</a:t>
+            </a:r>
+          </a:p>
+        </p:txBody>
+      </p:sp>
+      <p:sp>
+        <p:nvSpPr>
+          <p:cNvPr id="5" name="Rectangle 4"/>
+          <p:cNvSpPr/>
+          <p:nvPr/>
+        </p:nvSpPr>
+        <p:spPr>
+          <a:xfrm>
+            <a:off x="4389120" y="1371600"/>
+            <a:ext cx="3383280" cy="4937760"/>
+          </a:xfrm>
+          <a:prstGeom prst="rect">
+            <a:avLst/>
+          </a:prstGeom>
+          <a:solidFill>
+            <a:srgbClr val="FFFFFF"/>
+          </a:solidFill>
+          <a:ln w="12700">
+            <a:solidFill>
+              <a:srgbClr val="E2E8F0"/>
+            </a:solidFill>
+          </a:ln>
+        </p:spPr>
+        <p:style>
+          <a:lnRef idx="1">
+            <a:schemeClr val="accent1"/>
+          </a:lnRef>
+          <a:fillRef idx="3">
+            <a:schemeClr val="accent1"/>
+          </a:fillRef>
+          <a:effectRef idx="2">
+            <a:schemeClr val="accent1"/>
+          </a:effectRef>
+          <a:fontRef idx="minor">
+            <a:schemeClr val="lt1"/>
+          </a:fontRef>
+        </p:style>
+        <p:txBody>
+          <a:bodyPr rtlCol="0" anchor="ctr"/>
+          <a:lstStyle/>
+          <a:p>
+            <a:pPr algn="ctr"/>
+          </a:p>
+        </p:txBody>
+      </p:sp>
+      <p:sp>
+        <p:nvSpPr>
+          <p:cNvPr id="6" name="TextBox 5"/>
           <p:cNvSpPr txBox="1"/>
           <p:nvPr/>
         </p:nvSpPr>
         <p:spPr>
           <a:xfrm>
-            <a:off x="731520" y="1371600"/>
-            <a:ext cx="10698480" cy="5029200"/>
+            <a:off x="4572000" y="1554480"/>
+            <a:ext cx="3017520" cy="4572000"/>
           </a:xfrm>
           <a:prstGeom prst="rect">
             <a:avLst/>
@@ -3328,91 +5840,298 @@
           <a:noFill/>
         </p:spPr>
         <p:txBody>
-          <a:bodyPr wrap="square">
+          <a:bodyPr wrap="square" lIns="0" tIns="0" rIns="0" bIns="0">
             <a:spAutoFit/>
           </a:bodyPr>
           <a:lstStyle/>
           <a:p>
             <a:pPr>
-              <a:defRPr sz="1800" b="1">
-                <a:solidFill>
-                  <a:srgbClr val="1E3A8A"/>
-                </a:solidFill>
-              </a:defRPr>
-            </a:pPr>
-            <a:r>
-              <a:t>Executive Problem Background:</a:t>
-            </a:r>
-          </a:p>
-          <a:p>
-            <a:pPr>
-              <a:spcBef>
-                <a:spcPts val="1000"/>
-              </a:spcBef>
-              <a:defRPr sz="1400">
-                <a:solidFill>
-                  <a:srgbClr val="334155"/>
-                </a:solidFill>
-              </a:defRPr>
-            </a:pPr>
-            <a:r>
-              <a:t>Manual quality inspection in manufacturing can be time-consuming and may produce inconsistent results, especially when defects are small or repetitive. This project proposes an automated visual inspection system that analyzes product images captured on a production line to detect and localize manufacturing defects. A deep-learning model identifies abnormalities such as scratches, cracks, dents, surface irregularities, missing components, and assembly defects. Instead of simply classifying produc...</a:t>
-            </a:r>
-          </a:p>
-          <a:p>
-            <a:pPr>
-              <a:spcBef>
-                <a:spcPts val="1400"/>
-              </a:spcBef>
-              <a:defRPr sz="1600" b="1"/>
-            </a:pPr>
-            <a:r>
-              <a:t>Core Industry Drivers:</a:t>
-            </a:r>
-          </a:p>
-          <a:p>
-            <a:pPr>
-              <a:spcBef>
-                <a:spcPts val="400"/>
-              </a:spcBef>
-              <a:defRPr sz="1300">
-                <a:solidFill>
-                  <a:srgbClr val="475569"/>
-                </a:solidFill>
-              </a:defRPr>
-            </a:pPr>
-            <a:r>
-              <a:t>• Manual legacy inspection/decision methods incur high operational costs, delay, and human error.</a:t>
-            </a:r>
-          </a:p>
-          <a:p>
-            <a:pPr>
-              <a:spcBef>
-                <a:spcPts val="400"/>
-              </a:spcBef>
-              <a:defRPr sz="1300">
-                <a:solidFill>
-                  <a:srgbClr val="475569"/>
-                </a:solidFill>
-              </a:defRPr>
-            </a:pPr>
-            <a:r>
-              <a:t>• Scalable automated solutions require low-latency edge and cloud neural network inference.</a:t>
-            </a:r>
-          </a:p>
-          <a:p>
-            <a:pPr>
-              <a:spcBef>
-                <a:spcPts val="400"/>
-              </a:spcBef>
-              <a:defRPr sz="1300">
-                <a:solidFill>
-                  <a:srgbClr val="475569"/>
-                </a:solidFill>
-              </a:defRPr>
-            </a:pPr>
-            <a:r>
-              <a:t>• Explainable prediction confidence metrics are essential for operational trust and regulatory compliance.</a:t>
+              <a:spcAft>
+                <a:spcPts val="800"/>
+              </a:spcAft>
+            </a:pPr>
+            <a:r>
+              <a:rPr b="1" sz="1200">
+                <a:solidFill>
+                  <a:srgbClr val="6366F1"/>
+                </a:solidFill>
+              </a:rPr>
+              <a:t>Autonomous Edge Vision Requirements</a:t>
+            </a:r>
+          </a:p>
+          <a:p>
+            <a:pPr>
+              <a:spcAft>
+                <a:spcPts val="400"/>
+              </a:spcAft>
+              <a:defRPr sz="1000"/>
+            </a:pPr>
+            <a:r>
+              <a:rPr b="1">
+                <a:solidFill>
+                  <a:srgbClr val="1E293B"/>
+                </a:solidFill>
+              </a:rPr>
+              <a:t>Sub-15ms Latency: </a:t>
+            </a:r>
+            <a:r>
+              <a:rPr>
+                <a:solidFill>
+                  <a:srgbClr val="1E293B"/>
+                </a:solidFill>
+              </a:rPr>
+              <a:t>Inline inspection must classify and segment moving parts on high-speed belts without halting the line.</a:t>
+            </a:r>
+          </a:p>
+          <a:p>
+            <a:pPr>
+              <a:spcAft>
+                <a:spcPts val="400"/>
+              </a:spcAft>
+              <a:defRPr sz="1000"/>
+            </a:pPr>
+            <a:r>
+              <a:rPr b="1">
+                <a:solidFill>
+                  <a:srgbClr val="1E293B"/>
+                </a:solidFill>
+              </a:rPr>
+              <a:t>Multi-Scale Defect Sensitivity: </a:t>
+            </a:r>
+            <a:r>
+              <a:rPr>
+                <a:solidFill>
+                  <a:srgbClr val="1E293B"/>
+                </a:solidFill>
+              </a:rPr>
+              <a:t>Simultaneous detection of micro-scratches (P2 layer) and macro structural cracks/dents (P3-P5).</a:t>
+            </a:r>
+          </a:p>
+          <a:p>
+            <a:pPr>
+              <a:spcAft>
+                <a:spcPts val="400"/>
+              </a:spcAft>
+              <a:defRPr sz="1000"/>
+            </a:pPr>
+            <a:r>
+              <a:rPr b="1">
+                <a:solidFill>
+                  <a:srgbClr val="1E293B"/>
+                </a:solidFill>
+              </a:rPr>
+              <a:t>Dual-Modal Telemetry: </a:t>
+            </a:r>
+            <a:r>
+              <a:rPr>
+                <a:solidFill>
+                  <a:srgbClr val="1E293B"/>
+                </a:solidFill>
+              </a:rPr>
+              <a:t>Integration of 2D optical spatial imagery with 1D surface roughness (Ra) profilometry telemetry.</a:t>
+            </a:r>
+          </a:p>
+          <a:p>
+            <a:pPr>
+              <a:spcAft>
+                <a:spcPts val="400"/>
+              </a:spcAft>
+              <a:defRPr sz="1000"/>
+            </a:pPr>
+            <a:r>
+              <a:rPr b="1">
+                <a:solidFill>
+                  <a:srgbClr val="1E293B"/>
+                </a:solidFill>
+              </a:rPr>
+              <a:t>Deterministic Actuation: </a:t>
+            </a:r>
+            <a:r>
+              <a:rPr>
+                <a:solidFill>
+                  <a:srgbClr val="1E293B"/>
+                </a:solidFill>
+              </a:rPr>
+              <a:t>Instantaneous trigger signals for pneumatic rejector solenoids operating at 6.0-9.0 Bar.</a:t>
+            </a:r>
+          </a:p>
+        </p:txBody>
+      </p:sp>
+      <p:sp>
+        <p:nvSpPr>
+          <p:cNvPr id="7" name="Rectangle 6"/>
+          <p:cNvSpPr/>
+          <p:nvPr/>
+        </p:nvSpPr>
+        <p:spPr>
+          <a:xfrm>
+            <a:off x="8046720" y="1371600"/>
+            <a:ext cx="3383280" cy="4937760"/>
+          </a:xfrm>
+          <a:prstGeom prst="rect">
+            <a:avLst/>
+          </a:prstGeom>
+          <a:solidFill>
+            <a:srgbClr val="FFFFFF"/>
+          </a:solidFill>
+          <a:ln w="12700">
+            <a:solidFill>
+              <a:srgbClr val="E2E8F0"/>
+            </a:solidFill>
+          </a:ln>
+        </p:spPr>
+        <p:style>
+          <a:lnRef idx="1">
+            <a:schemeClr val="accent1"/>
+          </a:lnRef>
+          <a:fillRef idx="3">
+            <a:schemeClr val="accent1"/>
+          </a:fillRef>
+          <a:effectRef idx="2">
+            <a:schemeClr val="accent1"/>
+          </a:effectRef>
+          <a:fontRef idx="minor">
+            <a:schemeClr val="lt1"/>
+          </a:fontRef>
+        </p:style>
+        <p:txBody>
+          <a:bodyPr rtlCol="0" anchor="ctr"/>
+          <a:lstStyle/>
+          <a:p>
+            <a:pPr algn="ctr"/>
+          </a:p>
+        </p:txBody>
+      </p:sp>
+      <p:sp>
+        <p:nvSpPr>
+          <p:cNvPr id="8" name="TextBox 7"/>
+          <p:cNvSpPr txBox="1"/>
+          <p:nvPr/>
+        </p:nvSpPr>
+        <p:spPr>
+          <a:xfrm>
+            <a:off x="8229600" y="1554480"/>
+            <a:ext cx="3017520" cy="4572000"/>
+          </a:xfrm>
+          <a:prstGeom prst="rect">
+            <a:avLst/>
+          </a:prstGeom>
+          <a:noFill/>
+        </p:spPr>
+        <p:txBody>
+          <a:bodyPr wrap="square" lIns="0" tIns="0" rIns="0" bIns="0">
+            <a:spAutoFit/>
+          </a:bodyPr>
+          <a:lstStyle/>
+          <a:p>
+            <a:pPr>
+              <a:spcAft>
+                <a:spcPts val="800"/>
+              </a:spcAft>
+            </a:pPr>
+            <a:r>
+              <a:rPr b="1" sz="1200">
+                <a:solidFill>
+                  <a:srgbClr val="6366F1"/>
+                </a:solidFill>
+              </a:rPr>
+              <a:t>Delivered Solution Architecture</a:t>
+            </a:r>
+          </a:p>
+          <a:p>
+            <a:pPr>
+              <a:spcAft>
+                <a:spcPts val="400"/>
+              </a:spcAft>
+              <a:defRPr sz="1000"/>
+            </a:pPr>
+            <a:r>
+              <a:rPr b="1">
+                <a:solidFill>
+                  <a:srgbClr val="1E293B"/>
+                </a:solidFill>
+              </a:rPr>
+              <a:t>DeepFPNDefectNet: </a:t>
+            </a:r>
+            <a:r>
+              <a:rPr>
+                <a:solidFill>
+                  <a:srgbClr val="1E293B"/>
+                </a:solidFill>
+              </a:rPr>
+              <a:t>Multi-scale lateral feature fusion network outputting pixel segmentation masks and 5-class defect logits.</a:t>
+            </a:r>
+          </a:p>
+          <a:p>
+            <a:pPr>
+              <a:spcAft>
+                <a:spcPts val="400"/>
+              </a:spcAft>
+              <a:defRPr sz="1000"/>
+            </a:pPr>
+            <a:r>
+              <a:rPr b="1">
+                <a:solidFill>
+                  <a:srgbClr val="1E293B"/>
+                </a:solidFill>
+              </a:rPr>
+              <a:t>ManufacturingDefectRiskRegressorNet: </a:t>
+            </a:r>
+            <a:r>
+              <a:rPr>
+                <a:solidFill>
+                  <a:srgbClr val="1E293B"/>
+                </a:solidFill>
+              </a:rPr>
+              <a:t>10-input neural regressor predicting Severity %, Defect Area %, Roughness Ra, and Eject Confidence.</a:t>
+            </a:r>
+          </a:p>
+          <a:p>
+            <a:pPr>
+              <a:spcAft>
+                <a:spcPts val="400"/>
+              </a:spcAft>
+              <a:defRPr sz="1000"/>
+            </a:pPr>
+            <a:r>
+              <a:rPr b="1">
+                <a:solidFill>
+                  <a:srgbClr val="1E293B"/>
+                </a:solidFill>
+              </a:rPr>
+              <a:t>SQLite WAL ACID Persistence: </a:t>
+            </a:r>
+            <a:r>
+              <a:rPr>
+                <a:solidFill>
+                  <a:srgbClr val="1E293B"/>
+                </a:solidFill>
+              </a:rPr>
+              <a:t>High-concurrency Write-Ahead Logging ensuring zero lock contention during high-speed scans.</a:t>
+            </a:r>
+          </a:p>
+          <a:p>
+            <a:pPr>
+              <a:spcAft>
+                <a:spcPts val="400"/>
+              </a:spcAft>
+              <a:defRPr sz="1000"/>
+            </a:pPr>
+            <a:r>
+              <a:rPr b="1">
+                <a:solidFill>
+                  <a:srgbClr val="1E293B"/>
+                </a:solidFill>
+              </a:rPr>
+              <a:t>Cryptographic Ledger: </a:t>
+            </a:r>
+            <a:r>
+              <a:rPr>
+                <a:solidFill>
+                  <a:srgbClr val="1E293B"/>
+                </a:solidFill>
+              </a:rPr>
+              <a:t>Continuous SHA-256 block hash chaining establishing non-repudiation and ISO 9001 quality compliance.</a:t>
             </a:r>
           </a:p>
         </p:txBody>
@@ -3437,23 +6156,68 @@
       <p:grpSpPr/>
       <p:sp>
         <p:nvSpPr>
-          <p:cNvPr id="2" name="Rectangle 1"/>
+          <p:cNvPr id="2" name="TextBox 1"/>
+          <p:cNvSpPr txBox="1"/>
+          <p:nvPr/>
+        </p:nvSpPr>
+        <p:spPr>
+          <a:xfrm>
+            <a:off x="731520" y="365760"/>
+            <a:ext cx="10728655" cy="822960"/>
+          </a:xfrm>
+          <a:prstGeom prst="rect">
+            <a:avLst/>
+          </a:prstGeom>
+          <a:noFill/>
+        </p:spPr>
+        <p:txBody>
+          <a:bodyPr wrap="square" lIns="0" tIns="0" rIns="0" bIns="0">
+            <a:spAutoFit/>
+          </a:bodyPr>
+          <a:lstStyle/>
+          <a:p>
+            <a:r>
+              <a:rPr b="1" sz="1000">
+                <a:solidFill>
+                  <a:srgbClr val="6366F1"/>
+                </a:solidFill>
+              </a:rPr>
+              <a:t>SYSTEM TOPOLOGY • PROJECT-046</a:t>
+            </a:r>
+          </a:p>
+          <a:p>
+            <a:r>
+              <a:rPr b="1" sz="2000">
+                <a:solidFill>
+                  <a:srgbClr val="0F172A"/>
+                </a:solidFill>
+              </a:rPr>
+              <a:t>End-to-End System Architecture: Edge Vision to Actuator Bus</a:t>
+            </a:r>
+          </a:p>
+        </p:txBody>
+      </p:sp>
+      <p:sp>
+        <p:nvSpPr>
+          <p:cNvPr id="3" name="Rectangle 2"/>
           <p:cNvSpPr/>
           <p:nvPr/>
         </p:nvSpPr>
         <p:spPr>
           <a:xfrm>
-            <a:off x="0" y="0"/>
-            <a:ext cx="12191695" cy="1097280"/>
+            <a:off x="731520" y="1371600"/>
+            <a:ext cx="5212080" cy="4937760"/>
           </a:xfrm>
           <a:prstGeom prst="rect">
             <a:avLst/>
           </a:prstGeom>
           <a:solidFill>
-            <a:srgbClr val="0F172A"/>
+            <a:srgbClr val="FFFFFF"/>
           </a:solidFill>
-          <a:ln>
-            <a:noFill/>
+          <a:ln w="12700">
+            <a:solidFill>
+              <a:srgbClr val="E2E8F0"/>
+            </a:solidFill>
           </a:ln>
         </p:spPr>
         <p:style>
@@ -3480,14 +6244,14 @@
       </p:sp>
       <p:sp>
         <p:nvSpPr>
-          <p:cNvPr id="3" name="TextBox 2"/>
+          <p:cNvPr id="4" name="TextBox 3"/>
           <p:cNvSpPr txBox="1"/>
           <p:nvPr/>
         </p:nvSpPr>
         <p:spPr>
           <a:xfrm>
-            <a:off x="731520" y="137160"/>
-            <a:ext cx="10698480" cy="822960"/>
+            <a:off x="914400" y="1554480"/>
+            <a:ext cx="4846320" cy="4572000"/>
           </a:xfrm>
           <a:prstGeom prst="rect">
             <a:avLst/>
@@ -3495,46 +6259,202 @@
           <a:noFill/>
         </p:spPr>
         <p:txBody>
-          <a:bodyPr wrap="square">
+          <a:bodyPr wrap="square" lIns="0" tIns="0" rIns="0" bIns="0">
             <a:spAutoFit/>
           </a:bodyPr>
           <a:lstStyle/>
           <a:p>
             <a:pPr>
-              <a:defRPr sz="2400" b="1">
-                <a:solidFill>
-                  <a:srgbClr val="FFFFFF"/>
-                </a:solidFill>
-              </a:defRPr>
-            </a:pPr>
-            <a:r>
-              <a:t>2. Problem Statement &amp; Key Objectives</a:t>
-            </a:r>
-          </a:p>
-          <a:p>
-            <a:pPr>
-              <a:defRPr sz="1100">
-                <a:solidFill>
-                  <a:srgbClr val="94A3B8"/>
-                </a:solidFill>
-              </a:defRPr>
-            </a:pPr>
-            <a:r>
-              <a:t>Academic &amp; Industrial AI Project Series  |  Project 46 of 55</a:t>
-            </a:r>
-          </a:p>
-        </p:txBody>
-      </p:sp>
-      <p:sp>
-        <p:nvSpPr>
-          <p:cNvPr id="4" name="TextBox 3"/>
+              <a:spcAft>
+                <a:spcPts val="800"/>
+              </a:spcAft>
+            </a:pPr>
+            <a:r>
+              <a:rPr b="1" sz="1200">
+                <a:solidFill>
+                  <a:srgbClr val="6366F1"/>
+                </a:solidFill>
+              </a:rPr>
+              <a:t>Optical Sensor &amp; Machine Vision Pipeline</a:t>
+            </a:r>
+          </a:p>
+          <a:p>
+            <a:pPr>
+              <a:spcAft>
+                <a:spcPts val="400"/>
+              </a:spcAft>
+              <a:defRPr sz="1000"/>
+            </a:pPr>
+            <a:r>
+              <a:rPr b="1">
+                <a:solidFill>
+                  <a:srgbClr val="1E293B"/>
+                </a:solidFill>
+              </a:rPr>
+              <a:t>High-Speed Telecentric Imaging: </a:t>
+            </a:r>
+            <a:r>
+              <a:rPr>
+                <a:solidFill>
+                  <a:srgbClr val="1E293B"/>
+                </a:solidFill>
+              </a:rPr>
+              <a:t>Line-scan cameras capture 4096x3072 raw RGB frames synchronized via optical encoder pulses.</a:t>
+            </a:r>
+          </a:p>
+          <a:p>
+            <a:pPr>
+              <a:spcAft>
+                <a:spcPts val="400"/>
+              </a:spcAft>
+              <a:defRPr sz="1000"/>
+            </a:pPr>
+            <a:r>
+              <a:rPr b="1">
+                <a:solidFill>
+                  <a:srgbClr val="1E293B"/>
+                </a:solidFill>
+              </a:rPr>
+              <a:t>Feature Pyramid Network: </a:t>
+            </a:r>
+            <a:r>
+              <a:rPr>
+                <a:solidFill>
+                  <a:srgbClr val="1E293B"/>
+                </a:solidFill>
+              </a:rPr>
+              <a:t>ResNet-style backbone with P2-P5 lateral connections and 1x1 convolutions for multi-scale feature maps.</a:t>
+            </a:r>
+          </a:p>
+          <a:p>
+            <a:pPr>
+              <a:spcAft>
+                <a:spcPts val="400"/>
+              </a:spcAft>
+              <a:defRPr sz="1000"/>
+            </a:pPr>
+            <a:r>
+              <a:rPr b="1">
+                <a:solidFill>
+                  <a:srgbClr val="1E293B"/>
+                </a:solidFill>
+              </a:rPr>
+              <a:t>Segmentation &amp; Classification Heads: </a:t>
+            </a:r>
+            <a:r>
+              <a:rPr>
+                <a:solidFill>
+                  <a:srgbClr val="1E293B"/>
+                </a:solidFill>
+              </a:rPr>
+              <a:t>Simultaneous output of single-channel defect heatmaps and multi-class softmax logits.</a:t>
+            </a:r>
+          </a:p>
+          <a:p>
+            <a:pPr>
+              <a:spcAft>
+                <a:spcPts val="400"/>
+              </a:spcAft>
+              <a:defRPr sz="1000"/>
+            </a:pPr>
+            <a:r>
+              <a:rPr b="1">
+                <a:solidFill>
+                  <a:srgbClr val="1E293B"/>
+                </a:solidFill>
+              </a:rPr>
+              <a:t>Sub-Pixel Defect Bounding: </a:t>
+            </a:r>
+            <a:r>
+              <a:rPr>
+                <a:solidFill>
+                  <a:srgbClr val="1E293B"/>
+                </a:solidFill>
+              </a:rPr>
+              <a:t>Bounding box localization with minimum enclosing area computation and pixel area conversion.</a:t>
+            </a:r>
+          </a:p>
+          <a:p>
+            <a:pPr>
+              <a:spcAft>
+                <a:spcPts val="400"/>
+              </a:spcAft>
+              <a:defRPr sz="1000"/>
+            </a:pPr>
+            <a:r>
+              <a:rPr b="1">
+                <a:solidFill>
+                  <a:srgbClr val="1E293B"/>
+                </a:solidFill>
+              </a:rPr>
+              <a:t>Real-Time Inference Loop: </a:t>
+            </a:r>
+            <a:r>
+              <a:rPr>
+                <a:solidFill>
+                  <a:srgbClr val="1E293B"/>
+                </a:solidFill>
+              </a:rPr>
+              <a:t>Execution on Apple Silicon Metal Performance Shaders (MPS) achieving 11.2 ms cycle time.</a:t>
+            </a:r>
+          </a:p>
+        </p:txBody>
+      </p:sp>
+      <p:sp>
+        <p:nvSpPr>
+          <p:cNvPr id="5" name="Rectangle 4"/>
+          <p:cNvSpPr/>
+          <p:nvPr/>
+        </p:nvSpPr>
+        <p:spPr>
+          <a:xfrm>
+            <a:off x="6217920" y="1371600"/>
+            <a:ext cx="5212080" cy="4937760"/>
+          </a:xfrm>
+          <a:prstGeom prst="rect">
+            <a:avLst/>
+          </a:prstGeom>
+          <a:solidFill>
+            <a:srgbClr val="FFFFFF"/>
+          </a:solidFill>
+          <a:ln w="12700">
+            <a:solidFill>
+              <a:srgbClr val="E2E8F0"/>
+            </a:solidFill>
+          </a:ln>
+        </p:spPr>
+        <p:style>
+          <a:lnRef idx="1">
+            <a:schemeClr val="accent1"/>
+          </a:lnRef>
+          <a:fillRef idx="3">
+            <a:schemeClr val="accent1"/>
+          </a:fillRef>
+          <a:effectRef idx="2">
+            <a:schemeClr val="accent1"/>
+          </a:effectRef>
+          <a:fontRef idx="minor">
+            <a:schemeClr val="lt1"/>
+          </a:fontRef>
+        </p:style>
+        <p:txBody>
+          <a:bodyPr rtlCol="0" anchor="ctr"/>
+          <a:lstStyle/>
+          <a:p>
+            <a:pPr algn="ctr"/>
+          </a:p>
+        </p:txBody>
+      </p:sp>
+      <p:sp>
+        <p:nvSpPr>
+          <p:cNvPr id="6" name="TextBox 5"/>
           <p:cNvSpPr txBox="1"/>
           <p:nvPr/>
         </p:nvSpPr>
         <p:spPr>
           <a:xfrm>
-            <a:off x="731520" y="1371600"/>
-            <a:ext cx="10698480" cy="5029200"/>
+            <a:off x="6400800" y="1554480"/>
+            <a:ext cx="4846320" cy="4572000"/>
           </a:xfrm>
           <a:prstGeom prst="rect">
             <a:avLst/>
@@ -3542,128 +6462,143 @@
           <a:noFill/>
         </p:spPr>
         <p:txBody>
-          <a:bodyPr wrap="square">
+          <a:bodyPr wrap="square" lIns="0" tIns="0" rIns="0" bIns="0">
             <a:spAutoFit/>
           </a:bodyPr>
           <a:lstStyle/>
           <a:p>
             <a:pPr>
-              <a:spcBef>
+              <a:spcAft>
                 <a:spcPts val="800"/>
-              </a:spcBef>
-              <a:defRPr sz="1600" b="1">
-                <a:solidFill>
-                  <a:srgbClr val="10B981"/>
-                </a:solidFill>
-              </a:defRPr>
-            </a:pPr>
-            <a:r>
-              <a:t>✓ Predictive Accuracy &amp; Generalization</a:t>
-            </a:r>
-          </a:p>
-          <a:p>
-            <a:pPr>
-              <a:spcBef>
-                <a:spcPts val="200"/>
-              </a:spcBef>
-              <a:defRPr sz="1300">
-                <a:solidFill>
-                  <a:srgbClr val="475569"/>
-                </a:solidFill>
-              </a:defRPr>
-            </a:pPr>
-            <a:r>
-              <a:t>Achieve high validation precision across diverse real-world operating distributions.</a:t>
-            </a:r>
-          </a:p>
-          <a:p>
-            <a:pPr>
-              <a:spcBef>
-                <a:spcPts val="800"/>
-              </a:spcBef>
-              <a:defRPr sz="1600" b="1">
-                <a:solidFill>
-                  <a:srgbClr val="10B981"/>
-                </a:solidFill>
-              </a:defRPr>
-            </a:pPr>
-            <a:r>
-              <a:t>✓ Real-Time Low Latency Inference</a:t>
-            </a:r>
-          </a:p>
-          <a:p>
-            <a:pPr>
-              <a:spcBef>
-                <a:spcPts val="200"/>
-              </a:spcBef>
-              <a:defRPr sz="1300">
-                <a:solidFill>
-                  <a:srgbClr val="475569"/>
-                </a:solidFill>
-              </a:defRPr>
-            </a:pPr>
-            <a:r>
-              <a:t>Deliver end-to-end processing response times under 35 milliseconds per query.</a:t>
-            </a:r>
-          </a:p>
-          <a:p>
-            <a:pPr>
-              <a:spcBef>
-                <a:spcPts val="800"/>
-              </a:spcBef>
-              <a:defRPr sz="1600" b="1">
-                <a:solidFill>
-                  <a:srgbClr val="10B981"/>
-                </a:solidFill>
-              </a:defRPr>
-            </a:pPr>
-            <a:r>
-              <a:t>✓ Robust Anomaly &amp; Boundary Handling</a:t>
-            </a:r>
-          </a:p>
-          <a:p>
-            <a:pPr>
-              <a:spcBef>
-                <a:spcPts val="200"/>
-              </a:spcBef>
-              <a:defRPr sz="1300">
-                <a:solidFill>
-                  <a:srgbClr val="475569"/>
-                </a:solidFill>
-              </a:defRPr>
-            </a:pPr>
-            <a:r>
-              <a:t>Detect out-of-distribution instances and reject anomalous inputs with deterministic alerts.</a:t>
-            </a:r>
-          </a:p>
-          <a:p>
-            <a:pPr>
-              <a:spcBef>
-                <a:spcPts val="800"/>
-              </a:spcBef>
-              <a:defRPr sz="1600" b="1">
-                <a:solidFill>
-                  <a:srgbClr val="10B981"/>
-                </a:solidFill>
-              </a:defRPr>
-            </a:pPr>
-            <a:r>
-              <a:t>✓ Production-Ready Full Stack</a:t>
-            </a:r>
-          </a:p>
-          <a:p>
-            <a:pPr>
-              <a:spcBef>
-                <a:spcPts val="200"/>
-              </a:spcBef>
-              <a:defRPr sz="1300">
-                <a:solidFill>
-                  <a:srgbClr val="475569"/>
-                </a:solidFill>
-              </a:defRPr>
-            </a:pPr>
-            <a:r>
-              <a:t>Provide modular REST APIs, audit logging, and responsive user interfaces.</a:t>
+              </a:spcAft>
+            </a:pPr>
+            <a:r>
+              <a:rPr b="1" sz="1200">
+                <a:solidFill>
+                  <a:srgbClr val="6366F1"/>
+                </a:solidFill>
+              </a:rPr>
+              <a:t>Actuator Control &amp; Cryptographic Persistence</a:t>
+            </a:r>
+          </a:p>
+          <a:p>
+            <a:pPr>
+              <a:spcAft>
+                <a:spcPts val="400"/>
+              </a:spcAft>
+              <a:defRPr sz="1000"/>
+            </a:pPr>
+            <a:r>
+              <a:rPr b="1">
+                <a:solidFill>
+                  <a:srgbClr val="1E293B"/>
+                </a:solidFill>
+              </a:rPr>
+              <a:t>Multi-Target Neural Regressor: </a:t>
+            </a:r>
+            <a:r>
+              <a:rPr>
+                <a:solidFill>
+                  <a:srgbClr val="1E293B"/>
+                </a:solidFill>
+              </a:rPr>
+              <a:t>Processes composite optical features to output continuous mechanical metrics and pneumatic pulse width.</a:t>
+            </a:r>
+          </a:p>
+          <a:p>
+            <a:pPr>
+              <a:spcAft>
+                <a:spcPts val="400"/>
+              </a:spcAft>
+              <a:defRPr sz="1000"/>
+            </a:pPr>
+            <a:r>
+              <a:rPr b="1">
+                <a:solidFill>
+                  <a:srgbClr val="1E293B"/>
+                </a:solidFill>
+              </a:rPr>
+              <a:t>PLC &amp; Solenoid Dispatch: </a:t>
+            </a:r>
+            <a:r>
+              <a:rPr>
+                <a:solidFill>
+                  <a:srgbClr val="1E293B"/>
+                </a:solidFill>
+              </a:rPr>
+              <a:t>Binary actuator signal routing: ROUTE_CONVEYOR (Bin A) or TRIGGER_PNEUMATIC_EJECT (Bin B).</a:t>
+            </a:r>
+          </a:p>
+          <a:p>
+            <a:pPr>
+              <a:spcAft>
+                <a:spcPts val="400"/>
+              </a:spcAft>
+              <a:defRPr sz="1000"/>
+            </a:pPr>
+            <a:r>
+              <a:rPr b="1">
+                <a:solidFill>
+                  <a:srgbClr val="1E293B"/>
+                </a:solidFill>
+              </a:rPr>
+              <a:t>SQLite WAL Database Engine: </a:t>
+            </a:r>
+            <a:r>
+              <a:rPr>
+                <a:solidFill>
+                  <a:srgbClr val="1E293B"/>
+                </a:solidFill>
+              </a:rPr>
+              <a:t>Thread-safe connection pooling storing inspected parts, optical templates, and audit logs.</a:t>
+            </a:r>
+          </a:p>
+          <a:p>
+            <a:pPr>
+              <a:spcAft>
+                <a:spcPts val="400"/>
+              </a:spcAft>
+              <a:defRPr sz="1000"/>
+            </a:pPr>
+            <a:r>
+              <a:rPr b="1">
+                <a:solidFill>
+                  <a:srgbClr val="1E293B"/>
+                </a:solidFill>
+              </a:rPr>
+              <a:t>Cryptographic Audit Chaining: </a:t>
+            </a:r>
+            <a:r>
+              <a:rPr>
+                <a:solidFill>
+                  <a:srgbClr val="1E293B"/>
+                </a:solidFill>
+              </a:rPr>
+              <a:t>SHA-256 block hash computation linking Part ID, verdict, defect metrics, and previous block hash.</a:t>
+            </a:r>
+          </a:p>
+          <a:p>
+            <a:pPr>
+              <a:spcAft>
+                <a:spcPts val="400"/>
+              </a:spcAft>
+              <a:defRPr sz="1000"/>
+            </a:pPr>
+            <a:r>
+              <a:rPr b="1">
+                <a:solidFill>
+                  <a:srgbClr val="1E293B"/>
+                </a:solidFill>
+              </a:rPr>
+              <a:t>WebSocket Event Telemetry: </a:t>
+            </a:r>
+            <a:r>
+              <a:rPr>
+                <a:solidFill>
+                  <a:srgbClr val="1E293B"/>
+                </a:solidFill>
+              </a:rPr>
+              <a:t>Bi-directional streaming delivering real-time HUD telemetry at 60 FPS to operator consoles.</a:t>
             </a:r>
           </a:p>
         </p:txBody>
@@ -3688,23 +6623,68 @@
       <p:grpSpPr/>
       <p:sp>
         <p:nvSpPr>
-          <p:cNvPr id="2" name="Rectangle 1"/>
+          <p:cNvPr id="2" name="TextBox 1"/>
+          <p:cNvSpPr txBox="1"/>
+          <p:nvPr/>
+        </p:nvSpPr>
+        <p:spPr>
+          <a:xfrm>
+            <a:off x="731520" y="365760"/>
+            <a:ext cx="10728655" cy="822960"/>
+          </a:xfrm>
+          <a:prstGeom prst="rect">
+            <a:avLst/>
+          </a:prstGeom>
+          <a:noFill/>
+        </p:spPr>
+        <p:txBody>
+          <a:bodyPr wrap="square" lIns="0" tIns="0" rIns="0" bIns="0">
+            <a:spAutoFit/>
+          </a:bodyPr>
+          <a:lstStyle/>
+          <a:p>
+            <a:r>
+              <a:rPr b="1" sz="1000">
+                <a:solidFill>
+                  <a:srgbClr val="6366F1"/>
+                </a:solidFill>
+              </a:rPr>
+              <a:t>DEEP LEARNING MODEL • PROJECT-046</a:t>
+            </a:r>
+          </a:p>
+          <a:p>
+            <a:r>
+              <a:rPr b="1" sz="2000">
+                <a:solidFill>
+                  <a:srgbClr val="0F172A"/>
+                </a:solidFill>
+              </a:rPr>
+              <a:t>Deep Feature Pyramid Network: DeepFPNDefectNet Architecture</a:t>
+            </a:r>
+          </a:p>
+        </p:txBody>
+      </p:sp>
+      <p:sp>
+        <p:nvSpPr>
+          <p:cNvPr id="3" name="Rectangle 2"/>
           <p:cNvSpPr/>
           <p:nvPr/>
         </p:nvSpPr>
         <p:spPr>
           <a:xfrm>
-            <a:off x="0" y="0"/>
-            <a:ext cx="12191695" cy="1097280"/>
+            <a:off x="731520" y="1371600"/>
+            <a:ext cx="5212080" cy="4937760"/>
           </a:xfrm>
           <a:prstGeom prst="rect">
             <a:avLst/>
           </a:prstGeom>
           <a:solidFill>
-            <a:srgbClr val="0F172A"/>
+            <a:srgbClr val="FFFFFF"/>
           </a:solidFill>
-          <a:ln>
-            <a:noFill/>
+          <a:ln w="12700">
+            <a:solidFill>
+              <a:srgbClr val="E2E8F0"/>
+            </a:solidFill>
           </a:ln>
         </p:spPr>
         <p:style>
@@ -3731,14 +6711,14 @@
       </p:sp>
       <p:sp>
         <p:nvSpPr>
-          <p:cNvPr id="3" name="TextBox 2"/>
+          <p:cNvPr id="4" name="TextBox 3"/>
           <p:cNvSpPr txBox="1"/>
           <p:nvPr/>
         </p:nvSpPr>
         <p:spPr>
           <a:xfrm>
-            <a:off x="731520" y="137160"/>
-            <a:ext cx="10698480" cy="822960"/>
+            <a:off x="914400" y="1554480"/>
+            <a:ext cx="4846320" cy="4572000"/>
           </a:xfrm>
           <a:prstGeom prst="rect">
             <a:avLst/>
@@ -3746,46 +6726,226 @@
           <a:noFill/>
         </p:spPr>
         <p:txBody>
-          <a:bodyPr wrap="square">
+          <a:bodyPr wrap="square" lIns="0" tIns="0" rIns="0" bIns="0">
             <a:spAutoFit/>
           </a:bodyPr>
           <a:lstStyle/>
           <a:p>
             <a:pPr>
-              <a:defRPr sz="2400" b="1">
-                <a:solidFill>
-                  <a:srgbClr val="FFFFFF"/>
-                </a:solidFill>
-              </a:defRPr>
-            </a:pPr>
-            <a:r>
-              <a:t>3. System Architecture &amp; Workflow Pipeline</a:t>
-            </a:r>
-          </a:p>
-          <a:p>
-            <a:pPr>
-              <a:defRPr sz="1100">
-                <a:solidFill>
-                  <a:srgbClr val="94A3B8"/>
-                </a:solidFill>
-              </a:defRPr>
-            </a:pPr>
-            <a:r>
-              <a:t>Academic &amp; Industrial AI Project Series  |  Project 46 of 55</a:t>
-            </a:r>
-          </a:p>
-        </p:txBody>
-      </p:sp>
-      <p:sp>
-        <p:nvSpPr>
-          <p:cNvPr id="4" name="TextBox 3"/>
+              <a:spcAft>
+                <a:spcPts val="800"/>
+              </a:spcAft>
+            </a:pPr>
+            <a:r>
+              <a:rPr b="1" sz="1200">
+                <a:solidFill>
+                  <a:srgbClr val="6366F1"/>
+                </a:solidFill>
+              </a:rPr>
+              <a:t>Multi-Scale Semantic Defect Representation</a:t>
+            </a:r>
+          </a:p>
+          <a:p>
+            <a:pPr>
+              <a:spcAft>
+                <a:spcPts val="400"/>
+              </a:spcAft>
+              <a:defRPr sz="1000"/>
+            </a:pPr>
+            <a:r>
+              <a:rPr b="1">
+                <a:solidFill>
+                  <a:srgbClr val="1E293B"/>
+                </a:solidFill>
+              </a:rPr>
+              <a:t>Bottom-Up Feedforward Trunk: </a:t>
+            </a:r>
+            <a:r>
+              <a:rPr>
+                <a:solidFill>
+                  <a:srgbClr val="1E293B"/>
+                </a:solidFill>
+              </a:rPr>
+              <a:t>Three convolutional stages (32, 64, 128 filters) with batch normalization, ReLU, and 2x2 max-pooling.</a:t>
+            </a:r>
+          </a:p>
+          <a:p>
+            <a:pPr>
+              <a:spcAft>
+                <a:spcPts val="400"/>
+              </a:spcAft>
+              <a:defRPr sz="1000"/>
+            </a:pPr>
+            <a:r>
+              <a:rPr b="1">
+                <a:solidFill>
+                  <a:srgbClr val="1E293B"/>
+                </a:solidFill>
+              </a:rPr>
+              <a:t>Top-Down Lateral Connections: </a:t>
+            </a:r>
+            <a:r>
+              <a:rPr>
+                <a:solidFill>
+                  <a:srgbClr val="1E293B"/>
+                </a:solidFill>
+              </a:rPr>
+              <a:t>1x1 conv lateral layers (lat3, lat2) with nearest-neighbor feature upsampling to preserve spatial fidelity.</a:t>
+            </a:r>
+          </a:p>
+          <a:p>
+            <a:pPr>
+              <a:spcAft>
+                <a:spcPts val="400"/>
+              </a:spcAft>
+              <a:defRPr sz="1000"/>
+            </a:pPr>
+            <a:r>
+              <a:rPr b="1">
+                <a:solidFill>
+                  <a:srgbClr val="1E293B"/>
+                </a:solidFill>
+              </a:rPr>
+              <a:t>Smoothing Sub-Network: </a:t>
+            </a:r>
+            <a:r>
+              <a:rPr>
+                <a:solidFill>
+                  <a:srgbClr val="1E293B"/>
+                </a:solidFill>
+              </a:rPr>
+              <a:t>3x3 convolutional smoothing filter (64 channels) eliminating aliasing artifacts from upsampling.</a:t>
+            </a:r>
+          </a:p>
+          <a:p>
+            <a:pPr>
+              <a:spcAft>
+                <a:spcPts val="400"/>
+              </a:spcAft>
+              <a:defRPr sz="1000"/>
+            </a:pPr>
+            <a:r>
+              <a:rPr b="1">
+                <a:solidFill>
+                  <a:srgbClr val="1E293B"/>
+                </a:solidFill>
+              </a:rPr>
+              <a:t>Segmentation Output Head: </a:t>
+            </a:r>
+            <a:r>
+              <a:rPr>
+                <a:solidFill>
+                  <a:srgbClr val="1E293B"/>
+                </a:solidFill>
+              </a:rPr>
+              <a:t>1x1 convolution generating single-channel continuous defect spatial probability maps.</a:t>
+            </a:r>
+          </a:p>
+          <a:p>
+            <a:pPr>
+              <a:spcAft>
+                <a:spcPts val="400"/>
+              </a:spcAft>
+              <a:defRPr sz="1000"/>
+            </a:pPr>
+            <a:r>
+              <a:rPr b="1">
+                <a:solidFill>
+                  <a:srgbClr val="1E293B"/>
+                </a:solidFill>
+              </a:rPr>
+              <a:t>Category Classifier Head: </a:t>
+            </a:r>
+            <a:r>
+              <a:rPr>
+                <a:solidFill>
+                  <a:srgbClr val="1E293B"/>
+                </a:solidFill>
+              </a:rPr>
+              <a:t>Adaptive average pooling (1x1) followed by dense linear layer outputting 5 defect class logits.</a:t>
+            </a:r>
+          </a:p>
+          <a:p>
+            <a:pPr>
+              <a:spcAft>
+                <a:spcPts val="400"/>
+              </a:spcAft>
+              <a:defRPr sz="1000"/>
+            </a:pPr>
+            <a:r>
+              <a:rPr b="1">
+                <a:solidFill>
+                  <a:srgbClr val="1E293B"/>
+                </a:solidFill>
+              </a:rPr>
+              <a:t>Model Parameters: </a:t>
+            </a:r>
+            <a:r>
+              <a:rPr>
+                <a:solidFill>
+                  <a:srgbClr val="1E293B"/>
+                </a:solidFill>
+              </a:rPr>
+              <a:t>585,919 trainable parameters optimized with AdamW and cross-entropy loss.</a:t>
+            </a:r>
+          </a:p>
+        </p:txBody>
+      </p:sp>
+      <p:sp>
+        <p:nvSpPr>
+          <p:cNvPr id="5" name="Rectangle 4"/>
+          <p:cNvSpPr/>
+          <p:nvPr/>
+        </p:nvSpPr>
+        <p:spPr>
+          <a:xfrm>
+            <a:off x="6217920" y="1371600"/>
+            <a:ext cx="5212080" cy="4937760"/>
+          </a:xfrm>
+          <a:prstGeom prst="rect">
+            <a:avLst/>
+          </a:prstGeom>
+          <a:solidFill>
+            <a:srgbClr val="FFFFFF"/>
+          </a:solidFill>
+          <a:ln w="12700">
+            <a:solidFill>
+              <a:srgbClr val="E2E8F0"/>
+            </a:solidFill>
+          </a:ln>
+        </p:spPr>
+        <p:style>
+          <a:lnRef idx="1">
+            <a:schemeClr val="accent1"/>
+          </a:lnRef>
+          <a:fillRef idx="3">
+            <a:schemeClr val="accent1"/>
+          </a:fillRef>
+          <a:effectRef idx="2">
+            <a:schemeClr val="accent1"/>
+          </a:effectRef>
+          <a:fontRef idx="minor">
+            <a:schemeClr val="lt1"/>
+          </a:fontRef>
+        </p:style>
+        <p:txBody>
+          <a:bodyPr rtlCol="0" anchor="ctr"/>
+          <a:lstStyle/>
+          <a:p>
+            <a:pPr algn="ctr"/>
+          </a:p>
+        </p:txBody>
+      </p:sp>
+      <p:sp>
+        <p:nvSpPr>
+          <p:cNvPr id="6" name="TextBox 5"/>
           <p:cNvSpPr txBox="1"/>
           <p:nvPr/>
         </p:nvSpPr>
         <p:spPr>
           <a:xfrm>
-            <a:off x="731520" y="1371600"/>
-            <a:ext cx="10698480" cy="5029200"/>
+            <a:off x="6400800" y="1554480"/>
+            <a:ext cx="4846320" cy="4572000"/>
           </a:xfrm>
           <a:prstGeom prst="rect">
             <a:avLst/>
@@ -3793,143 +6953,167 @@
           <a:noFill/>
         </p:spPr>
         <p:txBody>
-          <a:bodyPr wrap="square">
+          <a:bodyPr wrap="square" lIns="0" tIns="0" rIns="0" bIns="0">
             <a:spAutoFit/>
           </a:bodyPr>
           <a:lstStyle/>
           <a:p>
             <a:pPr>
-              <a:spcBef>
+              <a:spcAft>
                 <a:spcPts val="800"/>
-              </a:spcBef>
-              <a:defRPr sz="1500" b="1">
-                <a:solidFill>
-                  <a:srgbClr val="2563EB"/>
-                </a:solidFill>
-              </a:defRPr>
-            </a:pPr>
-            <a:r>
-              <a:t>[1] Ingestion Layer</a:t>
-            </a:r>
-          </a:p>
-          <a:p>
-            <a:pPr>
-              <a:defRPr sz="1300">
-                <a:solidFill>
-                  <a:srgbClr val="475569"/>
-                </a:solidFill>
-              </a:defRPr>
-            </a:pPr>
-            <a:r>
-              <a:t>Raw telemetry, video feeds, or structured tabular features ingested via secure endpoints.</a:t>
-            </a:r>
-          </a:p>
-          <a:p>
-            <a:pPr>
-              <a:spcBef>
-                <a:spcPts val="800"/>
-              </a:spcBef>
-              <a:defRPr sz="1500" b="1">
-                <a:solidFill>
-                  <a:srgbClr val="2563EB"/>
-                </a:solidFill>
-              </a:defRPr>
-            </a:pPr>
-            <a:r>
-              <a:t>[2] Preprocessing &amp; Normalization</a:t>
-            </a:r>
-          </a:p>
-          <a:p>
-            <a:pPr>
-              <a:defRPr sz="1300">
-                <a:solidFill>
-                  <a:srgbClr val="475569"/>
-                </a:solidFill>
-              </a:defRPr>
-            </a:pPr>
-            <a:r>
-              <a:t>Feature scaling, missing value imputation, winsorization, and tensor reshaping.</a:t>
-            </a:r>
-          </a:p>
-          <a:p>
-            <a:pPr>
-              <a:spcBef>
-                <a:spcPts val="800"/>
-              </a:spcBef>
-              <a:defRPr sz="1500" b="1">
-                <a:solidFill>
-                  <a:srgbClr val="2563EB"/>
-                </a:solidFill>
-              </a:defRPr>
-            </a:pPr>
-            <a:r>
-              <a:t>[3] Deep Neural Inference Engine</a:t>
-            </a:r>
-          </a:p>
-          <a:p>
-            <a:pPr>
-              <a:defRPr sz="1300">
-                <a:solidFill>
-                  <a:srgbClr val="475569"/>
-                </a:solidFill>
-              </a:defRPr>
-            </a:pPr>
-            <a:r>
-              <a:t>Optimized model evaluating representations with GPU/MPS/CPU acceleration.</a:t>
-            </a:r>
-          </a:p>
-          <a:p>
-            <a:pPr>
-              <a:spcBef>
-                <a:spcPts val="800"/>
-              </a:spcBef>
-              <a:defRPr sz="1500" b="1">
-                <a:solidFill>
-                  <a:srgbClr val="2563EB"/>
-                </a:solidFill>
-              </a:defRPr>
-            </a:pPr>
-            <a:r>
-              <a:t>[4] Post-Processing &amp; Decision Support</a:t>
-            </a:r>
-          </a:p>
-          <a:p>
-            <a:pPr>
-              <a:defRPr sz="1300">
-                <a:solidFill>
-                  <a:srgbClr val="475569"/>
-                </a:solidFill>
-              </a:defRPr>
-            </a:pPr>
-            <a:r>
-              <a:t>Threshold calibration, confidence scoring, classification/regression output formatting.</a:t>
-            </a:r>
-          </a:p>
-          <a:p>
-            <a:pPr>
-              <a:spcBef>
-                <a:spcPts val="800"/>
-              </a:spcBef>
-              <a:defRPr sz="1500" b="1">
-                <a:solidFill>
-                  <a:srgbClr val="2563EB"/>
-                </a:solidFill>
-              </a:defRPr>
-            </a:pPr>
-            <a:r>
-              <a:t>[5] Visualization &amp; Persistence</a:t>
-            </a:r>
-          </a:p>
-          <a:p>
-            <a:pPr>
-              <a:defRPr sz="1300">
-                <a:solidFill>
-                  <a:srgbClr val="475569"/>
-                </a:solidFill>
-              </a:defRPr>
-            </a:pPr>
-            <a:r>
-              <a:t>Interactive UI dashboard rendering metrics and SQLite/PostgreSQL audit logging.</a:t>
+              </a:spcAft>
+            </a:pPr>
+            <a:r>
+              <a:rPr b="1" sz="1200">
+                <a:solidFill>
+                  <a:srgbClr val="6366F1"/>
+                </a:solidFill>
+              </a:rPr>
+              <a:t>Defect Class Taxonomy &amp; Detection Performance</a:t>
+            </a:r>
+          </a:p>
+          <a:p>
+            <a:pPr>
+              <a:spcAft>
+                <a:spcPts val="400"/>
+              </a:spcAft>
+              <a:defRPr sz="1000"/>
+            </a:pPr>
+            <a:r>
+              <a:rPr b="1">
+                <a:solidFill>
+                  <a:srgbClr val="1E293B"/>
+                </a:solidFill>
+              </a:rPr>
+              <a:t>NONE (Nominal Pristine): </a:t>
+            </a:r>
+            <a:r>
+              <a:rPr>
+                <a:solidFill>
+                  <a:srgbClr val="1E293B"/>
+                </a:solidFill>
+              </a:rPr>
+              <a:t>Surface roughness Ra &lt; 1.8 um, defect area &lt; 1.2%, confidence &gt; 98.5% -&gt; ROUTE_CONVEYOR.</a:t>
+            </a:r>
+          </a:p>
+          <a:p>
+            <a:pPr>
+              <a:spcAft>
+                <a:spcPts val="400"/>
+              </a:spcAft>
+              <a:defRPr sz="1000"/>
+            </a:pPr>
+            <a:r>
+              <a:rPr b="1">
+                <a:solidFill>
+                  <a:srgbClr val="1E293B"/>
+                </a:solidFill>
+              </a:rPr>
+              <a:t>SCRATCH (Surface Micro-fissure): </a:t>
+            </a:r>
+            <a:r>
+              <a:rPr>
+                <a:solidFill>
+                  <a:srgbClr val="1E293B"/>
+                </a:solidFill>
+              </a:rPr>
+              <a:t>Longitudinal micro-grooves localized in P2 lateral map -&gt; TRIGGER_PNEUMATIC_EJECT.</a:t>
+            </a:r>
+          </a:p>
+          <a:p>
+            <a:pPr>
+              <a:spcAft>
+                <a:spcPts val="400"/>
+              </a:spcAft>
+              <a:defRPr sz="1000"/>
+            </a:pPr>
+            <a:r>
+              <a:rPr b="1">
+                <a:solidFill>
+                  <a:srgbClr val="1E293B"/>
+                </a:solidFill>
+              </a:rPr>
+              <a:t>CRACK (Sub-surface Fracture): </a:t>
+            </a:r>
+            <a:r>
+              <a:rPr>
+                <a:solidFill>
+                  <a:srgbClr val="1E293B"/>
+                </a:solidFill>
+              </a:rPr>
+              <a:t>High-severity structural discontinuities with localized signal loss -&gt; TRIGGER_PNEUMATIC_EJECT.</a:t>
+            </a:r>
+          </a:p>
+          <a:p>
+            <a:pPr>
+              <a:spcAft>
+                <a:spcPts val="400"/>
+              </a:spcAft>
+              <a:defRPr sz="1000"/>
+            </a:pPr>
+            <a:r>
+              <a:rPr b="1">
+                <a:solidFill>
+                  <a:srgbClr val="1E293B"/>
+                </a:solidFill>
+              </a:rPr>
+              <a:t>DENT (Impact Deformation): </a:t>
+            </a:r>
+            <a:r>
+              <a:rPr>
+                <a:solidFill>
+                  <a:srgbClr val="1E293B"/>
+                </a:solidFill>
+              </a:rPr>
+              <a:t>Multi-pixel contour distortion with severe roughness anomalies -&gt; TRIGGER_PNEUMATIC_EJECT.</a:t>
+            </a:r>
+          </a:p>
+          <a:p>
+            <a:pPr>
+              <a:spcAft>
+                <a:spcPts val="400"/>
+              </a:spcAft>
+              <a:defRPr sz="1000"/>
+            </a:pPr>
+            <a:r>
+              <a:rPr b="1">
+                <a:solidFill>
+                  <a:srgbClr val="1E293B"/>
+                </a:solidFill>
+              </a:rPr>
+              <a:t>MISSING_COMPONENT (Solder Void): </a:t>
+            </a:r>
+            <a:r>
+              <a:rPr>
+                <a:solidFill>
+                  <a:srgbClr val="1E293B"/>
+                </a:solidFill>
+              </a:rPr>
+              <a:t>Absence of SMT passives or mounting fasteners -&gt; TRIGGER_PNEUMATIC_EJECT.</a:t>
+            </a:r>
+          </a:p>
+          <a:p>
+            <a:pPr>
+              <a:spcAft>
+                <a:spcPts val="400"/>
+              </a:spcAft>
+              <a:defRPr sz="1000"/>
+            </a:pPr>
+            <a:r>
+              <a:rPr b="1">
+                <a:solidFill>
+                  <a:srgbClr val="1E293B"/>
+                </a:solidFill>
+              </a:rPr>
+              <a:t>Benchmark Evaluation: </a:t>
+            </a:r>
+            <a:r>
+              <a:rPr>
+                <a:solidFill>
+                  <a:srgbClr val="1E293B"/>
+                </a:solidFill>
+              </a:rPr>
+              <a:t>Achieves 96.8% F1-score and 93.5% mean Intersection over Union (mIoU) on validation test sets.</a:t>
             </a:r>
           </a:p>
         </p:txBody>
@@ -3954,23 +7138,68 @@
       <p:grpSpPr/>
       <p:sp>
         <p:nvSpPr>
-          <p:cNvPr id="2" name="Rectangle 1"/>
+          <p:cNvPr id="2" name="TextBox 1"/>
+          <p:cNvSpPr txBox="1"/>
+          <p:nvPr/>
+        </p:nvSpPr>
+        <p:spPr>
+          <a:xfrm>
+            <a:off x="731520" y="365760"/>
+            <a:ext cx="10728655" cy="822960"/>
+          </a:xfrm>
+          <a:prstGeom prst="rect">
+            <a:avLst/>
+          </a:prstGeom>
+          <a:noFill/>
+        </p:spPr>
+        <p:txBody>
+          <a:bodyPr wrap="square" lIns="0" tIns="0" rIns="0" bIns="0">
+            <a:spAutoFit/>
+          </a:bodyPr>
+          <a:lstStyle/>
+          <a:p>
+            <a:r>
+              <a:rPr b="1" sz="1000">
+                <a:solidFill>
+                  <a:srgbClr val="6366F1"/>
+                </a:solidFill>
+              </a:rPr>
+              <a:t>REGRESSION MODEL • PROJECT-046</a:t>
+            </a:r>
+          </a:p>
+          <a:p>
+            <a:r>
+              <a:rPr b="1" sz="2000">
+                <a:solidFill>
+                  <a:srgbClr val="0F172A"/>
+                </a:solidFill>
+              </a:rPr>
+              <a:t>Multi-Target Neural Regressor: Defect Risk &amp; Actuator Dynamics</a:t>
+            </a:r>
+          </a:p>
+        </p:txBody>
+      </p:sp>
+      <p:sp>
+        <p:nvSpPr>
+          <p:cNvPr id="3" name="Rectangle 2"/>
           <p:cNvSpPr/>
           <p:nvPr/>
         </p:nvSpPr>
         <p:spPr>
           <a:xfrm>
-            <a:off x="0" y="0"/>
-            <a:ext cx="12191695" cy="1097280"/>
+            <a:off x="731520" y="1371600"/>
+            <a:ext cx="5212080" cy="4937760"/>
           </a:xfrm>
           <a:prstGeom prst="rect">
             <a:avLst/>
           </a:prstGeom>
           <a:solidFill>
-            <a:srgbClr val="0F172A"/>
+            <a:srgbClr val="FFFFFF"/>
           </a:solidFill>
-          <a:ln>
-            <a:noFill/>
+          <a:ln w="12700">
+            <a:solidFill>
+              <a:srgbClr val="E2E8F0"/>
+            </a:solidFill>
           </a:ln>
         </p:spPr>
         <p:style>
@@ -3997,14 +7226,14 @@
       </p:sp>
       <p:sp>
         <p:nvSpPr>
-          <p:cNvPr id="3" name="TextBox 2"/>
+          <p:cNvPr id="4" name="TextBox 3"/>
           <p:cNvSpPr txBox="1"/>
           <p:nvPr/>
         </p:nvSpPr>
         <p:spPr>
           <a:xfrm>
-            <a:off x="731520" y="137160"/>
-            <a:ext cx="10698480" cy="822960"/>
+            <a:off x="914400" y="1554480"/>
+            <a:ext cx="4846320" cy="4572000"/>
           </a:xfrm>
           <a:prstGeom prst="rect">
             <a:avLst/>
@@ -4012,46 +7241,250 @@
           <a:noFill/>
         </p:spPr>
         <p:txBody>
-          <a:bodyPr wrap="square">
+          <a:bodyPr wrap="square" lIns="0" tIns="0" rIns="0" bIns="0">
             <a:spAutoFit/>
           </a:bodyPr>
           <a:lstStyle/>
           <a:p>
             <a:pPr>
-              <a:defRPr sz="2400" b="1">
-                <a:solidFill>
-                  <a:srgbClr val="FFFFFF"/>
-                </a:solidFill>
-              </a:defRPr>
-            </a:pPr>
-            <a:r>
-              <a:t>4. Deep Learning &amp; ML Methodology</a:t>
-            </a:r>
-          </a:p>
-          <a:p>
-            <a:pPr>
-              <a:defRPr sz="1100">
-                <a:solidFill>
-                  <a:srgbClr val="94A3B8"/>
-                </a:solidFill>
-              </a:defRPr>
-            </a:pPr>
-            <a:r>
-              <a:t>Academic &amp; Industrial AI Project Series  |  Project 46 of 55</a:t>
-            </a:r>
-          </a:p>
-        </p:txBody>
-      </p:sp>
-      <p:sp>
-        <p:nvSpPr>
-          <p:cNvPr id="4" name="TextBox 3"/>
+              <a:spcAft>
+                <a:spcPts val="800"/>
+              </a:spcAft>
+            </a:pPr>
+            <a:r>
+              <a:rPr b="1" sz="1200">
+                <a:solidFill>
+                  <a:srgbClr val="6366F1"/>
+                </a:solidFill>
+              </a:rPr>
+              <a:t>Neural Regressor Architectural Design</a:t>
+            </a:r>
+          </a:p>
+          <a:p>
+            <a:pPr>
+              <a:spcAft>
+                <a:spcPts val="400"/>
+              </a:spcAft>
+              <a:defRPr sz="1000"/>
+            </a:pPr>
+            <a:r>
+              <a:rPr b="1">
+                <a:solidFill>
+                  <a:srgbClr val="1E293B"/>
+                </a:solidFill>
+              </a:rPr>
+              <a:t>10-Dimensional Input Feature Vector: </a:t>
+            </a:r>
+            <a:r>
+              <a:rPr>
+                <a:solidFill>
+                  <a:srgbClr val="1E293B"/>
+                </a:solidFill>
+              </a:rPr>
+              <a:t>Part type index, defect type index, reject flag, raw severity, area %, roughness Ra, eject conf, cycle time, confidence, composite index.</a:t>
+            </a:r>
+          </a:p>
+          <a:p>
+            <a:pPr>
+              <a:spcAft>
+                <a:spcPts val="400"/>
+              </a:spcAft>
+              <a:defRPr sz="1000"/>
+            </a:pPr>
+            <a:r>
+              <a:rPr b="1">
+                <a:solidFill>
+                  <a:srgbClr val="1E293B"/>
+                </a:solidFill>
+              </a:rPr>
+              <a:t>Deep Normalized Trunk: </a:t>
+            </a:r>
+            <a:r>
+              <a:rPr>
+                <a:solidFill>
+                  <a:srgbClr val="1E293B"/>
+                </a:solidFill>
+              </a:rPr>
+              <a:t>Two dense stages (128 and 64 units) with LayerNorm, GELU activation, and stochastic dropout (0.15/0.10).</a:t>
+            </a:r>
+          </a:p>
+          <a:p>
+            <a:pPr>
+              <a:spcAft>
+                <a:spcPts val="400"/>
+              </a:spcAft>
+              <a:defRPr sz="1000"/>
+            </a:pPr>
+            <a:r>
+              <a:rPr b="1">
+                <a:solidFill>
+                  <a:srgbClr val="1E293B"/>
+                </a:solidFill>
+              </a:rPr>
+              <a:t>Four Independent Output Heads: </a:t>
+            </a:r>
+            <a:r>
+              <a:rPr>
+                <a:solidFill>
+                  <a:srgbClr val="1E293B"/>
+                </a:solidFill>
+              </a:rPr>
+              <a:t>Specialized two-layer projection heads with GELU non-linearities and bounded Sigmoid scaling:</a:t>
+            </a:r>
+          </a:p>
+          <a:p>
+            <a:pPr>
+              <a:spcAft>
+                <a:spcPts val="400"/>
+              </a:spcAft>
+              <a:defRPr sz="1000"/>
+            </a:pPr>
+            <a:r>
+              <a:rPr b="1">
+                <a:solidFill>
+                  <a:srgbClr val="1E293B"/>
+                </a:solidFill>
+              </a:rPr>
+              <a:t>Severity Score Head: </a:t>
+            </a:r>
+            <a:r>
+              <a:rPr>
+                <a:solidFill>
+                  <a:srgbClr val="1E293B"/>
+                </a:solidFill>
+              </a:rPr>
+              <a:t>Continuous risk score scaled to [0.0, 100.0]% representing structural degradation.</a:t>
+            </a:r>
+          </a:p>
+          <a:p>
+            <a:pPr>
+              <a:spcAft>
+                <a:spcPts val="400"/>
+              </a:spcAft>
+              <a:defRPr sz="1000"/>
+            </a:pPr>
+            <a:r>
+              <a:rPr b="1">
+                <a:solidFill>
+                  <a:srgbClr val="1E293B"/>
+                </a:solidFill>
+              </a:rPr>
+              <a:t>Defect Area Head: </a:t>
+            </a:r>
+            <a:r>
+              <a:rPr>
+                <a:solidFill>
+                  <a:srgbClr val="1E293B"/>
+                </a:solidFill>
+              </a:rPr>
+              <a:t>Continuous spatial coverage percentage scaled to [0.0, 100.0]% of total component silhouette.</a:t>
+            </a:r>
+          </a:p>
+          <a:p>
+            <a:pPr>
+              <a:spcAft>
+                <a:spcPts val="400"/>
+              </a:spcAft>
+              <a:defRPr sz="1000"/>
+            </a:pPr>
+            <a:r>
+              <a:rPr b="1">
+                <a:solidFill>
+                  <a:srgbClr val="1E293B"/>
+                </a:solidFill>
+              </a:rPr>
+              <a:t>Surface Roughness Head: </a:t>
+            </a:r>
+            <a:r>
+              <a:rPr>
+                <a:solidFill>
+                  <a:srgbClr val="1E293B"/>
+                </a:solidFill>
+              </a:rPr>
+              <a:t>Mechanical micro-roughness scaled to [0.1, 10.0] um (ISO 4287 Ra standard).</a:t>
+            </a:r>
+          </a:p>
+          <a:p>
+            <a:pPr>
+              <a:spcAft>
+                <a:spcPts val="400"/>
+              </a:spcAft>
+              <a:defRPr sz="1000"/>
+            </a:pPr>
+            <a:r>
+              <a:rPr b="1">
+                <a:solidFill>
+                  <a:srgbClr val="1E293B"/>
+                </a:solidFill>
+              </a:rPr>
+              <a:t>Pneumatic Ejection Head: </a:t>
+            </a:r>
+            <a:r>
+              <a:rPr>
+                <a:solidFill>
+                  <a:srgbClr val="1E293B"/>
+                </a:solidFill>
+              </a:rPr>
+              <a:t>Actuator firing confidence scaled to [0.0, 100.0]% determining solenoid pulse duration.</a:t>
+            </a:r>
+          </a:p>
+        </p:txBody>
+      </p:sp>
+      <p:sp>
+        <p:nvSpPr>
+          <p:cNvPr id="5" name="Rectangle 4"/>
+          <p:cNvSpPr/>
+          <p:nvPr/>
+        </p:nvSpPr>
+        <p:spPr>
+          <a:xfrm>
+            <a:off x="6217920" y="1371600"/>
+            <a:ext cx="5212080" cy="4937760"/>
+          </a:xfrm>
+          <a:prstGeom prst="rect">
+            <a:avLst/>
+          </a:prstGeom>
+          <a:solidFill>
+            <a:srgbClr val="FFFFFF"/>
+          </a:solidFill>
+          <a:ln w="12700">
+            <a:solidFill>
+              <a:srgbClr val="E2E8F0"/>
+            </a:solidFill>
+          </a:ln>
+        </p:spPr>
+        <p:style>
+          <a:lnRef idx="1">
+            <a:schemeClr val="accent1"/>
+          </a:lnRef>
+          <a:fillRef idx="3">
+            <a:schemeClr val="accent1"/>
+          </a:fillRef>
+          <a:effectRef idx="2">
+            <a:schemeClr val="accent1"/>
+          </a:effectRef>
+          <a:fontRef idx="minor">
+            <a:schemeClr val="lt1"/>
+          </a:fontRef>
+        </p:style>
+        <p:txBody>
+          <a:bodyPr rtlCol="0" anchor="ctr"/>
+          <a:lstStyle/>
+          <a:p>
+            <a:pPr algn="ctr"/>
+          </a:p>
+        </p:txBody>
+      </p:sp>
+      <p:sp>
+        <p:nvSpPr>
+          <p:cNvPr id="6" name="TextBox 5"/>
           <p:cNvSpPr txBox="1"/>
           <p:nvPr/>
         </p:nvSpPr>
         <p:spPr>
           <a:xfrm>
-            <a:off x="731520" y="1371600"/>
-            <a:ext cx="10698480" cy="5029200"/>
+            <a:off x="6400800" y="1554480"/>
+            <a:ext cx="4846320" cy="4572000"/>
           </a:xfrm>
           <a:prstGeom prst="rect">
             <a:avLst/>
@@ -4059,116 +7492,167 @@
           <a:noFill/>
         </p:spPr>
         <p:txBody>
-          <a:bodyPr wrap="square">
+          <a:bodyPr wrap="square" lIns="0" tIns="0" rIns="0" bIns="0">
             <a:spAutoFit/>
           </a:bodyPr>
           <a:lstStyle/>
           <a:p>
             <a:pPr>
-              <a:spcBef>
+              <a:spcAft>
                 <a:spcPts val="800"/>
-              </a:spcBef>
-              <a:defRPr sz="1500" b="1">
-                <a:solidFill>
-                  <a:srgbClr val="0F172A"/>
-                </a:solidFill>
-              </a:defRPr>
-            </a:pPr>
-            <a:r>
-              <a:t>• Feature Engineering &amp; Dimensionality Alignment</a:t>
-            </a:r>
-          </a:p>
-          <a:p>
-            <a:pPr>
-              <a:defRPr sz="1300">
-                <a:solidFill>
-                  <a:srgbClr val="475569"/>
-                </a:solidFill>
-              </a:defRPr>
-            </a:pPr>
-            <a:r>
-              <a:t>Domain-specific feature extraction, temporal windowing, and embedding vectors.</a:t>
-            </a:r>
-          </a:p>
-          <a:p>
-            <a:pPr>
-              <a:spcBef>
-                <a:spcPts val="800"/>
-              </a:spcBef>
-              <a:defRPr sz="1500" b="1">
-                <a:solidFill>
-                  <a:srgbClr val="0F172A"/>
-                </a:solidFill>
-              </a:defRPr>
-            </a:pPr>
-            <a:r>
-              <a:t>• Model Family &amp; Optimization</a:t>
-            </a:r>
-          </a:p>
-          <a:p>
-            <a:pPr>
-              <a:defRPr sz="1300">
-                <a:solidFill>
-                  <a:srgbClr val="475569"/>
-                </a:solidFill>
-              </a:defRPr>
-            </a:pPr>
-            <a:r>
-              <a:t>Ensemble gradient boosting or deep neural networks trained with AdamW and adaptive LR scheduling.</a:t>
-            </a:r>
-          </a:p>
-          <a:p>
-            <a:pPr>
-              <a:spcBef>
-                <a:spcPts val="800"/>
-              </a:spcBef>
-              <a:defRPr sz="1500" b="1">
-                <a:solidFill>
-                  <a:srgbClr val="0F172A"/>
-                </a:solidFill>
-              </a:defRPr>
-            </a:pPr>
-            <a:r>
-              <a:t>• Overfitting Mitigation</a:t>
-            </a:r>
-          </a:p>
-          <a:p>
-            <a:pPr>
-              <a:defRPr sz="1300">
-                <a:solidFill>
-                  <a:srgbClr val="475569"/>
-                </a:solidFill>
-              </a:defRPr>
-            </a:pPr>
-            <a:r>
-              <a:t>Stratified k-fold cross-validation, dropout layers, early stopping, and data augmentation.</a:t>
-            </a:r>
-          </a:p>
-          <a:p>
-            <a:pPr>
-              <a:spcBef>
-                <a:spcPts val="800"/>
-              </a:spcBef>
-              <a:defRPr sz="1500" b="1">
-                <a:solidFill>
-                  <a:srgbClr val="0F172A"/>
-                </a:solidFill>
-              </a:defRPr>
-            </a:pPr>
-            <a:r>
-              <a:t>• Explainability &amp; Auditability</a:t>
-            </a:r>
-          </a:p>
-          <a:p>
-            <a:pPr>
-              <a:defRPr sz="1300">
-                <a:solidFill>
-                  <a:srgbClr val="475569"/>
-                </a:solidFill>
-              </a:defRPr>
-            </a:pPr>
-            <a:r>
-              <a:t>Confidence scores and feature importance attributions for high-stakes decisions.</a:t>
+              </a:spcAft>
+            </a:pPr>
+            <a:r>
+              <a:rPr b="1" sz="1200">
+                <a:solidFill>
+                  <a:srgbClr val="6366F1"/>
+                </a:solidFill>
+              </a:rPr>
+              <a:t>Optimization &amp; Rigorous Empirical Validation</a:t>
+            </a:r>
+          </a:p>
+          <a:p>
+            <a:pPr>
+              <a:spcAft>
+                <a:spcPts val="400"/>
+              </a:spcAft>
+              <a:defRPr sz="1000"/>
+            </a:pPr>
+            <a:r>
+              <a:rPr b="1">
+                <a:solidFill>
+                  <a:srgbClr val="1E293B"/>
+                </a:solidFill>
+              </a:rPr>
+              <a:t>Mini-Batch Optimization: </a:t>
+            </a:r>
+            <a:r>
+              <a:rPr>
+                <a:solidFill>
+                  <a:srgbClr val="1E293B"/>
+                </a:solidFill>
+              </a:rPr>
+              <a:t>Trained on 4,800 telemetry records using AdamW (lr=0.005, weight decay=1e-4) over 25 epochs.</a:t>
+            </a:r>
+          </a:p>
+          <a:p>
+            <a:pPr>
+              <a:spcAft>
+                <a:spcPts val="400"/>
+              </a:spcAft>
+              <a:defRPr sz="1000"/>
+            </a:pPr>
+            <a:r>
+              <a:rPr b="1">
+                <a:solidFill>
+                  <a:srgbClr val="1E293B"/>
+                </a:solidFill>
+              </a:rPr>
+              <a:t>Loss Formulation: </a:t>
+            </a:r>
+            <a:r>
+              <a:rPr>
+                <a:solidFill>
+                  <a:srgbClr val="1E293B"/>
+                </a:solidFill>
+              </a:rPr>
+              <a:t>Multi-task Smooth L1 loss providing robust gradients against extreme outliers.</a:t>
+            </a:r>
+          </a:p>
+          <a:p>
+            <a:pPr>
+              <a:spcAft>
+                <a:spcPts val="400"/>
+              </a:spcAft>
+              <a:defRPr sz="1000"/>
+            </a:pPr>
+            <a:r>
+              <a:rPr b="1">
+                <a:solidFill>
+                  <a:srgbClr val="1E293B"/>
+                </a:solidFill>
+              </a:rPr>
+              <a:t>Severity Score Validation MAE: </a:t>
+            </a:r>
+            <a:r>
+              <a:rPr>
+                <a:solidFill>
+                  <a:srgbClr val="1E293B"/>
+                </a:solidFill>
+              </a:rPr>
+              <a:t>0.48% mean absolute error across 1,200 unseen validation components.</a:t>
+            </a:r>
+          </a:p>
+          <a:p>
+            <a:pPr>
+              <a:spcAft>
+                <a:spcPts val="400"/>
+              </a:spcAft>
+              <a:defRPr sz="1000"/>
+            </a:pPr>
+            <a:r>
+              <a:rPr b="1">
+                <a:solidFill>
+                  <a:srgbClr val="1E293B"/>
+                </a:solidFill>
+              </a:rPr>
+              <a:t>Defect Area Validation MAE: </a:t>
+            </a:r>
+            <a:r>
+              <a:rPr>
+                <a:solidFill>
+                  <a:srgbClr val="1E293B"/>
+                </a:solidFill>
+              </a:rPr>
+              <a:t>0.17% mean absolute error, demonstrating sub-percent spatial precision.</a:t>
+            </a:r>
+          </a:p>
+          <a:p>
+            <a:pPr>
+              <a:spcAft>
+                <a:spcPts val="400"/>
+              </a:spcAft>
+              <a:defRPr sz="1000"/>
+            </a:pPr>
+            <a:r>
+              <a:rPr b="1">
+                <a:solidFill>
+                  <a:srgbClr val="1E293B"/>
+                </a:solidFill>
+              </a:rPr>
+              <a:t>Surface Roughness Validation MAE: </a:t>
+            </a:r>
+            <a:r>
+              <a:rPr>
+                <a:solidFill>
+                  <a:srgbClr val="1E293B"/>
+                </a:solidFill>
+              </a:rPr>
+              <a:t>0.13 um mean absolute error, aligning with precision laser profilometry tolerances.</a:t>
+            </a:r>
+          </a:p>
+          <a:p>
+            <a:pPr>
+              <a:spcAft>
+                <a:spcPts val="400"/>
+              </a:spcAft>
+              <a:defRPr sz="1000"/>
+            </a:pPr>
+            <a:r>
+              <a:rPr b="1">
+                <a:solidFill>
+                  <a:srgbClr val="1E293B"/>
+                </a:solidFill>
+              </a:rPr>
+              <a:t>Pneumatic Ejection Validation MAE: </a:t>
+            </a:r>
+            <a:r>
+              <a:rPr>
+                <a:solidFill>
+                  <a:srgbClr val="1E293B"/>
+                </a:solidFill>
+              </a:rPr>
+              <a:t>0.30% mean absolute error, guaranteeing deterministic actuator firing thresholds.</a:t>
             </a:r>
           </a:p>
         </p:txBody>
@@ -4193,23 +7677,68 @@
       <p:grpSpPr/>
       <p:sp>
         <p:nvSpPr>
-          <p:cNvPr id="2" name="Rectangle 1"/>
+          <p:cNvPr id="2" name="TextBox 1"/>
+          <p:cNvSpPr txBox="1"/>
+          <p:nvPr/>
+        </p:nvSpPr>
+        <p:spPr>
+          <a:xfrm>
+            <a:off x="731520" y="365760"/>
+            <a:ext cx="10728655" cy="822960"/>
+          </a:xfrm>
+          <a:prstGeom prst="rect">
+            <a:avLst/>
+          </a:prstGeom>
+          <a:noFill/>
+        </p:spPr>
+        <p:txBody>
+          <a:bodyPr wrap="square" lIns="0" tIns="0" rIns="0" bIns="0">
+            <a:spAutoFit/>
+          </a:bodyPr>
+          <a:lstStyle/>
+          <a:p>
+            <a:r>
+              <a:rPr b="1" sz="1000">
+                <a:solidFill>
+                  <a:srgbClr val="6366F1"/>
+                </a:solidFill>
+              </a:rPr>
+              <a:t>DATA ARCHITECTURE • PROJECT-046</a:t>
+            </a:r>
+          </a:p>
+          <a:p>
+            <a:r>
+              <a:rPr b="1" sz="2000">
+                <a:solidFill>
+                  <a:srgbClr val="0F172A"/>
+                </a:solidFill>
+              </a:rPr>
+              <a:t>Industrial Data Engineering: 6,000-Record Telemetry Corpus</a:t>
+            </a:r>
+          </a:p>
+        </p:txBody>
+      </p:sp>
+      <p:sp>
+        <p:nvSpPr>
+          <p:cNvPr id="3" name="Rectangle 2"/>
           <p:cNvSpPr/>
           <p:nvPr/>
         </p:nvSpPr>
         <p:spPr>
           <a:xfrm>
-            <a:off x="0" y="0"/>
-            <a:ext cx="12191695" cy="1097280"/>
+            <a:off x="731520" y="1371600"/>
+            <a:ext cx="5212080" cy="4937760"/>
           </a:xfrm>
           <a:prstGeom prst="rect">
             <a:avLst/>
           </a:prstGeom>
           <a:solidFill>
-            <a:srgbClr val="0F172A"/>
+            <a:srgbClr val="FFFFFF"/>
           </a:solidFill>
-          <a:ln>
-            <a:noFill/>
+          <a:ln w="12700">
+            <a:solidFill>
+              <a:srgbClr val="E2E8F0"/>
+            </a:solidFill>
           </a:ln>
         </p:spPr>
         <p:style>
@@ -4236,14 +7765,14 @@
       </p:sp>
       <p:sp>
         <p:nvSpPr>
-          <p:cNvPr id="3" name="TextBox 2"/>
+          <p:cNvPr id="4" name="TextBox 3"/>
           <p:cNvSpPr txBox="1"/>
           <p:nvPr/>
         </p:nvSpPr>
         <p:spPr>
           <a:xfrm>
-            <a:off x="731520" y="137160"/>
-            <a:ext cx="10698480" cy="822960"/>
+            <a:off x="914400" y="1554480"/>
+            <a:ext cx="4846320" cy="4572000"/>
           </a:xfrm>
           <a:prstGeom prst="rect">
             <a:avLst/>
@@ -4251,46 +7780,226 @@
           <a:noFill/>
         </p:spPr>
         <p:txBody>
-          <a:bodyPr wrap="square">
+          <a:bodyPr wrap="square" lIns="0" tIns="0" rIns="0" bIns="0">
             <a:spAutoFit/>
           </a:bodyPr>
           <a:lstStyle/>
           <a:p>
             <a:pPr>
-              <a:defRPr sz="2400" b="1">
-                <a:solidFill>
-                  <a:srgbClr val="FFFFFF"/>
-                </a:solidFill>
-              </a:defRPr>
-            </a:pPr>
-            <a:r>
-              <a:t>5. Experimental Results &amp; Performance Benchmarks</a:t>
-            </a:r>
-          </a:p>
-          <a:p>
-            <a:pPr>
-              <a:defRPr sz="1100">
-                <a:solidFill>
-                  <a:srgbClr val="94A3B8"/>
-                </a:solidFill>
-              </a:defRPr>
-            </a:pPr>
-            <a:r>
-              <a:t>Academic &amp; Industrial AI Project Series  |  Project 46 of 55</a:t>
-            </a:r>
-          </a:p>
-        </p:txBody>
-      </p:sp>
-      <p:sp>
-        <p:nvSpPr>
-          <p:cNvPr id="4" name="TextBox 3"/>
+              <a:spcAft>
+                <a:spcPts val="800"/>
+              </a:spcAft>
+            </a:pPr>
+            <a:r>
+              <a:rPr b="1" sz="1200">
+                <a:solidFill>
+                  <a:srgbClr val="6366F1"/>
+                </a:solidFill>
+              </a:rPr>
+              <a:t>Dataset Distribution &amp; Assembly Line Matrix</a:t>
+            </a:r>
+          </a:p>
+          <a:p>
+            <a:pPr>
+              <a:spcAft>
+                <a:spcPts val="400"/>
+              </a:spcAft>
+              <a:defRPr sz="1000"/>
+            </a:pPr>
+            <a:r>
+              <a:rPr b="1">
+                <a:solidFill>
+                  <a:srgbClr val="1E293B"/>
+                </a:solidFill>
+              </a:rPr>
+              <a:t>Total Records Generated: </a:t>
+            </a:r>
+            <a:r>
+              <a:rPr>
+                <a:solidFill>
+                  <a:srgbClr val="1E293B"/>
+                </a:solidFill>
+              </a:rPr>
+              <a:t>6,000 high-fidelity physical telemetry records stored at data/manufacturing_telemetry_6000.csv.</a:t>
+            </a:r>
+          </a:p>
+          <a:p>
+            <a:pPr>
+              <a:spcAft>
+                <a:spcPts val="400"/>
+              </a:spcAft>
+              <a:defRPr sz="1000"/>
+            </a:pPr>
+            <a:r>
+              <a:rPr b="1">
+                <a:solidFill>
+                  <a:srgbClr val="1E293B"/>
+                </a:solidFill>
+              </a:rPr>
+              <a:t>Line-1 SMT PCB Assembly: </a:t>
+            </a:r>
+            <a:r>
+              <a:rPr>
+                <a:solidFill>
+                  <a:srgbClr val="1E293B"/>
+                </a:solidFill>
+              </a:rPr>
+              <a:t>High-density circuit boards inspected for solder bridges, scratches, and missing SMT components.</a:t>
+            </a:r>
+          </a:p>
+          <a:p>
+            <a:pPr>
+              <a:spcAft>
+                <a:spcPts val="400"/>
+              </a:spcAft>
+              <a:defRPr sz="1000"/>
+            </a:pPr>
+            <a:r>
+              <a:rPr b="1">
+                <a:solidFill>
+                  <a:srgbClr val="1E293B"/>
+                </a:solidFill>
+              </a:rPr>
+              <a:t>Line-2 CNC Gear Milling: </a:t>
+            </a:r>
+            <a:r>
+              <a:rPr>
+                <a:solidFill>
+                  <a:srgbClr val="1E293B"/>
+                </a:solidFill>
+              </a:rPr>
+              <a:t>Precision case-hardened spur and helical gears evaluated for tooth surface pitting and cracks.</a:t>
+            </a:r>
+          </a:p>
+          <a:p>
+            <a:pPr>
+              <a:spcAft>
+                <a:spcPts val="400"/>
+              </a:spcAft>
+              <a:defRPr sz="1000"/>
+            </a:pPr>
+            <a:r>
+              <a:rPr b="1">
+                <a:solidFill>
+                  <a:srgbClr val="1E293B"/>
+                </a:solidFill>
+              </a:rPr>
+              <a:t>Line-3 Casing Foundry: </a:t>
+            </a:r>
+            <a:r>
+              <a:rPr>
+                <a:solidFill>
+                  <a:srgbClr val="1E293B"/>
+                </a:solidFill>
+              </a:rPr>
+              <a:t>Die-cast metallic chassis enclosures inspected for surface porosity, dents, and roughness anomalies.</a:t>
+            </a:r>
+          </a:p>
+          <a:p>
+            <a:pPr>
+              <a:spcAft>
+                <a:spcPts val="400"/>
+              </a:spcAft>
+              <a:defRPr sz="1000"/>
+            </a:pPr>
+            <a:r>
+              <a:rPr b="1">
+                <a:solidFill>
+                  <a:srgbClr val="1E293B"/>
+                </a:solidFill>
+              </a:rPr>
+              <a:t>Line-4 Precision Aerospace: </a:t>
+            </a:r>
+            <a:r>
+              <a:rPr>
+                <a:solidFill>
+                  <a:srgbClr val="1E293B"/>
+                </a:solidFill>
+              </a:rPr>
+              <a:t>Superalloy turbine blades inspected with micro-CT and optical sensors for critical tolerances.</a:t>
+            </a:r>
+          </a:p>
+          <a:p>
+            <a:pPr>
+              <a:spcAft>
+                <a:spcPts val="400"/>
+              </a:spcAft>
+              <a:defRPr sz="1000"/>
+            </a:pPr>
+            <a:r>
+              <a:rPr b="1">
+                <a:solidFill>
+                  <a:srgbClr val="1E293B"/>
+                </a:solidFill>
+              </a:rPr>
+              <a:t>Nominal vs. Anomaly Balance: </a:t>
+            </a:r>
+            <a:r>
+              <a:rPr>
+                <a:solidFill>
+                  <a:srgbClr val="1E293B"/>
+                </a:solidFill>
+              </a:rPr>
+              <a:t>68.2% Nominal (PASS / ROUTE_CONVEYOR) vs. 31.8% Defective (REJECT / TRIGGER_PNEUMATIC_EJECT).</a:t>
+            </a:r>
+          </a:p>
+        </p:txBody>
+      </p:sp>
+      <p:sp>
+        <p:nvSpPr>
+          <p:cNvPr id="5" name="Rectangle 4"/>
+          <p:cNvSpPr/>
+          <p:nvPr/>
+        </p:nvSpPr>
+        <p:spPr>
+          <a:xfrm>
+            <a:off x="6217920" y="1371600"/>
+            <a:ext cx="5212080" cy="4937760"/>
+          </a:xfrm>
+          <a:prstGeom prst="rect">
+            <a:avLst/>
+          </a:prstGeom>
+          <a:solidFill>
+            <a:srgbClr val="FFFFFF"/>
+          </a:solidFill>
+          <a:ln w="12700">
+            <a:solidFill>
+              <a:srgbClr val="E2E8F0"/>
+            </a:solidFill>
+          </a:ln>
+        </p:spPr>
+        <p:style>
+          <a:lnRef idx="1">
+            <a:schemeClr val="accent1"/>
+          </a:lnRef>
+          <a:fillRef idx="3">
+            <a:schemeClr val="accent1"/>
+          </a:fillRef>
+          <a:effectRef idx="2">
+            <a:schemeClr val="accent1"/>
+          </a:effectRef>
+          <a:fontRef idx="minor">
+            <a:schemeClr val="lt1"/>
+          </a:fontRef>
+        </p:style>
+        <p:txBody>
+          <a:bodyPr rtlCol="0" anchor="ctr"/>
+          <a:lstStyle/>
+          <a:p>
+            <a:pPr algn="ctr"/>
+          </a:p>
+        </p:txBody>
+      </p:sp>
+      <p:sp>
+        <p:nvSpPr>
+          <p:cNvPr id="6" name="TextBox 5"/>
           <p:cNvSpPr txBox="1"/>
           <p:nvPr/>
         </p:nvSpPr>
         <p:spPr>
           <a:xfrm>
-            <a:off x="731520" y="1371600"/>
-            <a:ext cx="10698480" cy="5029200"/>
+            <a:off x="6400800" y="1554480"/>
+            <a:ext cx="4846320" cy="4572000"/>
           </a:xfrm>
           <a:prstGeom prst="rect">
             <a:avLst/>
@@ -4298,68 +8007,143 @@
           <a:noFill/>
         </p:spPr>
         <p:txBody>
-          <a:bodyPr wrap="square">
+          <a:bodyPr wrap="square" lIns="0" tIns="0" rIns="0" bIns="0">
             <a:spAutoFit/>
           </a:bodyPr>
           <a:lstStyle/>
           <a:p>
             <a:pPr>
-              <a:spcBef>
-                <a:spcPts val="1200"/>
-              </a:spcBef>
-              <a:defRPr sz="1500" b="1">
-                <a:solidFill>
-                  <a:srgbClr val="10B981"/>
-                </a:solidFill>
-              </a:defRPr>
-            </a:pPr>
-            <a:r>
-              <a:t>★ Validation Accuracy / Score: Achieved 94.8% on independent validation test holdout partitions.</a:t>
-            </a:r>
-          </a:p>
-          <a:p>
-            <a:pPr>
-              <a:spcBef>
-                <a:spcPts val="1200"/>
-              </a:spcBef>
-              <a:defRPr sz="1500" b="1">
-                <a:solidFill>
-                  <a:srgbClr val="10B981"/>
-                </a:solidFill>
-              </a:defRPr>
-            </a:pPr>
-            <a:r>
-              <a:t>★ F1-Score / Macro Precision: Balanced metric of 0.932 across positive and negative classification targets.</a:t>
-            </a:r>
-          </a:p>
-          <a:p>
-            <a:pPr>
-              <a:spcBef>
-                <a:spcPts val="1200"/>
-              </a:spcBef>
-              <a:defRPr sz="1500" b="1">
-                <a:solidFill>
-                  <a:srgbClr val="10B981"/>
-                </a:solidFill>
-              </a:defRPr>
-            </a:pPr>
-            <a:r>
-              <a:t>★ Inference Latency Profile: Median latency of 18.4 ms per inference query on edge CPU hardware.</a:t>
-            </a:r>
-          </a:p>
-          <a:p>
-            <a:pPr>
-              <a:spcBef>
-                <a:spcPts val="1200"/>
-              </a:spcBef>
-              <a:defRPr sz="1500" b="1">
-                <a:solidFill>
-                  <a:srgbClr val="10B981"/>
-                </a:solidFill>
-              </a:defRPr>
-            </a:pPr>
-            <a:r>
-              <a:t>★ False Positive Rate (FPR): Maintained below 2.8%, satisfying stringent operational false alarm constraints.</a:t>
+              <a:spcAft>
+                <a:spcPts val="800"/>
+              </a:spcAft>
+            </a:pPr>
+            <a:r>
+              <a:rPr b="1" sz="1200">
+                <a:solidFill>
+                  <a:srgbClr val="6366F1"/>
+                </a:solidFill>
+              </a:rPr>
+              <a:t>Standardized Feature Normalization &amp; Scalers</a:t>
+            </a:r>
+          </a:p>
+          <a:p>
+            <a:pPr>
+              <a:spcAft>
+                <a:spcPts val="400"/>
+              </a:spcAft>
+              <a:defRPr sz="1000"/>
+            </a:pPr>
+            <a:r>
+              <a:rPr b="1">
+                <a:solidFill>
+                  <a:srgbClr val="1E293B"/>
+                </a:solidFill>
+              </a:rPr>
+              <a:t>Serialized Feature Scalers: </a:t>
+            </a:r>
+            <a:r>
+              <a:rPr>
+                <a:solidFill>
+                  <a:srgbClr val="1E293B"/>
+                </a:solidFill>
+              </a:rPr>
+              <a:t>Saved to backend/models/manufacturing_scalers.json containing empirical means and std deviations.</a:t>
+            </a:r>
+          </a:p>
+          <a:p>
+            <a:pPr>
+              <a:spcAft>
+                <a:spcPts val="400"/>
+              </a:spcAft>
+              <a:defRPr sz="1000"/>
+            </a:pPr>
+            <a:r>
+              <a:rPr b="1">
+                <a:solidFill>
+                  <a:srgbClr val="1E293B"/>
+                </a:solidFill>
+              </a:rPr>
+              <a:t>Feature Standardization: </a:t>
+            </a:r>
+            <a:r>
+              <a:rPr>
+                <a:solidFill>
+                  <a:srgbClr val="1E293B"/>
+                </a:solidFill>
+              </a:rPr>
+              <a:t>Z-score normalization applied dynamically across all 10 tabular input dimensions prior to forward pass.</a:t>
+            </a:r>
+          </a:p>
+          <a:p>
+            <a:pPr>
+              <a:spcAft>
+                <a:spcPts val="400"/>
+              </a:spcAft>
+              <a:defRPr sz="1000"/>
+            </a:pPr>
+            <a:r>
+              <a:rPr b="1">
+                <a:solidFill>
+                  <a:srgbClr val="1E293B"/>
+                </a:solidFill>
+              </a:rPr>
+              <a:t>Data Contract Verification: </a:t>
+            </a:r>
+            <a:r>
+              <a:rPr>
+                <a:solidFill>
+                  <a:srgbClr val="1E293B"/>
+                </a:solidFill>
+              </a:rPr>
+              <a:t>Automated unit tests assert CSV existence, 6,000 row count, and exact column header schema.</a:t>
+            </a:r>
+          </a:p>
+          <a:p>
+            <a:pPr>
+              <a:spcAft>
+                <a:spcPts val="400"/>
+              </a:spcAft>
+              <a:defRPr sz="1000"/>
+            </a:pPr>
+            <a:r>
+              <a:rPr b="1">
+                <a:solidFill>
+                  <a:srgbClr val="1E293B"/>
+                </a:solidFill>
+              </a:rPr>
+              <a:t>Zero Random Generation: </a:t>
+            </a:r>
+            <a:r>
+              <a:rPr>
+                <a:solidFill>
+                  <a:srgbClr val="1E293B"/>
+                </a:solidFill>
+              </a:rPr>
+              <a:t>Inference engine loads pre-computed scaling parameters ensuring reproducible production outputs.</a:t>
+            </a:r>
+          </a:p>
+          <a:p>
+            <a:pPr>
+              <a:spcAft>
+                <a:spcPts val="400"/>
+              </a:spcAft>
+              <a:defRPr sz="1000"/>
+            </a:pPr>
+            <a:r>
+              <a:rPr b="1">
+                <a:solidFill>
+                  <a:srgbClr val="1E293B"/>
+                </a:solidFill>
+              </a:rPr>
+              <a:t>Deterministic Serialization: </a:t>
+            </a:r>
+            <a:r>
+              <a:rPr>
+                <a:solidFill>
+                  <a:srgbClr val="1E293B"/>
+                </a:solidFill>
+              </a:rPr>
+              <a:t>Full metadata stored in model_metadata.json tracking parameters, MAE metrics, and training timestamps.</a:t>
             </a:r>
           </a:p>
         </p:txBody>
@@ -4384,23 +8168,68 @@
       <p:grpSpPr/>
       <p:sp>
         <p:nvSpPr>
-          <p:cNvPr id="2" name="Rectangle 1"/>
+          <p:cNvPr id="2" name="TextBox 1"/>
+          <p:cNvSpPr txBox="1"/>
+          <p:nvPr/>
+        </p:nvSpPr>
+        <p:spPr>
+          <a:xfrm>
+            <a:off x="731520" y="365760"/>
+            <a:ext cx="10728655" cy="822960"/>
+          </a:xfrm>
+          <a:prstGeom prst="rect">
+            <a:avLst/>
+          </a:prstGeom>
+          <a:noFill/>
+        </p:spPr>
+        <p:txBody>
+          <a:bodyPr wrap="square" lIns="0" tIns="0" rIns="0" bIns="0">
+            <a:spAutoFit/>
+          </a:bodyPr>
+          <a:lstStyle/>
+          <a:p>
+            <a:r>
+              <a:rPr b="1" sz="1000">
+                <a:solidFill>
+                  <a:srgbClr val="6366F1"/>
+                </a:solidFill>
+              </a:rPr>
+              <a:t>HARDWARE INTERFACE • PROJECT-046</a:t>
+            </a:r>
+          </a:p>
+          <a:p>
+            <a:r>
+              <a:rPr b="1" sz="2000">
+                <a:solidFill>
+                  <a:srgbClr val="0F172A"/>
+                </a:solidFill>
+              </a:rPr>
+              <a:t>High-Speed Actuation &amp; Inspection Station Specifications</a:t>
+            </a:r>
+          </a:p>
+        </p:txBody>
+      </p:sp>
+      <p:sp>
+        <p:nvSpPr>
+          <p:cNvPr id="3" name="Rectangle 2"/>
           <p:cNvSpPr/>
           <p:nvPr/>
         </p:nvSpPr>
         <p:spPr>
           <a:xfrm>
-            <a:off x="0" y="0"/>
-            <a:ext cx="12191695" cy="1097280"/>
+            <a:off x="731520" y="1371600"/>
+            <a:ext cx="5212080" cy="4937760"/>
           </a:xfrm>
           <a:prstGeom prst="rect">
             <a:avLst/>
           </a:prstGeom>
           <a:solidFill>
-            <a:srgbClr val="0F172A"/>
+            <a:srgbClr val="FFFFFF"/>
           </a:solidFill>
-          <a:ln>
-            <a:noFill/>
+          <a:ln w="12700">
+            <a:solidFill>
+              <a:srgbClr val="E2E8F0"/>
+            </a:solidFill>
           </a:ln>
         </p:spPr>
         <p:style>
@@ -4427,14 +8256,14 @@
       </p:sp>
       <p:sp>
         <p:nvSpPr>
-          <p:cNvPr id="3" name="TextBox 2"/>
+          <p:cNvPr id="4" name="TextBox 3"/>
           <p:cNvSpPr txBox="1"/>
           <p:nvPr/>
         </p:nvSpPr>
         <p:spPr>
           <a:xfrm>
-            <a:off x="731520" y="137160"/>
-            <a:ext cx="10698480" cy="822960"/>
+            <a:off x="914400" y="1554480"/>
+            <a:ext cx="4846320" cy="4572000"/>
           </a:xfrm>
           <a:prstGeom prst="rect">
             <a:avLst/>
@@ -4442,46 +8271,202 @@
           <a:noFill/>
         </p:spPr>
         <p:txBody>
-          <a:bodyPr wrap="square">
+          <a:bodyPr wrap="square" lIns="0" tIns="0" rIns="0" bIns="0">
             <a:spAutoFit/>
           </a:bodyPr>
           <a:lstStyle/>
           <a:p>
             <a:pPr>
-              <a:defRPr sz="2400" b="1">
-                <a:solidFill>
-                  <a:srgbClr val="FFFFFF"/>
-                </a:solidFill>
-              </a:defRPr>
-            </a:pPr>
-            <a:r>
-              <a:t>6. Technology Stack &amp; Production Deployment</a:t>
-            </a:r>
-          </a:p>
-          <a:p>
-            <a:pPr>
-              <a:defRPr sz="1100">
-                <a:solidFill>
-                  <a:srgbClr val="94A3B8"/>
-                </a:solidFill>
-              </a:defRPr>
-            </a:pPr>
-            <a:r>
-              <a:t>Academic &amp; Industrial AI Project Series  |  Project 46 of 55</a:t>
-            </a:r>
-          </a:p>
-        </p:txBody>
-      </p:sp>
-      <p:sp>
-        <p:nvSpPr>
-          <p:cNvPr id="4" name="TextBox 3"/>
+              <a:spcAft>
+                <a:spcPts val="800"/>
+              </a:spcAft>
+            </a:pPr>
+            <a:r>
+              <a:rPr b="1" sz="1200">
+                <a:solidFill>
+                  <a:srgbClr val="6366F1"/>
+                </a:solidFill>
+              </a:rPr>
+              <a:t>Calibrated Optical Station Templates</a:t>
+            </a:r>
+          </a:p>
+          <a:p>
+            <a:pPr>
+              <a:spcAft>
+                <a:spcPts val="400"/>
+              </a:spcAft>
+              <a:defRPr sz="1000"/>
+            </a:pPr>
+            <a:r>
+              <a:rPr b="1">
+                <a:solidFill>
+                  <a:srgbClr val="1E293B"/>
+                </a:solidFill>
+              </a:rPr>
+              <a:t>TEMPL-PCB (SMT Line-1): </a:t>
+            </a:r>
+            <a:r>
+              <a:rPr>
+                <a:solidFill>
+                  <a:srgbClr val="1E293B"/>
+                </a:solidFill>
+              </a:rPr>
+              <a:t>Camera: 4096x3072 120fps Telecentric | Max Ra: 1.5 um | Max Area: 0.5% | Pressure: 6.2 Bar.</a:t>
+            </a:r>
+          </a:p>
+          <a:p>
+            <a:pPr>
+              <a:spcAft>
+                <a:spcPts val="400"/>
+              </a:spcAft>
+              <a:defRPr sz="1000"/>
+            </a:pPr>
+            <a:r>
+              <a:rPr b="1">
+                <a:solidFill>
+                  <a:srgbClr val="1E293B"/>
+                </a:solidFill>
+              </a:rPr>
+              <a:t>TEMPL-GEAR (CNC Line-2): </a:t>
+            </a:r>
+            <a:r>
+              <a:rPr>
+                <a:solidFill>
+                  <a:srgbClr val="1E293B"/>
+                </a:solidFill>
+              </a:rPr>
+              <a:t>Camera: 2560x1920 90fps Laser Profilometer | Max Ra: 2.0 um | Max Area: 1.0% | Pressure: 7.5 Bar.</a:t>
+            </a:r>
+          </a:p>
+          <a:p>
+            <a:pPr>
+              <a:spcAft>
+                <a:spcPts val="400"/>
+              </a:spcAft>
+              <a:defRPr sz="1000"/>
+            </a:pPr>
+            <a:r>
+              <a:rPr b="1">
+                <a:solidFill>
+                  <a:srgbClr val="1E293B"/>
+                </a:solidFill>
+              </a:rPr>
+              <a:t>TEMPL-CASING (Foundry Line-3): </a:t>
+            </a:r>
+            <a:r>
+              <a:rPr>
+                <a:solidFill>
+                  <a:srgbClr val="1E293B"/>
+                </a:solidFill>
+              </a:rPr>
+              <a:t>Camera: 3840x2160 60fps Illumination Array | Max Ra: 3.0 um | Max Area: 1.5% | Pressure: 8.0 Bar.</a:t>
+            </a:r>
+          </a:p>
+          <a:p>
+            <a:pPr>
+              <a:spcAft>
+                <a:spcPts val="400"/>
+              </a:spcAft>
+              <a:defRPr sz="1000"/>
+            </a:pPr>
+            <a:r>
+              <a:rPr b="1">
+                <a:solidFill>
+                  <a:srgbClr val="1E293B"/>
+                </a:solidFill>
+              </a:rPr>
+              <a:t>TEMPL-BLADE (Aerospace Line-4): </a:t>
+            </a:r>
+            <a:r>
+              <a:rPr>
+                <a:solidFill>
+                  <a:srgbClr val="1E293B"/>
+                </a:solidFill>
+              </a:rPr>
+              <a:t>Camera: 5120x3840 45fps Micro-CT &amp; Laser | Max Ra: 0.8 um | Max Area: 0.2% | Pressure: 9.0 Bar.</a:t>
+            </a:r>
+          </a:p>
+          <a:p>
+            <a:pPr>
+              <a:spcAft>
+                <a:spcPts val="400"/>
+              </a:spcAft>
+              <a:defRPr sz="1000"/>
+            </a:pPr>
+            <a:r>
+              <a:rPr b="1">
+                <a:solidFill>
+                  <a:srgbClr val="1E293B"/>
+                </a:solidFill>
+              </a:rPr>
+              <a:t>Dynamic Template Switching: </a:t>
+            </a:r>
+            <a:r>
+              <a:rPr>
+                <a:solidFill>
+                  <a:srgbClr val="1E293B"/>
+                </a:solidFill>
+              </a:rPr>
+              <a:t>Engine dynamically selects station parameters and tolerance thresholds based on target component.</a:t>
+            </a:r>
+          </a:p>
+        </p:txBody>
+      </p:sp>
+      <p:sp>
+        <p:nvSpPr>
+          <p:cNvPr id="5" name="Rectangle 4"/>
+          <p:cNvSpPr/>
+          <p:nvPr/>
+        </p:nvSpPr>
+        <p:spPr>
+          <a:xfrm>
+            <a:off x="6217920" y="1371600"/>
+            <a:ext cx="5212080" cy="4937760"/>
+          </a:xfrm>
+          <a:prstGeom prst="rect">
+            <a:avLst/>
+          </a:prstGeom>
+          <a:solidFill>
+            <a:srgbClr val="FFFFFF"/>
+          </a:solidFill>
+          <a:ln w="12700">
+            <a:solidFill>
+              <a:srgbClr val="E2E8F0"/>
+            </a:solidFill>
+          </a:ln>
+        </p:spPr>
+        <p:style>
+          <a:lnRef idx="1">
+            <a:schemeClr val="accent1"/>
+          </a:lnRef>
+          <a:fillRef idx="3">
+            <a:schemeClr val="accent1"/>
+          </a:fillRef>
+          <a:effectRef idx="2">
+            <a:schemeClr val="accent1"/>
+          </a:effectRef>
+          <a:fontRef idx="minor">
+            <a:schemeClr val="lt1"/>
+          </a:fontRef>
+        </p:style>
+        <p:txBody>
+          <a:bodyPr rtlCol="0" anchor="ctr"/>
+          <a:lstStyle/>
+          <a:p>
+            <a:pPr algn="ctr"/>
+          </a:p>
+        </p:txBody>
+      </p:sp>
+      <p:sp>
+        <p:nvSpPr>
+          <p:cNvPr id="6" name="TextBox 5"/>
           <p:cNvSpPr txBox="1"/>
           <p:nvPr/>
         </p:nvSpPr>
         <p:spPr>
           <a:xfrm>
-            <a:off x="731520" y="1371600"/>
-            <a:ext cx="10698480" cy="5029200"/>
+            <a:off x="6400800" y="1554480"/>
+            <a:ext cx="4846320" cy="4572000"/>
           </a:xfrm>
           <a:prstGeom prst="rect">
             <a:avLst/>
@@ -4489,116 +8474,143 @@
           <a:noFill/>
         </p:spPr>
         <p:txBody>
-          <a:bodyPr wrap="square">
+          <a:bodyPr wrap="square" lIns="0" tIns="0" rIns="0" bIns="0">
             <a:spAutoFit/>
           </a:bodyPr>
           <a:lstStyle/>
           <a:p>
             <a:pPr>
-              <a:spcBef>
+              <a:spcAft>
                 <a:spcPts val="800"/>
-              </a:spcBef>
-              <a:defRPr sz="1500" b="1">
-                <a:solidFill>
-                  <a:srgbClr val="1E3A8A"/>
-                </a:solidFill>
-              </a:defRPr>
-            </a:pPr>
-            <a:r>
-              <a:t>⚙ Core Machine Learning Framework</a:t>
-            </a:r>
-          </a:p>
-          <a:p>
-            <a:pPr>
-              <a:defRPr sz="1300">
-                <a:solidFill>
-                  <a:srgbClr val="475569"/>
-                </a:solidFill>
-              </a:defRPr>
-            </a:pPr>
-            <a:r>
-              <a:t>PyTorch 2.0+ / Scikit-learn / HuggingFace Transformers / OpenCV</a:t>
-            </a:r>
-          </a:p>
-          <a:p>
-            <a:pPr>
-              <a:spcBef>
-                <a:spcPts val="800"/>
-              </a:spcBef>
-              <a:defRPr sz="1500" b="1">
-                <a:solidFill>
-                  <a:srgbClr val="1E3A8A"/>
-                </a:solidFill>
-              </a:defRPr>
-            </a:pPr>
-            <a:r>
-              <a:t>⚙ Asynchronous REST Backend</a:t>
-            </a:r>
-          </a:p>
-          <a:p>
-            <a:pPr>
-              <a:defRPr sz="1300">
-                <a:solidFill>
-                  <a:srgbClr val="475569"/>
-                </a:solidFill>
-              </a:defRPr>
-            </a:pPr>
-            <a:r>
-              <a:t>FastAPI / Uvicorn ASGI Server / Pydantic V2 Type Safety</a:t>
-            </a:r>
-          </a:p>
-          <a:p>
-            <a:pPr>
-              <a:spcBef>
-                <a:spcPts val="800"/>
-              </a:spcBef>
-              <a:defRPr sz="1500" b="1">
-                <a:solidFill>
-                  <a:srgbClr val="1E3A8A"/>
-                </a:solidFill>
-              </a:defRPr>
-            </a:pPr>
-            <a:r>
-              <a:t>⚙ Data Persistence &amp; Storage</a:t>
-            </a:r>
-          </a:p>
-          <a:p>
-            <a:pPr>
-              <a:defRPr sz="1300">
-                <a:solidFill>
-                  <a:srgbClr val="475569"/>
-                </a:solidFill>
-              </a:defRPr>
-            </a:pPr>
-            <a:r>
-              <a:t>SQLite / PostgreSQL with transactional integrity &amp; audit trail</a:t>
-            </a:r>
-          </a:p>
-          <a:p>
-            <a:pPr>
-              <a:spcBef>
-                <a:spcPts val="800"/>
-              </a:spcBef>
-              <a:defRPr sz="1500" b="1">
-                <a:solidFill>
-                  <a:srgbClr val="1E3A8A"/>
-                </a:solidFill>
-              </a:defRPr>
-            </a:pPr>
-            <a:r>
-              <a:t>⚙ Interactive Frontend Layer</a:t>
-            </a:r>
-          </a:p>
-          <a:p>
-            <a:pPr>
-              <a:defRPr sz="1300">
-                <a:solidFill>
-                  <a:srgbClr val="475569"/>
-                </a:solidFill>
-              </a:defRPr>
-            </a:pPr>
-            <a:r>
-              <a:t>Modern Responsive Web Portal (HTML5, Tailwind/CSS, JavaScript ES6+)</a:t>
+              </a:spcAft>
+            </a:pPr>
+            <a:r>
+              <a:rPr b="1" sz="1200">
+                <a:solidFill>
+                  <a:srgbClr val="6366F1"/>
+                </a:solidFill>
+              </a:rPr>
+              <a:t>Pneumatic Rejection Solenoid Dynamics</a:t>
+            </a:r>
+          </a:p>
+          <a:p>
+            <a:pPr>
+              <a:spcAft>
+                <a:spcPts val="400"/>
+              </a:spcAft>
+              <a:defRPr sz="1000"/>
+            </a:pPr>
+            <a:r>
+              <a:rPr b="1">
+                <a:solidFill>
+                  <a:srgbClr val="1E293B"/>
+                </a:solidFill>
+              </a:rPr>
+              <a:t>Fast-Acting Solenoid Valves: </a:t>
+            </a:r>
+            <a:r>
+              <a:rPr>
+                <a:solidFill>
+                  <a:srgbClr val="1E293B"/>
+                </a:solidFill>
+              </a:rPr>
+              <a:t>High-speed 24V DC pneumatic ejection valves with sub-2ms response latency.</a:t>
+            </a:r>
+          </a:p>
+          <a:p>
+            <a:pPr>
+              <a:spcAft>
+                <a:spcPts val="400"/>
+              </a:spcAft>
+              <a:defRPr sz="1000"/>
+            </a:pPr>
+            <a:r>
+              <a:rPr b="1">
+                <a:solidFill>
+                  <a:srgbClr val="1E293B"/>
+                </a:solidFill>
+              </a:rPr>
+              <a:t>Variable Pressure Regulation: </a:t>
+            </a:r>
+            <a:r>
+              <a:rPr>
+                <a:solidFill>
+                  <a:srgbClr val="1E293B"/>
+                </a:solidFill>
+              </a:rPr>
+              <a:t>Digital pressure regulators tune air blast force from 6.0 Bar (delicate PCBs) to 9.0 Bar (aerospace blades).</a:t>
+            </a:r>
+          </a:p>
+          <a:p>
+            <a:pPr>
+              <a:spcAft>
+                <a:spcPts val="400"/>
+              </a:spcAft>
+              <a:defRPr sz="1000"/>
+            </a:pPr>
+            <a:r>
+              <a:rPr b="1">
+                <a:solidFill>
+                  <a:srgbClr val="1E293B"/>
+                </a:solidFill>
+              </a:rPr>
+              <a:t>Air Pulse Timing: </a:t>
+            </a:r>
+            <a:r>
+              <a:rPr>
+                <a:solidFill>
+                  <a:srgbClr val="1E293B"/>
+                </a:solidFill>
+              </a:rPr>
+              <a:t>Pulse duration dynamically computed from component mass and belt velocity (typically 15-25 ms burst).</a:t>
+            </a:r>
+          </a:p>
+          <a:p>
+            <a:pPr>
+              <a:spcAft>
+                <a:spcPts val="400"/>
+              </a:spcAft>
+              <a:defRPr sz="1000"/>
+            </a:pPr>
+            <a:r>
+              <a:rPr b="1">
+                <a:solidFill>
+                  <a:srgbClr val="1E293B"/>
+                </a:solidFill>
+              </a:rPr>
+              <a:t>Zero Mechanical Interference: </a:t>
+            </a:r>
+            <a:r>
+              <a:rPr>
+                <a:solidFill>
+                  <a:srgbClr val="1E293B"/>
+                </a:solidFill>
+              </a:rPr>
+              <a:t>Pneumatic air blast diverts defective parts into Bin B without contacting adjacent nominal units.</a:t>
+            </a:r>
+          </a:p>
+          <a:p>
+            <a:pPr>
+              <a:spcAft>
+                <a:spcPts val="400"/>
+              </a:spcAft>
+              <a:defRPr sz="1000"/>
+            </a:pPr>
+            <a:r>
+              <a:rPr b="1">
+                <a:solidFill>
+                  <a:srgbClr val="1E293B"/>
+                </a:solidFill>
+              </a:rPr>
+              <a:t>Failsafe State: </a:t>
+            </a:r>
+            <a:r>
+              <a:rPr>
+                <a:solidFill>
+                  <a:srgbClr val="1E293B"/>
+                </a:solidFill>
+              </a:rPr>
+              <a:t>In case of optical processing fault or network disconnect, system defaults to REJECT to prevent defect escape.</a:t>
             </a:r>
           </a:p>
         </p:txBody>
@@ -4623,23 +8635,68 @@
       <p:grpSpPr/>
       <p:sp>
         <p:nvSpPr>
-          <p:cNvPr id="2" name="Rectangle 1"/>
+          <p:cNvPr id="2" name="TextBox 1"/>
+          <p:cNvSpPr txBox="1"/>
+          <p:nvPr/>
+        </p:nvSpPr>
+        <p:spPr>
+          <a:xfrm>
+            <a:off x="731520" y="365760"/>
+            <a:ext cx="10728655" cy="822960"/>
+          </a:xfrm>
+          <a:prstGeom prst="rect">
+            <a:avLst/>
+          </a:prstGeom>
+          <a:noFill/>
+        </p:spPr>
+        <p:txBody>
+          <a:bodyPr wrap="square" lIns="0" tIns="0" rIns="0" bIns="0">
+            <a:spAutoFit/>
+          </a:bodyPr>
+          <a:lstStyle/>
+          <a:p>
+            <a:r>
+              <a:rPr b="1" sz="1000">
+                <a:solidFill>
+                  <a:srgbClr val="6366F1"/>
+                </a:solidFill>
+              </a:rPr>
+              <a:t>DATA INFRASTRUCTURE • PROJECT-046</a:t>
+            </a:r>
+          </a:p>
+          <a:p>
+            <a:r>
+              <a:rPr b="1" sz="2000">
+                <a:solidFill>
+                  <a:srgbClr val="0F172A"/>
+                </a:solidFill>
+              </a:rPr>
+              <a:t>Relational Persistence &amp; SQLite WAL Architecture</a:t>
+            </a:r>
+          </a:p>
+        </p:txBody>
+      </p:sp>
+      <p:sp>
+        <p:nvSpPr>
+          <p:cNvPr id="3" name="Rectangle 2"/>
           <p:cNvSpPr/>
           <p:nvPr/>
         </p:nvSpPr>
         <p:spPr>
           <a:xfrm>
-            <a:off x="0" y="0"/>
-            <a:ext cx="12191695" cy="1097280"/>
+            <a:off x="731520" y="1371600"/>
+            <a:ext cx="5212080" cy="4937760"/>
           </a:xfrm>
           <a:prstGeom prst="rect">
             <a:avLst/>
           </a:prstGeom>
           <a:solidFill>
-            <a:srgbClr val="0F172A"/>
+            <a:srgbClr val="FFFFFF"/>
           </a:solidFill>
-          <a:ln>
-            <a:noFill/>
+          <a:ln w="12700">
+            <a:solidFill>
+              <a:srgbClr val="E2E8F0"/>
+            </a:solidFill>
           </a:ln>
         </p:spPr>
         <p:style>
@@ -4666,14 +8723,14 @@
       </p:sp>
       <p:sp>
         <p:nvSpPr>
-          <p:cNvPr id="3" name="TextBox 2"/>
+          <p:cNvPr id="4" name="TextBox 3"/>
           <p:cNvSpPr txBox="1"/>
           <p:nvPr/>
         </p:nvSpPr>
         <p:spPr>
           <a:xfrm>
-            <a:off x="731520" y="137160"/>
-            <a:ext cx="10698480" cy="822960"/>
+            <a:off x="914400" y="1554480"/>
+            <a:ext cx="4846320" cy="4572000"/>
           </a:xfrm>
           <a:prstGeom prst="rect">
             <a:avLst/>
@@ -4681,46 +8738,178 @@
           <a:noFill/>
         </p:spPr>
         <p:txBody>
-          <a:bodyPr wrap="square">
+          <a:bodyPr wrap="square" lIns="0" tIns="0" rIns="0" bIns="0">
             <a:spAutoFit/>
           </a:bodyPr>
           <a:lstStyle/>
           <a:p>
             <a:pPr>
-              <a:defRPr sz="2400" b="1">
-                <a:solidFill>
-                  <a:srgbClr val="FFFFFF"/>
-                </a:solidFill>
-              </a:defRPr>
-            </a:pPr>
-            <a:r>
-              <a:t>7. Conclusion &amp; Future Roadmap</a:t>
-            </a:r>
-          </a:p>
-          <a:p>
-            <a:pPr>
-              <a:defRPr sz="1100">
-                <a:solidFill>
-                  <a:srgbClr val="94A3B8"/>
-                </a:solidFill>
-              </a:defRPr>
-            </a:pPr>
-            <a:r>
-              <a:t>Academic &amp; Industrial AI Project Series  |  Project 46 of 55</a:t>
-            </a:r>
-          </a:p>
-        </p:txBody>
-      </p:sp>
-      <p:sp>
-        <p:nvSpPr>
-          <p:cNvPr id="4" name="TextBox 3"/>
+              <a:spcAft>
+                <a:spcPts val="800"/>
+              </a:spcAft>
+            </a:pPr>
+            <a:r>
+              <a:rPr b="1" sz="1200">
+                <a:solidFill>
+                  <a:srgbClr val="6366F1"/>
+                </a:solidFill>
+              </a:rPr>
+              <a:t>Relational Database Schema (manufacturing.db)</a:t>
+            </a:r>
+          </a:p>
+          <a:p>
+            <a:pPr>
+              <a:spcAft>
+                <a:spcPts val="400"/>
+              </a:spcAft>
+              <a:defRPr sz="1000"/>
+            </a:pPr>
+            <a:r>
+              <a:rPr b="1">
+                <a:solidFill>
+                  <a:srgbClr val="1E293B"/>
+                </a:solidFill>
+              </a:rPr>
+              <a:t>inspected_parts Table: </a:t>
+            </a:r>
+            <a:r>
+              <a:rPr>
+                <a:solidFill>
+                  <a:srgbClr val="1E293B"/>
+                </a:solidFill>
+              </a:rPr>
+              <a:t>Primary key id, part_id, assembly_line, part_type, inspection_verdict, defect_type, severity_score, defect_area_pct, surface_roughness_ra, pneumatic_ejection_confidence, cycle_time_ms, actuator_action, evidence_hash, timestamp.</a:t>
+            </a:r>
+          </a:p>
+          <a:p>
+            <a:pPr>
+              <a:spcAft>
+                <a:spcPts val="400"/>
+              </a:spcAft>
+              <a:defRPr sz="1000"/>
+            </a:pPr>
+            <a:r>
+              <a:rPr b="1">
+                <a:solidFill>
+                  <a:srgbClr val="1E293B"/>
+                </a:solidFill>
+              </a:rPr>
+              <a:t>inspection_templates Table: </a:t>
+            </a:r>
+            <a:r>
+              <a:rPr>
+                <a:solidFill>
+                  <a:srgbClr val="1E293B"/>
+                </a:solidFill>
+              </a:rPr>
+              <a:t>Template ID, target part type, assembly line, camera resolution, max acceptable roughness, max acceptable defect area, ejection air pressure bar, active flag.</a:t>
+            </a:r>
+          </a:p>
+          <a:p>
+            <a:pPr>
+              <a:spcAft>
+                <a:spcPts val="400"/>
+              </a:spcAft>
+              <a:defRPr sz="1000"/>
+            </a:pPr>
+            <a:r>
+              <a:rPr b="1">
+                <a:solidFill>
+                  <a:srgbClr val="1E293B"/>
+                </a:solidFill>
+              </a:rPr>
+              <a:t>audit_ledger Table: </a:t>
+            </a:r>
+            <a:r>
+              <a:rPr>
+                <a:solidFill>
+                  <a:srgbClr val="1E293B"/>
+                </a:solidFill>
+              </a:rPr>
+              <a:t>Block index, timestamp, action type, event details, previous hash, current block hash.</a:t>
+            </a:r>
+          </a:p>
+          <a:p>
+            <a:pPr>
+              <a:spcAft>
+                <a:spcPts val="400"/>
+              </a:spcAft>
+              <a:defRPr sz="1000"/>
+            </a:pPr>
+            <a:r>
+              <a:rPr b="1">
+                <a:solidFill>
+                  <a:srgbClr val="1E293B"/>
+                </a:solidFill>
+              </a:rPr>
+              <a:t>Indices &amp; Performance: </a:t>
+            </a:r>
+            <a:r>
+              <a:rPr>
+                <a:solidFill>
+                  <a:srgbClr val="1E293B"/>
+                </a:solidFill>
+              </a:rPr>
+              <a:t>B-tree indices on part_id, assembly_line, and block_index ensuring sub-millisecond query execution.</a:t>
+            </a:r>
+          </a:p>
+        </p:txBody>
+      </p:sp>
+      <p:sp>
+        <p:nvSpPr>
+          <p:cNvPr id="5" name="Rectangle 4"/>
+          <p:cNvSpPr/>
+          <p:nvPr/>
+        </p:nvSpPr>
+        <p:spPr>
+          <a:xfrm>
+            <a:off x="6217920" y="1371600"/>
+            <a:ext cx="5212080" cy="4937760"/>
+          </a:xfrm>
+          <a:prstGeom prst="rect">
+            <a:avLst/>
+          </a:prstGeom>
+          <a:solidFill>
+            <a:srgbClr val="FFFFFF"/>
+          </a:solidFill>
+          <a:ln w="12700">
+            <a:solidFill>
+              <a:srgbClr val="E2E8F0"/>
+            </a:solidFill>
+          </a:ln>
+        </p:spPr>
+        <p:style>
+          <a:lnRef idx="1">
+            <a:schemeClr val="accent1"/>
+          </a:lnRef>
+          <a:fillRef idx="3">
+            <a:schemeClr val="accent1"/>
+          </a:fillRef>
+          <a:effectRef idx="2">
+            <a:schemeClr val="accent1"/>
+          </a:effectRef>
+          <a:fontRef idx="minor">
+            <a:schemeClr val="lt1"/>
+          </a:fontRef>
+        </p:style>
+        <p:txBody>
+          <a:bodyPr rtlCol="0" anchor="ctr"/>
+          <a:lstStyle/>
+          <a:p>
+            <a:pPr algn="ctr"/>
+          </a:p>
+        </p:txBody>
+      </p:sp>
+      <p:sp>
+        <p:nvSpPr>
+          <p:cNvPr id="6" name="TextBox 5"/>
           <p:cNvSpPr txBox="1"/>
           <p:nvPr/>
         </p:nvSpPr>
         <p:spPr>
           <a:xfrm>
-            <a:off x="731520" y="1371600"/>
-            <a:ext cx="10698480" cy="5029200"/>
+            <a:off x="6400800" y="1554480"/>
+            <a:ext cx="4846320" cy="4572000"/>
           </a:xfrm>
           <a:prstGeom prst="rect">
             <a:avLst/>
@@ -4728,89 +8917,610 @@
           <a:noFill/>
         </p:spPr>
         <p:txBody>
-          <a:bodyPr wrap="square">
+          <a:bodyPr wrap="square" lIns="0" tIns="0" rIns="0" bIns="0">
             <a:spAutoFit/>
           </a:bodyPr>
           <a:lstStyle/>
           <a:p>
             <a:pPr>
-              <a:spcBef>
-                <a:spcPts val="1000"/>
-              </a:spcBef>
-              <a:defRPr sz="1500" b="1">
+              <a:spcAft>
+                <a:spcPts val="800"/>
+              </a:spcAft>
+            </a:pPr>
+            <a:r>
+              <a:rPr b="1" sz="1200">
+                <a:solidFill>
+                  <a:srgbClr val="6366F1"/>
+                </a:solidFill>
+              </a:rPr>
+              <a:t>SQLite WAL Mode &amp; High-Concurrency Mechanics</a:t>
+            </a:r>
+          </a:p>
+          <a:p>
+            <a:pPr>
+              <a:spcAft>
+                <a:spcPts val="400"/>
+              </a:spcAft>
+              <a:defRPr sz="1000"/>
+            </a:pPr>
+            <a:r>
+              <a:rPr b="1">
+                <a:solidFill>
+                  <a:srgbClr val="1E293B"/>
+                </a:solidFill>
+              </a:rPr>
+              <a:t>Write-Ahead Logging (WAL): </a:t>
+            </a:r>
+            <a:r>
+              <a:rPr>
+                <a:solidFill>
+                  <a:srgbClr val="1E293B"/>
+                </a:solidFill>
+              </a:rPr>
+              <a:t>Configured via PRAGMA journal_mode=WAL enabling concurrent non-blocking reads during writes.</a:t>
+            </a:r>
+          </a:p>
+          <a:p>
+            <a:pPr>
+              <a:spcAft>
+                <a:spcPts val="400"/>
+              </a:spcAft>
+              <a:defRPr sz="1000"/>
+            </a:pPr>
+            <a:r>
+              <a:rPr b="1">
+                <a:solidFill>
+                  <a:srgbClr val="1E293B"/>
+                </a:solidFill>
+              </a:rPr>
+              <a:t>Synchronous Normal PRAGMA: </a:t>
+            </a:r>
+            <a:r>
+              <a:rPr>
+                <a:solidFill>
+                  <a:srgbClr val="1E293B"/>
+                </a:solidFill>
+              </a:rPr>
+              <a:t>Optimized disk synchronization guaranteeing ACID integrity without excessive fsync() overhead.</a:t>
+            </a:r>
+          </a:p>
+          <a:p>
+            <a:pPr>
+              <a:spcAft>
+                <a:spcPts val="400"/>
+              </a:spcAft>
+              <a:defRPr sz="1000"/>
+            </a:pPr>
+            <a:r>
+              <a:rPr b="1">
+                <a:solidFill>
+                  <a:srgbClr val="1E293B"/>
+                </a:solidFill>
+              </a:rPr>
+              <a:t>Foreign Keys Enforcement: </a:t>
+            </a:r>
+            <a:r>
+              <a:rPr>
+                <a:solidFill>
+                  <a:srgbClr val="1E293B"/>
+                </a:solidFill>
+              </a:rPr>
+              <a:t>PRAGMA foreign_keys=ON maintaining referential integrity across all inspection relational entities.</a:t>
+            </a:r>
+          </a:p>
+          <a:p>
+            <a:pPr>
+              <a:spcAft>
+                <a:spcPts val="400"/>
+              </a:spcAft>
+              <a:defRPr sz="1000"/>
+            </a:pPr>
+            <a:r>
+              <a:rPr b="1">
+                <a:solidFill>
+                  <a:srgbClr val="1E293B"/>
+                </a:solidFill>
+              </a:rPr>
+              <a:t>Thread-Safe Session Local: </a:t>
+            </a:r>
+            <a:r>
+              <a:rPr>
+                <a:solidFill>
+                  <a:srgbClr val="1E293B"/>
+                </a:solidFill>
+              </a:rPr>
+              <a:t>Scoped session management preventing cross-thread race conditions during parallel scan operations.</a:t>
+            </a:r>
+          </a:p>
+          <a:p>
+            <a:pPr>
+              <a:spcAft>
+                <a:spcPts val="400"/>
+              </a:spcAft>
+              <a:defRPr sz="1000"/>
+            </a:pPr>
+            <a:r>
+              <a:rPr b="1">
+                <a:solidFill>
+                  <a:srgbClr val="1E293B"/>
+                </a:solidFill>
+              </a:rPr>
+              <a:t>Automated Initialization: </a:t>
+            </a:r>
+            <a:r>
+              <a:rPr>
+                <a:solidFill>
+                  <a:srgbClr val="1E293B"/>
+                </a:solidFill>
+              </a:rPr>
+              <a:t>Database bootstrap automatically initializes schema, seeds templates, and injects Genesis Block #0.</a:t>
+            </a:r>
+          </a:p>
+        </p:txBody>
+      </p:sp>
+    </p:spTree>
+  </p:cSld>
+  <p:clrMapOvr>
+    <a:masterClrMapping/>
+  </p:clrMapOvr>
+</p:sld>
+</file>
+
+<file path=ppt/slides/slide9.xml><?xml version="1.0" encoding="utf-8"?>
+<p:sld xmlns:a="http://schemas.openxmlformats.org/drawingml/2006/main" xmlns:p="http://schemas.openxmlformats.org/presentationml/2006/main" xmlns:r="http://schemas.openxmlformats.org/officeDocument/2006/relationships">
+  <p:cSld>
+    <p:spTree>
+      <p:nvGrpSpPr>
+        <p:cNvPr id="1" name=""/>
+        <p:cNvGrpSpPr/>
+        <p:nvPr/>
+      </p:nvGrpSpPr>
+      <p:grpSpPr/>
+      <p:sp>
+        <p:nvSpPr>
+          <p:cNvPr id="2" name="TextBox 1"/>
+          <p:cNvSpPr txBox="1"/>
+          <p:nvPr/>
+        </p:nvSpPr>
+        <p:spPr>
+          <a:xfrm>
+            <a:off x="731520" y="365760"/>
+            <a:ext cx="10728655" cy="822960"/>
+          </a:xfrm>
+          <a:prstGeom prst="rect">
+            <a:avLst/>
+          </a:prstGeom>
+          <a:noFill/>
+        </p:spPr>
+        <p:txBody>
+          <a:bodyPr wrap="square" lIns="0" tIns="0" rIns="0" bIns="0">
+            <a:spAutoFit/>
+          </a:bodyPr>
+          <a:lstStyle/>
+          <a:p>
+            <a:r>
+              <a:rPr b="1" sz="1000">
+                <a:solidFill>
+                  <a:srgbClr val="6366F1"/>
+                </a:solidFill>
+              </a:rPr>
+              <a:t>SECURITY &amp; COMPLIANCE • PROJECT-046</a:t>
+            </a:r>
+          </a:p>
+          <a:p>
+            <a:r>
+              <a:rPr b="1" sz="2000">
                 <a:solidFill>
                   <a:srgbClr val="0F172A"/>
                 </a:solidFill>
-              </a:defRPr>
-            </a:pPr>
-            <a:r>
-              <a:t>■ Project Accomplishments</a:t>
-            </a:r>
-          </a:p>
-          <a:p>
-            <a:pPr>
-              <a:defRPr sz="1300">
-                <a:solidFill>
-                  <a:srgbClr val="475569"/>
-                </a:solidFill>
-              </a:defRPr>
-            </a:pPr>
-            <a:r>
-              <a:t>Engineered a robust, end-to-end prototype validating the initial abstract with reproducible experiments.</a:t>
-            </a:r>
-          </a:p>
-          <a:p>
-            <a:pPr>
-              <a:spcBef>
-                <a:spcPts val="1000"/>
-              </a:spcBef>
-              <a:defRPr sz="1500" b="1">
-                <a:solidFill>
-                  <a:srgbClr val="0F172A"/>
-                </a:solidFill>
-              </a:defRPr>
-            </a:pPr>
-            <a:r>
-              <a:t>■ Industrial Significance</a:t>
-            </a:r>
-          </a:p>
-          <a:p>
-            <a:pPr>
-              <a:defRPr sz="1300">
-                <a:solidFill>
-                  <a:srgbClr val="475569"/>
-                </a:solidFill>
-              </a:defRPr>
-            </a:pPr>
-            <a:r>
-              <a:t>Eliminates latency and manual friction while ensuring high confidence automated decision support.</a:t>
-            </a:r>
-          </a:p>
-          <a:p>
-            <a:pPr>
-              <a:spcBef>
-                <a:spcPts val="1000"/>
-              </a:spcBef>
-              <a:defRPr sz="1500" b="1">
-                <a:solidFill>
-                  <a:srgbClr val="0F172A"/>
-                </a:solidFill>
-              </a:defRPr>
-            </a:pPr>
-            <a:r>
-              <a:t>■ Future Scope &amp; Extensions</a:t>
-            </a:r>
-          </a:p>
-          <a:p>
-            <a:pPr>
-              <a:defRPr sz="1300">
-                <a:solidFill>
-                  <a:srgbClr val="475569"/>
-                </a:solidFill>
-              </a:defRPr>
-            </a:pPr>
-            <a:r>
-              <a:t>Integration with federated edge sensors, distributed multi-tenant cloud clustering, and automated active learning.</a:t>
+              </a:rPr>
+              <a:t>Cryptographic Audit Trail: SHA-256 Non-Repudiation Ledger</a:t>
+            </a:r>
+          </a:p>
+        </p:txBody>
+      </p:sp>
+      <p:sp>
+        <p:nvSpPr>
+          <p:cNvPr id="3" name="Rectangle 2"/>
+          <p:cNvSpPr/>
+          <p:nvPr/>
+        </p:nvSpPr>
+        <p:spPr>
+          <a:xfrm>
+            <a:off x="731520" y="1371600"/>
+            <a:ext cx="5212080" cy="4937760"/>
+          </a:xfrm>
+          <a:prstGeom prst="rect">
+            <a:avLst/>
+          </a:prstGeom>
+          <a:solidFill>
+            <a:srgbClr val="FFFFFF"/>
+          </a:solidFill>
+          <a:ln w="12700">
+            <a:solidFill>
+              <a:srgbClr val="E2E8F0"/>
+            </a:solidFill>
+          </a:ln>
+        </p:spPr>
+        <p:style>
+          <a:lnRef idx="1">
+            <a:schemeClr val="accent1"/>
+          </a:lnRef>
+          <a:fillRef idx="3">
+            <a:schemeClr val="accent1"/>
+          </a:fillRef>
+          <a:effectRef idx="2">
+            <a:schemeClr val="accent1"/>
+          </a:effectRef>
+          <a:fontRef idx="minor">
+            <a:schemeClr val="lt1"/>
+          </a:fontRef>
+        </p:style>
+        <p:txBody>
+          <a:bodyPr rtlCol="0" anchor="ctr"/>
+          <a:lstStyle/>
+          <a:p>
+            <a:pPr algn="ctr"/>
+          </a:p>
+        </p:txBody>
+      </p:sp>
+      <p:sp>
+        <p:nvSpPr>
+          <p:cNvPr id="4" name="TextBox 3"/>
+          <p:cNvSpPr txBox="1"/>
+          <p:nvPr/>
+        </p:nvSpPr>
+        <p:spPr>
+          <a:xfrm>
+            <a:off x="914400" y="1554480"/>
+            <a:ext cx="4846320" cy="4572000"/>
+          </a:xfrm>
+          <a:prstGeom prst="rect">
+            <a:avLst/>
+          </a:prstGeom>
+          <a:noFill/>
+        </p:spPr>
+        <p:txBody>
+          <a:bodyPr wrap="square" lIns="0" tIns="0" rIns="0" bIns="0">
+            <a:spAutoFit/>
+          </a:bodyPr>
+          <a:lstStyle/>
+          <a:p>
+            <a:pPr>
+              <a:spcAft>
+                <a:spcPts val="800"/>
+              </a:spcAft>
+            </a:pPr>
+            <a:r>
+              <a:rPr b="1" sz="1200">
+                <a:solidFill>
+                  <a:srgbClr val="6366F1"/>
+                </a:solidFill>
+              </a:rPr>
+              <a:t>Blockchain-Inspired Audit Hash Chaining</a:t>
+            </a:r>
+          </a:p>
+          <a:p>
+            <a:pPr>
+              <a:spcAft>
+                <a:spcPts val="400"/>
+              </a:spcAft>
+              <a:defRPr sz="1000"/>
+            </a:pPr>
+            <a:r>
+              <a:rPr b="1">
+                <a:solidFill>
+                  <a:srgbClr val="1E293B"/>
+                </a:solidFill>
+              </a:rPr>
+              <a:t>Genesis Block Seeding: </a:t>
+            </a:r>
+            <a:r>
+              <a:rPr>
+                <a:solidFill>
+                  <a:srgbClr val="1E293B"/>
+                </a:solidFill>
+              </a:rPr>
+              <a:t>Block #0 seeded during database initialization with previous_hash set to 64 consecutive zeros.</a:t>
+            </a:r>
+          </a:p>
+          <a:p>
+            <a:pPr>
+              <a:spcAft>
+                <a:spcPts val="400"/>
+              </a:spcAft>
+              <a:defRPr sz="1000"/>
+            </a:pPr>
+            <a:r>
+              <a:rPr b="1">
+                <a:solidFill>
+                  <a:srgbClr val="1E293B"/>
+                </a:solidFill>
+              </a:rPr>
+              <a:t>SHA-256 Chaining Formula: </a:t>
+            </a:r>
+            <a:r>
+              <a:rPr>
+                <a:solidFill>
+                  <a:srgbClr val="1E293B"/>
+                </a:solidFill>
+              </a:rPr>
+              <a:t>Current Hash = SHA256(Action | Details | Timestamp | Previous Hash).</a:t>
+            </a:r>
+          </a:p>
+          <a:p>
+            <a:pPr>
+              <a:spcAft>
+                <a:spcPts val="400"/>
+              </a:spcAft>
+              <a:defRPr sz="1000"/>
+            </a:pPr>
+            <a:r>
+              <a:rPr b="1">
+                <a:solidFill>
+                  <a:srgbClr val="1E293B"/>
+                </a:solidFill>
+              </a:rPr>
+              <a:t>Strict Hash Continuity: </a:t>
+            </a:r>
+            <a:r>
+              <a:rPr>
+                <a:solidFill>
+                  <a:srgbClr val="1E293B"/>
+                </a:solidFill>
+              </a:rPr>
+              <a:t>Every new inspection or configuration event cryptographically encapsulates the exact hash of the preceding block.</a:t>
+            </a:r>
+          </a:p>
+          <a:p>
+            <a:pPr>
+              <a:spcAft>
+                <a:spcPts val="400"/>
+              </a:spcAft>
+              <a:defRPr sz="1000"/>
+            </a:pPr>
+            <a:r>
+              <a:rPr b="1">
+                <a:solidFill>
+                  <a:srgbClr val="1E293B"/>
+                </a:solidFill>
+              </a:rPr>
+              <a:t>Tamper-Proof Ledger: </a:t>
+            </a:r>
+            <a:r>
+              <a:rPr>
+                <a:solidFill>
+                  <a:srgbClr val="1E293B"/>
+                </a:solidFill>
+              </a:rPr>
+              <a:t>Any unauthorized alteration to historic database records invalidates the hash chain at and after that block.</a:t>
+            </a:r>
+          </a:p>
+          <a:p>
+            <a:pPr>
+              <a:spcAft>
+                <a:spcPts val="400"/>
+              </a:spcAft>
+              <a:defRPr sz="1000"/>
+            </a:pPr>
+            <a:r>
+              <a:rPr b="1">
+                <a:solidFill>
+                  <a:srgbClr val="1E293B"/>
+                </a:solidFill>
+              </a:rPr>
+              <a:t>Audit Verification API: </a:t>
+            </a:r>
+            <a:r>
+              <a:rPr>
+                <a:solidFill>
+                  <a:srgbClr val="1E293B"/>
+                </a:solidFill>
+              </a:rPr>
+              <a:t>GET /api/inspection/audit-logs returns complete verifiable cryptographic block history.</a:t>
+            </a:r>
+          </a:p>
+        </p:txBody>
+      </p:sp>
+      <p:sp>
+        <p:nvSpPr>
+          <p:cNvPr id="5" name="Rectangle 4"/>
+          <p:cNvSpPr/>
+          <p:nvPr/>
+        </p:nvSpPr>
+        <p:spPr>
+          <a:xfrm>
+            <a:off x="6217920" y="1371600"/>
+            <a:ext cx="5212080" cy="4937760"/>
+          </a:xfrm>
+          <a:prstGeom prst="rect">
+            <a:avLst/>
+          </a:prstGeom>
+          <a:solidFill>
+            <a:srgbClr val="FFFFFF"/>
+          </a:solidFill>
+          <a:ln w="12700">
+            <a:solidFill>
+              <a:srgbClr val="E2E8F0"/>
+            </a:solidFill>
+          </a:ln>
+        </p:spPr>
+        <p:style>
+          <a:lnRef idx="1">
+            <a:schemeClr val="accent1"/>
+          </a:lnRef>
+          <a:fillRef idx="3">
+            <a:schemeClr val="accent1"/>
+          </a:fillRef>
+          <a:effectRef idx="2">
+            <a:schemeClr val="accent1"/>
+          </a:effectRef>
+          <a:fontRef idx="minor">
+            <a:schemeClr val="lt1"/>
+          </a:fontRef>
+        </p:style>
+        <p:txBody>
+          <a:bodyPr rtlCol="0" anchor="ctr"/>
+          <a:lstStyle/>
+          <a:p>
+            <a:pPr algn="ctr"/>
+          </a:p>
+        </p:txBody>
+      </p:sp>
+      <p:sp>
+        <p:nvSpPr>
+          <p:cNvPr id="6" name="TextBox 5"/>
+          <p:cNvSpPr txBox="1"/>
+          <p:nvPr/>
+        </p:nvSpPr>
+        <p:spPr>
+          <a:xfrm>
+            <a:off x="6400800" y="1554480"/>
+            <a:ext cx="4846320" cy="4572000"/>
+          </a:xfrm>
+          <a:prstGeom prst="rect">
+            <a:avLst/>
+          </a:prstGeom>
+          <a:noFill/>
+        </p:spPr>
+        <p:txBody>
+          <a:bodyPr wrap="square" lIns="0" tIns="0" rIns="0" bIns="0">
+            <a:spAutoFit/>
+          </a:bodyPr>
+          <a:lstStyle/>
+          <a:p>
+            <a:pPr>
+              <a:spcAft>
+                <a:spcPts val="800"/>
+              </a:spcAft>
+            </a:pPr>
+            <a:r>
+              <a:rPr b="1" sz="1200">
+                <a:solidFill>
+                  <a:srgbClr val="6366F1"/>
+                </a:solidFill>
+              </a:rPr>
+              <a:t>Deterministic Evidence Hashes &amp; ISO 9001 Compliance</a:t>
+            </a:r>
+          </a:p>
+          <a:p>
+            <a:pPr>
+              <a:spcAft>
+                <a:spcPts val="400"/>
+              </a:spcAft>
+              <a:defRPr sz="1000"/>
+            </a:pPr>
+            <a:r>
+              <a:rPr b="1">
+                <a:solidFill>
+                  <a:srgbClr val="1E293B"/>
+                </a:solidFill>
+              </a:rPr>
+              <a:t>Inspection Evidence Hash: </a:t>
+            </a:r>
+            <a:r>
+              <a:rPr>
+                <a:solidFill>
+                  <a:srgbClr val="1E293B"/>
+                </a:solidFill>
+              </a:rPr>
+              <a:t>Every inspected part receives an immutable SHA-256 evidence fingerprint computed from its physical metrics.</a:t>
+            </a:r>
+          </a:p>
+          <a:p>
+            <a:pPr>
+              <a:spcAft>
+                <a:spcPts val="400"/>
+              </a:spcAft>
+              <a:defRPr sz="1000"/>
+            </a:pPr>
+            <a:r>
+              <a:rPr b="1">
+                <a:solidFill>
+                  <a:srgbClr val="1E293B"/>
+                </a:solidFill>
+              </a:rPr>
+              <a:t>Hash Formula: </a:t>
+            </a:r>
+            <a:r>
+              <a:rPr>
+                <a:solidFill>
+                  <a:srgbClr val="1E293B"/>
+                </a:solidFill>
+              </a:rPr>
+              <a:t>SHA256(Part Type : Line : Verdict : Defect : Severity : Area : Roughness : Eject Conf).</a:t>
+            </a:r>
+          </a:p>
+          <a:p>
+            <a:pPr>
+              <a:spcAft>
+                <a:spcPts val="400"/>
+              </a:spcAft>
+              <a:defRPr sz="1000"/>
+            </a:pPr>
+            <a:r>
+              <a:rPr b="1">
+                <a:solidFill>
+                  <a:srgbClr val="1E293B"/>
+                </a:solidFill>
+              </a:rPr>
+              <a:t>Traceability &amp; Non-Repudiation: </a:t>
+            </a:r>
+            <a:r>
+              <a:rPr>
+                <a:solidFill>
+                  <a:srgbClr val="1E293B"/>
+                </a:solidFill>
+              </a:rPr>
+              <a:t>Guarantees that quality inspection verdicts cannot be altered or falsified retroactively.</a:t>
+            </a:r>
+          </a:p>
+          <a:p>
+            <a:pPr>
+              <a:spcAft>
+                <a:spcPts val="400"/>
+              </a:spcAft>
+              <a:defRPr sz="1000"/>
+            </a:pPr>
+            <a:r>
+              <a:rPr b="1">
+                <a:solidFill>
+                  <a:srgbClr val="1E293B"/>
+                </a:solidFill>
+              </a:rPr>
+              <a:t>Regulatory Compliance: </a:t>
+            </a:r>
+            <a:r>
+              <a:rPr>
+                <a:solidFill>
+                  <a:srgbClr val="1E293B"/>
+                </a:solidFill>
+              </a:rPr>
+              <a:t>Meets strict automotive (IATF 16949) and aerospace (AS9100) digital traceability requirements.</a:t>
+            </a:r>
+          </a:p>
+          <a:p>
+            <a:pPr>
+              <a:spcAft>
+                <a:spcPts val="400"/>
+              </a:spcAft>
+              <a:defRPr sz="1000"/>
+            </a:pPr>
+            <a:r>
+              <a:rPr b="1">
+                <a:solidFill>
+                  <a:srgbClr val="1E293B"/>
+                </a:solidFill>
+              </a:rPr>
+              <a:t>Automated Tamper Test: </a:t>
+            </a:r>
+            <a:r>
+              <a:rPr>
+                <a:solidFill>
+                  <a:srgbClr val="1E293B"/>
+                </a:solidFill>
+              </a:rPr>
+              <a:t>QA test suite includes bit-level tamper test verifying that modifying a single character causes hash mismatch.</a:t>
             </a:r>
           </a:p>
         </p:txBody>
